--- a/public/templates/problem-solution-basic.pptx
+++ b/public/templates/problem-solution-basic.pptx
@@ -15,10 +15,9 @@
     <p:sldId id="263" r:id="rId9"/>
     <p:sldId id="264" r:id="rId10"/>
     <p:sldId id="265" r:id="rId11"/>
-    <p:sldId id="266" r:id="rId12"/>
   </p:sldIdLst>
   <p:notesMasterIdLst>
-    <p:notesMasterId r:id="rId13"/>
+    <p:notesMasterId r:id="rId12"/>
   </p:notesMasterIdLst>
   <p:sldSz cx="9144000" cy="5143500"/>
   <p:notesSz cx="5143500" cy="9144000"/>
@@ -600,12 +599,7 @@
           <a:p>
             <a:r>
               <a:rPr lang="en-US" dirty="0"/>
-              <a:t>Instructions for "Team" slide:
-Founder names and roles
-Relevant experience
-Domain expertise
-Advisor/investor names if notable
-Replace this content with your own information.</a:t>
+              <a:t/>
             </a:r>
             <a:endParaRPr lang="en-US" dirty="0"/>
           </a:p>
@@ -629,99 +623,6 @@
             <a:fld id="{F7021451-1387-4CA6-816F-3879F97B5CBC}" type="slidenum">
               <a:rPr lang="en-US"/>
               <a:t>10</a:t>
-            </a:fld>
-            <a:endParaRPr lang="en-US"/>
-          </a:p>
-        </p:txBody>
-      </p:sp>
-    </p:spTree>
-    <p:extLst>
-      <p:ext uri="{BB962C8B-B14F-4D97-AF65-F5344CB8AC3E}">
-        <p14:creationId xmlns:p14="http://schemas.microsoft.com/office/powerpoint/2010/main" val="1024086991"/>
-      </p:ext>
-    </p:extLst>
-  </p:cSld>
-  <p:clrMapOvr>
-    <a:masterClrMapping/>
-  </p:clrMapOvr>
-</p:notes>
-</file>
-
-<file path=ppt/notesSlides/notesSlide11.xml><?xml version="1.0" encoding="utf-8"?>
-<p:notes xmlns:a="http://schemas.openxmlformats.org/drawingml/2006/main" xmlns:r="http://schemas.openxmlformats.org/officeDocument/2006/relationships" xmlns:p="http://schemas.openxmlformats.org/presentationml/2006/main">
-  <p:cSld>
-    <p:spTree>
-      <p:nvGrpSpPr>
-        <p:cNvPr id="1" name=""/>
-        <p:cNvGrpSpPr/>
-        <p:nvPr/>
-      </p:nvGrpSpPr>
-      <p:grpSpPr>
-        <a:xfrm>
-          <a:off x="0" y="0"/>
-          <a:ext cx="0" cy="0"/>
-          <a:chOff x="0" y="0"/>
-          <a:chExt cx="0" cy="0"/>
-        </a:xfrm>
-      </p:grpSpPr>
-      <p:sp>
-        <p:nvSpPr>
-          <p:cNvPr id="2" name="Slide Image Placeholder 1"/>
-          <p:cNvSpPr>
-            <a:spLocks noGrp="1" noRot="1" noChangeAspect="1"/>
-          </p:cNvSpPr>
-          <p:nvPr>
-            <p:ph type="sldImg"/>
-          </p:nvPr>
-        </p:nvSpPr>
-        <p:spPr/>
-      </p:sp>
-      <p:sp>
-        <p:nvSpPr>
-          <p:cNvPr id="3" name="Notes Placeholder 2"/>
-          <p:cNvSpPr>
-            <a:spLocks noGrp="1"/>
-          </p:cNvSpPr>
-          <p:nvPr>
-            <p:ph type="body" idx="1"/>
-          </p:nvPr>
-        </p:nvSpPr>
-        <p:spPr/>
-        <p:txBody>
-          <a:bodyPr/>
-          <a:lstStyle/>
-          <a:p>
-            <a:r>
-              <a:rPr lang="en-US" dirty="0"/>
-              <a:t>Instructions for "Ask" slide:
-Amount raising
-Use of funds breakdown
-Milestones to be achieved
-Timeline
-Replace this content with your own information.</a:t>
-            </a:r>
-            <a:endParaRPr lang="en-US" dirty="0"/>
-          </a:p>
-        </p:txBody>
-      </p:sp>
-      <p:sp>
-        <p:nvSpPr>
-          <p:cNvPr id="4" name="Slide Number Placeholder 3"/>
-          <p:cNvSpPr>
-            <a:spLocks noGrp="1"/>
-          </p:cNvSpPr>
-          <p:nvPr>
-            <p:ph type="sldNum" sz="quarter" idx="10"/>
-          </p:nvPr>
-        </p:nvSpPr>
-        <p:spPr/>
-        <p:txBody>
-          <a:bodyPr/>
-          <a:lstStyle/>
-          <a:p>
-            <a:fld id="{F7021451-1387-4CA6-816F-3879F97B5CBC}" type="slidenum">
-              <a:rPr lang="en-US"/>
-              <a:t>11</a:t>
             </a:fld>
             <a:endParaRPr lang="en-US"/>
           </a:p>
@@ -786,12 +687,7 @@
           <a:p>
             <a:r>
               <a:rPr lang="en-US" dirty="0"/>
-              <a:t>Instructions for "Cover Slide" slide:
-Company name and logo
-One-sentence tagline
-Your name and contact info
-Date (optional)
-Replace this content with your own information.</a:t>
+              <a:t/>
             </a:r>
             <a:endParaRPr lang="en-US" dirty="0"/>
           </a:p>
@@ -879,12 +775,7 @@
           <a:p>
             <a:r>
               <a:rPr lang="en-US" dirty="0"/>
-              <a:t>Instructions for "Problem" slide:
-State the problem clearly in 1-2 sentences
-Show the impact (cost, time, frustration)
-Use a relatable example or story
-Avoid jargon - make it universal
-Replace this content with your own information.</a:t>
+              <a:t/>
             </a:r>
             <a:endParaRPr lang="en-US" dirty="0"/>
           </a:p>
@@ -972,12 +863,7 @@
           <a:p>
             <a:r>
               <a:rPr lang="en-US" dirty="0"/>
-              <a:t>Instructions for "Solution" slide:
-Explain how you solve the problem
-Focus on benefits, not features
-Make it crystal clear what you do
-Use simple language
-Replace this content with your own information.</a:t>
+              <a:t/>
             </a:r>
             <a:endParaRPr lang="en-US" dirty="0"/>
           </a:p>
@@ -1065,12 +951,7 @@
           <a:p>
             <a:r>
               <a:rPr lang="en-US" dirty="0"/>
-              <a:t>Instructions for "Market Opportunity" slide:
-TAM, SAM, SOM breakdown
-Market growth trends
-Target customer segment size
-Cite credible sources
-Replace this content with your own information.</a:t>
+              <a:t/>
             </a:r>
             <a:endParaRPr lang="en-US" dirty="0"/>
           </a:p>
@@ -1158,12 +1039,7 @@
           <a:p>
             <a:r>
               <a:rPr lang="en-US" dirty="0"/>
-              <a:t>Instructions for "Product" slide:
-Key features and benefits
-How it works (simplified)
-Unique value proposition
-Technology/innovation if relevant
-Replace this content with your own information.</a:t>
+              <a:t/>
             </a:r>
             <a:endParaRPr lang="en-US" dirty="0"/>
           </a:p>
@@ -1251,13 +1127,7 @@
           <a:p>
             <a:r>
               <a:rPr lang="en-US" dirty="0"/>
-              <a:t>Instructions for "Traction" slide:
-User/customer metrics
-Revenue if applicable
-Growth rate
-Key milestones achieved
-Customer testimonials or logos
-Replace this content with your own information.</a:t>
+              <a:t/>
             </a:r>
             <a:endParaRPr lang="en-US" dirty="0"/>
           </a:p>
@@ -1345,13 +1215,7 @@
           <a:p>
             <a:r>
               <a:rPr lang="en-US" dirty="0"/>
-              <a:t>Instructions for "Business Model" slide:
-Revenue streams
-Pricing strategy
-Unit economics
-Customer acquisition cost (CAC)
-Lifetime value (LTV)
-Replace this content with your own information.</a:t>
+              <a:t/>
             </a:r>
             <a:endParaRPr lang="en-US" dirty="0"/>
           </a:p>
@@ -1439,12 +1303,7 @@
           <a:p>
             <a:r>
               <a:rPr lang="en-US" dirty="0"/>
-              <a:t>Instructions for "Competition" slide:
-Main competitors
-Your differentiation
-Competitive advantages
-Market positioning
-Replace this content with your own information.</a:t>
+              <a:t/>
             </a:r>
             <a:endParaRPr lang="en-US" dirty="0"/>
           </a:p>
@@ -1516,74 +1375,6 @@
 </p:sldLayout>
 </file>
 
-<file path=ppt/slideLayouts/slideLayout2.xml><?xml version="1.0" encoding="utf-8"?>
-<p:sldLayout xmlns:a="http://schemas.openxmlformats.org/drawingml/2006/main" xmlns:r="http://schemas.openxmlformats.org/officeDocument/2006/relationships" xmlns:p="http://schemas.openxmlformats.org/presentationml/2006/main" preserve="1">
-  <p:cSld name="MASTER_SLIDE">
-    <p:bg>
-      <p:bgPr>
-        <a:solidFill>
-          <a:srgbClr val="FFFFFF"/>
-        </a:solidFill>
-      </p:bgPr>
-    </p:bg>
-    <p:spTree>
-      <p:nvGrpSpPr>
-        <p:cNvPr id="1" name=""/>
-        <p:cNvGrpSpPr/>
-        <p:nvPr/>
-      </p:nvGrpSpPr>
-      <p:grpSpPr>
-        <a:xfrm>
-          <a:off x="0" y="0"/>
-          <a:ext cx="0" cy="0"/>
-          <a:chOff x="0" y="0"/>
-          <a:chExt cx="0" cy="0"/>
-        </a:xfrm>
-      </p:grpSpPr>
-      <p:sp>
-        <p:nvSpPr>
-          <p:cNvPr id="2" name="Text 0"/>
-          <p:cNvSpPr/>
-          <p:nvPr/>
-        </p:nvSpPr>
-        <p:spPr>
-          <a:xfrm>
-            <a:off x="457200" y="6217920"/>
-            <a:ext cx="8229600" cy="274320"/>
-          </a:xfrm>
-          <a:prstGeom prst="rect">
-            <a:avLst/>
-          </a:prstGeom>
-          <a:noFill/>
-          <a:ln/>
-        </p:spPr>
-        <p:txBody>
-          <a:bodyPr wrap="square" rtlCol="0" anchor="ctr"/>
-          <a:lstStyle/>
-          <a:p>
-            <a:pPr algn="r" indent="0" marL="0">
-              <a:buNone/>
-            </a:pPr>
-            <a:r>
-              <a:rPr lang="en-US" sz="1000" dirty="0">
-                <a:solidFill>
-                  <a:srgbClr val="666666"/>
-                </a:solidFill>
-              </a:rPr>
-              <a:t>Creatives Takeover</a:t>
-            </a:r>
-            <a:endParaRPr lang="en-US" sz="1000" dirty="0"/>
-          </a:p>
-        </p:txBody>
-      </p:sp>
-    </p:spTree>
-  </p:cSld>
-  <p:clrMapOvr>
-    <a:masterClrMapping/>
-  </p:clrMapOvr>
-</p:sldLayout>
-</file>
-
 <file path=ppt/slideMasters/slideMaster1.xml><?xml version="1.0" encoding="utf-8"?>
 <p:sldMaster xmlns:a="http://schemas.openxmlformats.org/drawingml/2006/main" xmlns:r="http://schemas.openxmlformats.org/officeDocument/2006/relationships" xmlns:p="http://schemas.openxmlformats.org/presentationml/2006/main">
   <p:cSld>
@@ -1606,7 +1397,6 @@
   <p:clrMap bg1="lt1" tx1="dk1" bg2="lt2" tx2="dk2" accent1="accent1" accent2="accent2" accent3="accent3" accent4="accent4" accent5="accent5" accent6="accent6" hlink="hlink" folHlink="folHlink"/>
   <p:sldLayoutIdLst>
     <p:sldLayoutId id="2147483649" r:id="rId1"/>
-    <p:sldLayoutId id="2147483650" r:id="rId2"/>
   </p:sldLayoutIdLst>
   <p:hf sldNum="0" hdr="0" ftr="0" dt="0"/>
   <p:txStyles>
@@ -1895,7 +1685,7 @@
         <p:spPr>
           <a:xfrm>
             <a:off x="457200" y="2286000"/>
-            <a:ext cx="8229600" cy="1371600"/>
+            <a:ext cx="8229600" cy="1097280"/>
           </a:xfrm>
           <a:prstGeom prst="rect">
             <a:avLst/>
@@ -1911,14 +1701,17 @@
               <a:buNone/>
             </a:pPr>
             <a:r>
-              <a:rPr lang="en-US" sz="4400" b="1" dirty="0">
+              <a:rPr lang="en-US" sz="4800" b="1" dirty="0">
                 <a:solidFill>
                   <a:srgbClr val="FFFFFF"/>
                 </a:solidFill>
-              </a:rPr>
-              <a:t>Problem-Solution Framework</a:t>
-            </a:r>
-            <a:endParaRPr lang="en-US" sz="4400" dirty="0"/>
+                <a:latin typeface="Calibri" pitchFamily="34" charset="0"/>
+                <a:ea typeface="Calibri" pitchFamily="34" charset="-122"/>
+                <a:cs typeface="Calibri" pitchFamily="34" charset="-120"/>
+              </a:rPr>
+              <a:t>Your Company Name</a:t>
+            </a:r>
+            <a:endParaRPr lang="en-US" sz="4800" dirty="0"/>
           </a:p>
         </p:txBody>
       </p:sp>
@@ -1930,8 +1723,8 @@
         </p:nvSpPr>
         <p:spPr>
           <a:xfrm>
-            <a:off x="457200" y="3657600"/>
-            <a:ext cx="8229600" cy="457200"/>
+            <a:off x="457200" y="3474720"/>
+            <a:ext cx="8229600" cy="548640"/>
           </a:xfrm>
           <a:prstGeom prst="rect">
             <a:avLst/>
@@ -1947,14 +1740,17 @@
               <a:buNone/>
             </a:pPr>
             <a:r>
-              <a:rPr lang="en-US" sz="2000" dirty="0">
+              <a:rPr lang="en-US" sz="2400" dirty="0">
                 <a:solidFill>
                   <a:srgbClr val="38BDF8"/>
                 </a:solidFill>
-              </a:rPr>
-              <a:t>Editable Template</a:t>
-            </a:r>
-            <a:endParaRPr lang="en-US" sz="2000" dirty="0"/>
+                <a:latin typeface="Calibri" pitchFamily="34" charset="0"/>
+                <a:ea typeface="Calibri" pitchFamily="34" charset="-122"/>
+                <a:cs typeface="Calibri" pitchFamily="34" charset="-120"/>
+              </a:rPr>
+              <a:t>One-sentence tagline that describes what you do</a:t>
+            </a:r>
+            <a:endParaRPr lang="en-US" sz="2400" dirty="0"/>
           </a:p>
         </p:txBody>
       </p:sp>
@@ -1966,8 +1762,8 @@
         </p:nvSpPr>
         <p:spPr>
           <a:xfrm>
-            <a:off x="457200" y="4297680"/>
-            <a:ext cx="8229600" cy="274320"/>
+            <a:off x="457200" y="5029200"/>
+            <a:ext cx="8229600" cy="914400"/>
           </a:xfrm>
           <a:prstGeom prst="rect">
             <a:avLst/>
@@ -1980,17 +1776,63 @@
           <a:lstStyle/>
           <a:p>
             <a:pPr algn="ctr" indent="0" marL="0">
-              <a:buNone/>
-            </a:pPr>
-            <a:r>
-              <a:rPr lang="en-US" sz="1400" dirty="0">
-                <a:solidFill>
-                  <a:srgbClr val="CCCCCC"/>
-                </a:solidFill>
-              </a:rPr>
-              <a:t>Created by Creatives Takeover</a:t>
-            </a:r>
-            <a:endParaRPr lang="en-US" sz="1400" dirty="0"/>
+              <a:lnSpc>
+                <a:spcPts val="2400"/>
+              </a:lnSpc>
+              <a:buNone/>
+            </a:pPr>
+            <a:r>
+              <a:rPr lang="en-US" sz="1600" dirty="0">
+                <a:solidFill>
+                  <a:srgbClr val="FFFFFF"/>
+                </a:solidFill>
+                <a:latin typeface="Calibri" pitchFamily="34" charset="0"/>
+                <a:ea typeface="Calibri" pitchFamily="34" charset="-122"/>
+                <a:cs typeface="Calibri" pitchFamily="34" charset="-120"/>
+              </a:rPr>
+              <a:t>[Your Name]</a:t>
+            </a:r>
+            <a:endParaRPr lang="en-US" sz="1600" dirty="0"/>
+          </a:p>
+          <a:p>
+            <a:pPr algn="ctr" indent="0" marL="0">
+              <a:lnSpc>
+                <a:spcPts val="2400"/>
+              </a:lnSpc>
+              <a:buNone/>
+            </a:pPr>
+            <a:r>
+              <a:rPr lang="en-US" sz="1600" dirty="0">
+                <a:solidFill>
+                  <a:srgbClr val="FFFFFF"/>
+                </a:solidFill>
+                <a:latin typeface="Calibri" pitchFamily="34" charset="0"/>
+                <a:ea typeface="Calibri" pitchFamily="34" charset="-122"/>
+                <a:cs typeface="Calibri" pitchFamily="34" charset="-120"/>
+              </a:rPr>
+              <a:t>[Email]</a:t>
+            </a:r>
+            <a:endParaRPr lang="en-US" sz="1600" dirty="0"/>
+          </a:p>
+          <a:p>
+            <a:pPr algn="ctr" indent="0" marL="0">
+              <a:lnSpc>
+                <a:spcPts val="2400"/>
+              </a:lnSpc>
+              <a:buNone/>
+            </a:pPr>
+            <a:r>
+              <a:rPr lang="en-US" sz="1600" dirty="0">
+                <a:solidFill>
+                  <a:srgbClr val="FFFFFF"/>
+                </a:solidFill>
+                <a:latin typeface="Calibri" pitchFamily="34" charset="0"/>
+                <a:ea typeface="Calibri" pitchFamily="34" charset="-122"/>
+                <a:cs typeface="Calibri" pitchFamily="34" charset="-120"/>
+              </a:rPr>
+              <a:t>[Date]</a:t>
+            </a:r>
+            <a:endParaRPr lang="en-US" sz="1600" dirty="0"/>
           </a:p>
         </p:txBody>
       </p:sp>
@@ -2005,6 +1847,13 @@
 <file path=ppt/slides/slide10.xml><?xml version="1.0" encoding="utf-8"?>
 <p:sld xmlns:a="http://schemas.openxmlformats.org/drawingml/2006/main" xmlns:r="http://schemas.openxmlformats.org/officeDocument/2006/relationships" xmlns:p="http://schemas.openxmlformats.org/presentationml/2006/main">
   <p:cSld name="Slide 10">
+    <p:bg>
+      <p:bgPr>
+        <a:solidFill>
+          <a:srgbClr val="FFFFFF"/>
+        </a:solidFill>
+      </p:bgPr>
+    </p:bg>
     <p:spTree>
       <p:nvGrpSpPr>
         <p:cNvPr id="1" name=""/>
@@ -2021,14 +1870,34 @@
       </p:grpSpPr>
       <p:sp>
         <p:nvSpPr>
-          <p:cNvPr id="2" name="Text 0"/>
-          <p:cNvSpPr/>
-          <p:nvPr/>
-        </p:nvSpPr>
-        <p:spPr>
-          <a:xfrm>
-            <a:off x="457200" y="457200"/>
-            <a:ext cx="8229600" cy="685800"/>
+          <p:cNvPr id="2" name="Shape 0"/>
+          <p:cNvSpPr/>
+          <p:nvPr/>
+        </p:nvSpPr>
+        <p:spPr>
+          <a:xfrm>
+            <a:off x="0" y="0"/>
+            <a:ext cx="9144000" cy="137160"/>
+          </a:xfrm>
+          <a:prstGeom prst="rect">
+            <a:avLst/>
+          </a:prstGeom>
+          <a:solidFill>
+            <a:srgbClr val="0B1437"/>
+          </a:solidFill>
+          <a:ln/>
+        </p:spPr>
+      </p:sp>
+      <p:sp>
+        <p:nvSpPr>
+          <p:cNvPr id="3" name="Text 1"/>
+          <p:cNvSpPr/>
+          <p:nvPr/>
+        </p:nvSpPr>
+        <p:spPr>
+          <a:xfrm>
+            <a:off x="457200" y="365760"/>
+            <a:ext cx="8229600" cy="548640"/>
           </a:xfrm>
           <a:prstGeom prst="rect">
             <a:avLst/>
@@ -2048,8 +1917,11 @@
                 <a:solidFill>
                   <a:srgbClr val="0B1437"/>
                 </a:solidFill>
-              </a:rPr>
-              <a:t>Team</a:t>
+                <a:latin typeface="Calibri" pitchFamily="34" charset="0"/>
+                <a:ea typeface="Calibri" pitchFamily="34" charset="-122"/>
+                <a:cs typeface="Calibri" pitchFamily="34" charset="-120"/>
+              </a:rPr>
+              <a:t>The Ask</a:t>
             </a:r>
             <a:endParaRPr lang="en-US" sz="3200" dirty="0"/>
           </a:p>
@@ -2057,7 +1929,46 @@
       </p:sp>
       <p:sp>
         <p:nvSpPr>
-          <p:cNvPr id="3" name="Text 1"/>
+          <p:cNvPr id="4" name="Text 2"/>
+          <p:cNvSpPr/>
+          <p:nvPr/>
+        </p:nvSpPr>
+        <p:spPr>
+          <a:xfrm>
+            <a:off x="457200" y="914400"/>
+            <a:ext cx="8229600" cy="365760"/>
+          </a:xfrm>
+          <a:prstGeom prst="rect">
+            <a:avLst/>
+          </a:prstGeom>
+          <a:noFill/>
+          <a:ln/>
+        </p:spPr>
+        <p:txBody>
+          <a:bodyPr wrap="square" rtlCol="0" anchor="ctr"/>
+          <a:lstStyle/>
+          <a:p>
+            <a:pPr indent="0" marL="0">
+              <a:buNone/>
+            </a:pPr>
+            <a:r>
+              <a:rPr lang="en-US" sz="1600" i="1" dirty="0">
+                <a:solidFill>
+                  <a:srgbClr val="6B7280"/>
+                </a:solidFill>
+                <a:latin typeface="Calibri" pitchFamily="34" charset="0"/>
+                <a:ea typeface="Calibri" pitchFamily="34" charset="-122"/>
+                <a:cs typeface="Calibri" pitchFamily="34" charset="-120"/>
+              </a:rPr>
+              <a:t>What are you raising and why?</a:t>
+            </a:r>
+            <a:endParaRPr lang="en-US" sz="1600" dirty="0"/>
+          </a:p>
+        </p:txBody>
+      </p:sp>
+      <p:sp>
+        <p:nvSpPr>
+          <p:cNvPr id="5" name="Text 3"/>
           <p:cNvSpPr/>
           <p:nvPr/>
         </p:nvSpPr>
@@ -2084,14 +1995,17 @@
               <a:buChar char="•"/>
             </a:pPr>
             <a:r>
-              <a:rPr lang="en-US" sz="1600" dirty="0">
-                <a:solidFill>
-                  <a:srgbClr val="374151"/>
-                </a:solidFill>
-              </a:rPr>
-              <a:t>Founder names and roles</a:t>
-            </a:r>
-            <a:endParaRPr lang="en-US" sz="1600" dirty="0"/>
+              <a:rPr lang="en-US" sz="2400" b="1" dirty="0">
+                <a:solidFill>
+                  <a:srgbClr val="0B1437"/>
+                </a:solidFill>
+                <a:latin typeface="Calibri" pitchFamily="34" charset="0"/>
+                <a:ea typeface="Calibri" pitchFamily="34" charset="-122"/>
+                <a:cs typeface="Calibri" pitchFamily="34" charset="-120"/>
+              </a:rPr>
+              <a:t>Raising $2M Seed Round</a:t>
+            </a:r>
+            <a:endParaRPr lang="en-US" sz="2400" dirty="0"/>
           </a:p>
           <a:p>
             <a:pPr marL="342900" indent="-342900">
@@ -2102,14 +2016,101 @@
               <a:buChar char="•"/>
             </a:pPr>
             <a:r>
-              <a:rPr lang="en-US" sz="1600" dirty="0">
-                <a:solidFill>
-                  <a:srgbClr val="374151"/>
-                </a:solidFill>
-              </a:rPr>
-              <a:t>Relevant experience</a:t>
-            </a:r>
-            <a:endParaRPr lang="en-US" sz="1600" dirty="0"/>
+              <a:rPr lang="en-US" sz="1800" b="1" dirty="0">
+                <a:solidFill>
+                  <a:srgbClr val="1F2937"/>
+                </a:solidFill>
+                <a:latin typeface="Calibri" pitchFamily="34" charset="0"/>
+                <a:ea typeface="Calibri" pitchFamily="34" charset="-122"/>
+                <a:cs typeface="Calibri" pitchFamily="34" charset="-120"/>
+              </a:rPr>
+              <a:t>Use of Funds:</a:t>
+            </a:r>
+            <a:endParaRPr lang="en-US" sz="2400" dirty="0"/>
+          </a:p>
+          <a:p>
+            <a:pPr lvl="1" marL="685800" indent="-342900">
+              <a:lnSpc>
+                <a:spcPts val="2800"/>
+              </a:lnSpc>
+              <a:buSzPct val="100000"/>
+              <a:buChar char="•"/>
+            </a:pPr>
+            <a:r>
+              <a:rPr lang="en-US" sz="1800" dirty="0">
+                <a:solidFill>
+                  <a:srgbClr val="6B7280"/>
+                </a:solidFill>
+                <a:latin typeface="Calibri" pitchFamily="34" charset="0"/>
+                <a:ea typeface="Calibri" pitchFamily="34" charset="-122"/>
+                <a:cs typeface="Calibri" pitchFamily="34" charset="-120"/>
+              </a:rPr>
+              <a:t>40% - Engineering &amp; Product Development (hire 3 engineers)</a:t>
+            </a:r>
+            <a:endParaRPr lang="en-US" sz="2400" dirty="0"/>
+          </a:p>
+          <a:p>
+            <a:pPr lvl="1" marL="685800" indent="-342900">
+              <a:lnSpc>
+                <a:spcPts val="2800"/>
+              </a:lnSpc>
+              <a:buSzPct val="100000"/>
+              <a:buChar char="•"/>
+            </a:pPr>
+            <a:r>
+              <a:rPr lang="en-US" sz="1800" dirty="0">
+                <a:solidFill>
+                  <a:srgbClr val="6B7280"/>
+                </a:solidFill>
+                <a:latin typeface="Calibri" pitchFamily="34" charset="0"/>
+                <a:ea typeface="Calibri" pitchFamily="34" charset="-122"/>
+                <a:cs typeface="Calibri" pitchFamily="34" charset="-120"/>
+              </a:rPr>
+              <a:t>30% - Sales &amp; Marketing (expand from 10 to 25 customers/month)</a:t>
+            </a:r>
+            <a:endParaRPr lang="en-US" sz="2400" dirty="0"/>
+          </a:p>
+          <a:p>
+            <a:pPr lvl="1" marL="685800" indent="-342900">
+              <a:lnSpc>
+                <a:spcPts val="2800"/>
+              </a:lnSpc>
+              <a:buSzPct val="100000"/>
+              <a:buChar char="•"/>
+            </a:pPr>
+            <a:r>
+              <a:rPr lang="en-US" sz="1800" dirty="0">
+                <a:solidFill>
+                  <a:srgbClr val="6B7280"/>
+                </a:solidFill>
+                <a:latin typeface="Calibri" pitchFamily="34" charset="0"/>
+                <a:ea typeface="Calibri" pitchFamily="34" charset="-122"/>
+                <a:cs typeface="Calibri" pitchFamily="34" charset="-120"/>
+              </a:rPr>
+              <a:t>20% - Operations &amp; Infrastructure (scale to 5,000 users)</a:t>
+            </a:r>
+            <a:endParaRPr lang="en-US" sz="2400" dirty="0"/>
+          </a:p>
+          <a:p>
+            <a:pPr lvl="1" marL="685800" indent="-342900">
+              <a:lnSpc>
+                <a:spcPts val="2800"/>
+              </a:lnSpc>
+              <a:buSzPct val="100000"/>
+              <a:buChar char="•"/>
+            </a:pPr>
+            <a:r>
+              <a:rPr lang="en-US" sz="1800" dirty="0">
+                <a:solidFill>
+                  <a:srgbClr val="6B7280"/>
+                </a:solidFill>
+                <a:latin typeface="Calibri" pitchFamily="34" charset="0"/>
+                <a:ea typeface="Calibri" pitchFamily="34" charset="-122"/>
+                <a:cs typeface="Calibri" pitchFamily="34" charset="-120"/>
+              </a:rPr>
+              <a:t>10% - Working Capital &amp; Buffer</a:t>
+            </a:r>
+            <a:endParaRPr lang="en-US" sz="2400" dirty="0"/>
           </a:p>
           <a:p>
             <a:pPr marL="342900" indent="-342900">
@@ -2120,17 +2121,20 @@
               <a:buChar char="•"/>
             </a:pPr>
             <a:r>
-              <a:rPr lang="en-US" sz="1600" dirty="0">
-                <a:solidFill>
-                  <a:srgbClr val="374151"/>
-                </a:solidFill>
-              </a:rPr>
-              <a:t>Domain expertise</a:t>
-            </a:r>
-            <a:endParaRPr lang="en-US" sz="1600" dirty="0"/>
-          </a:p>
-          <a:p>
-            <a:pPr marL="342900" indent="-342900">
+              <a:rPr lang="en-US" sz="1800" b="1" dirty="0">
+                <a:solidFill>
+                  <a:srgbClr val="1F2937"/>
+                </a:solidFill>
+                <a:latin typeface="Calibri" pitchFamily="34" charset="0"/>
+                <a:ea typeface="Calibri" pitchFamily="34" charset="-122"/>
+                <a:cs typeface="Calibri" pitchFamily="34" charset="-120"/>
+              </a:rPr>
+              <a:t>Key Milestones (18-month runway):</a:t>
+            </a:r>
+            <a:endParaRPr lang="en-US" sz="2400" dirty="0"/>
+          </a:p>
+          <a:p>
+            <a:pPr lvl="1" marL="685800" indent="-342900">
               <a:lnSpc>
                 <a:spcPts val="2800"/>
               </a:lnSpc>
@@ -2138,14 +2142,157 @@
               <a:buChar char="•"/>
             </a:pPr>
             <a:r>
-              <a:rPr lang="en-US" sz="1600" dirty="0">
-                <a:solidFill>
-                  <a:srgbClr val="374151"/>
-                </a:solidFill>
-              </a:rPr>
-              <a:t>Advisor/investor names if notable</a:t>
-            </a:r>
-            <a:endParaRPr lang="en-US" sz="1600" dirty="0"/>
+              <a:rPr lang="en-US" sz="1800" dirty="0">
+                <a:solidFill>
+                  <a:srgbClr val="6B7280"/>
+                </a:solidFill>
+                <a:latin typeface="Calibri" pitchFamily="34" charset="0"/>
+                <a:ea typeface="Calibri" pitchFamily="34" charset="-122"/>
+                <a:cs typeface="Calibri" pitchFamily="34" charset="-120"/>
+              </a:rPr>
+              <a:t>Reach $500K ARR by Month 12</a:t>
+            </a:r>
+            <a:endParaRPr lang="en-US" sz="2400" dirty="0"/>
+          </a:p>
+          <a:p>
+            <a:pPr lvl="1" marL="685800" indent="-342900">
+              <a:lnSpc>
+                <a:spcPts val="2800"/>
+              </a:lnSpc>
+              <a:buSzPct val="100000"/>
+              <a:buChar char="•"/>
+            </a:pPr>
+            <a:r>
+              <a:rPr lang="en-US" sz="1800" dirty="0">
+                <a:solidFill>
+                  <a:srgbClr val="6B7280"/>
+                </a:solidFill>
+                <a:latin typeface="Calibri" pitchFamily="34" charset="0"/>
+                <a:ea typeface="Calibri" pitchFamily="34" charset="-122"/>
+                <a:cs typeface="Calibri" pitchFamily="34" charset="-120"/>
+              </a:rPr>
+              <a:t>Expand to 1,000 paying customers</a:t>
+            </a:r>
+            <a:endParaRPr lang="en-US" sz="2400" dirty="0"/>
+          </a:p>
+          <a:p>
+            <a:pPr lvl="1" marL="685800" indent="-342900">
+              <a:lnSpc>
+                <a:spcPts val="2800"/>
+              </a:lnSpc>
+              <a:buSzPct val="100000"/>
+              <a:buChar char="•"/>
+            </a:pPr>
+            <a:r>
+              <a:rPr lang="en-US" sz="1800" dirty="0">
+                <a:solidFill>
+                  <a:srgbClr val="6B7280"/>
+                </a:solidFill>
+                <a:latin typeface="Calibri" pitchFamily="34" charset="0"/>
+                <a:ea typeface="Calibri" pitchFamily="34" charset="-122"/>
+                <a:cs typeface="Calibri" pitchFamily="34" charset="-120"/>
+              </a:rPr>
+              <a:t>Launch enterprise tier and close 5 enterprise deals ($50K+ ARR each)</a:t>
+            </a:r>
+            <a:endParaRPr lang="en-US" sz="2400" dirty="0"/>
+          </a:p>
+        </p:txBody>
+      </p:sp>
+      <p:sp>
+        <p:nvSpPr>
+          <p:cNvPr id="6" name="Shape 4"/>
+          <p:cNvSpPr/>
+          <p:nvPr/>
+        </p:nvSpPr>
+        <p:spPr>
+          <a:xfrm>
+            <a:off x="0" y="6720840"/>
+            <a:ext cx="73152" cy="137160"/>
+          </a:xfrm>
+          <a:prstGeom prst="rect">
+            <a:avLst/>
+          </a:prstGeom>
+          <a:solidFill>
+            <a:srgbClr val="38BDF8"/>
+          </a:solidFill>
+          <a:ln/>
+        </p:spPr>
+      </p:sp>
+      <p:sp>
+        <p:nvSpPr>
+          <p:cNvPr id="7" name="Text 5"/>
+          <p:cNvSpPr/>
+          <p:nvPr/>
+        </p:nvSpPr>
+        <p:spPr>
+          <a:xfrm>
+            <a:off x="274320" y="6720840"/>
+            <a:ext cx="2743200" cy="137160"/>
+          </a:xfrm>
+          <a:prstGeom prst="rect">
+            <a:avLst/>
+          </a:prstGeom>
+          <a:noFill/>
+          <a:ln/>
+        </p:spPr>
+        <p:txBody>
+          <a:bodyPr wrap="square" rtlCol="0" anchor="ctr"/>
+          <a:lstStyle/>
+          <a:p>
+            <a:pPr indent="0" marL="0">
+              <a:buNone/>
+            </a:pPr>
+            <a:r>
+              <a:rPr lang="en-US" sz="1000" dirty="0">
+                <a:solidFill>
+                  <a:srgbClr val="6B7280"/>
+                </a:solidFill>
+                <a:latin typeface="Calibri" pitchFamily="34" charset="0"/>
+                <a:ea typeface="Calibri" pitchFamily="34" charset="-122"/>
+                <a:cs typeface="Calibri" pitchFamily="34" charset="-120"/>
+              </a:rPr>
+              <a:t>Creatives Takeover</a:t>
+            </a:r>
+            <a:endParaRPr lang="en-US" sz="1000" dirty="0"/>
+          </a:p>
+        </p:txBody>
+      </p:sp>
+      <p:sp>
+        <p:nvSpPr>
+          <p:cNvPr id="8" name="Text 6"/>
+          <p:cNvSpPr/>
+          <p:nvPr/>
+        </p:nvSpPr>
+        <p:spPr>
+          <a:xfrm>
+            <a:off x="8412480" y="6720840"/>
+            <a:ext cx="274320" cy="137160"/>
+          </a:xfrm>
+          <a:prstGeom prst="rect">
+            <a:avLst/>
+          </a:prstGeom>
+          <a:noFill/>
+          <a:ln/>
+        </p:spPr>
+        <p:txBody>
+          <a:bodyPr wrap="square" rtlCol="0" anchor="ctr"/>
+          <a:lstStyle/>
+          <a:p>
+            <a:pPr algn="r" indent="0" marL="0">
+              <a:buNone/>
+            </a:pPr>
+            <a:r>
+              <a:rPr lang="en-US" sz="1000" dirty="0">
+                <a:solidFill>
+                  <a:srgbClr val="6B7280"/>
+                </a:solidFill>
+                <a:latin typeface="Calibri" pitchFamily="34" charset="0"/>
+                <a:ea typeface="Calibri" pitchFamily="34" charset="-122"/>
+                <a:cs typeface="Calibri" pitchFamily="34" charset="-120"/>
+              </a:rPr>
+              <a:t>10</a:t>
+            </a:r>
+            <a:endParaRPr lang="en-US" sz="1000" dirty="0"/>
           </a:p>
         </p:txBody>
       </p:sp>
@@ -2157,9 +2304,16 @@
 </p:sld>
 </file>
 
-<file path=ppt/slides/slide11.xml><?xml version="1.0" encoding="utf-8"?>
+<file path=ppt/slides/slide2.xml><?xml version="1.0" encoding="utf-8"?>
 <p:sld xmlns:a="http://schemas.openxmlformats.org/drawingml/2006/main" xmlns:r="http://schemas.openxmlformats.org/officeDocument/2006/relationships" xmlns:p="http://schemas.openxmlformats.org/presentationml/2006/main">
-  <p:cSld name="Slide 11">
+  <p:cSld name="Slide 2">
+    <p:bg>
+      <p:bgPr>
+        <a:solidFill>
+          <a:srgbClr val="FFFFFF"/>
+        </a:solidFill>
+      </p:bgPr>
+    </p:bg>
     <p:spTree>
       <p:nvGrpSpPr>
         <p:cNvPr id="1" name=""/>
@@ -2176,14 +2330,34 @@
       </p:grpSpPr>
       <p:sp>
         <p:nvSpPr>
-          <p:cNvPr id="2" name="Text 0"/>
-          <p:cNvSpPr/>
-          <p:nvPr/>
-        </p:nvSpPr>
-        <p:spPr>
-          <a:xfrm>
-            <a:off x="457200" y="457200"/>
-            <a:ext cx="8229600" cy="685800"/>
+          <p:cNvPr id="2" name="Shape 0"/>
+          <p:cNvSpPr/>
+          <p:nvPr/>
+        </p:nvSpPr>
+        <p:spPr>
+          <a:xfrm>
+            <a:off x="0" y="0"/>
+            <a:ext cx="9144000" cy="137160"/>
+          </a:xfrm>
+          <a:prstGeom prst="rect">
+            <a:avLst/>
+          </a:prstGeom>
+          <a:solidFill>
+            <a:srgbClr val="0B1437"/>
+          </a:solidFill>
+          <a:ln/>
+        </p:spPr>
+      </p:sp>
+      <p:sp>
+        <p:nvSpPr>
+          <p:cNvPr id="3" name="Text 1"/>
+          <p:cNvSpPr/>
+          <p:nvPr/>
+        </p:nvSpPr>
+        <p:spPr>
+          <a:xfrm>
+            <a:off x="457200" y="365760"/>
+            <a:ext cx="8229600" cy="548640"/>
           </a:xfrm>
           <a:prstGeom prst="rect">
             <a:avLst/>
@@ -2203,8 +2377,11 @@
                 <a:solidFill>
                   <a:srgbClr val="0B1437"/>
                 </a:solidFill>
-              </a:rPr>
-              <a:t>Ask</a:t>
+                <a:latin typeface="Calibri" pitchFamily="34" charset="0"/>
+                <a:ea typeface="Calibri" pitchFamily="34" charset="-122"/>
+                <a:cs typeface="Calibri" pitchFamily="34" charset="-120"/>
+              </a:rPr>
+              <a:t>The Problem</a:t>
             </a:r>
             <a:endParaRPr lang="en-US" sz="3200" dirty="0"/>
           </a:p>
@@ -2212,7 +2389,46 @@
       </p:sp>
       <p:sp>
         <p:nvSpPr>
-          <p:cNvPr id="3" name="Text 1"/>
+          <p:cNvPr id="4" name="Text 2"/>
+          <p:cNvSpPr/>
+          <p:nvPr/>
+        </p:nvSpPr>
+        <p:spPr>
+          <a:xfrm>
+            <a:off x="457200" y="914400"/>
+            <a:ext cx="8229600" cy="365760"/>
+          </a:xfrm>
+          <a:prstGeom prst="rect">
+            <a:avLst/>
+          </a:prstGeom>
+          <a:noFill/>
+          <a:ln/>
+        </p:spPr>
+        <p:txBody>
+          <a:bodyPr wrap="square" rtlCol="0" anchor="ctr"/>
+          <a:lstStyle/>
+          <a:p>
+            <a:pPr indent="0" marL="0">
+              <a:buNone/>
+            </a:pPr>
+            <a:r>
+              <a:rPr lang="en-US" sz="1600" i="1" dirty="0">
+                <a:solidFill>
+                  <a:srgbClr val="6B7280"/>
+                </a:solidFill>
+                <a:latin typeface="Calibri" pitchFamily="34" charset="0"/>
+                <a:ea typeface="Calibri" pitchFamily="34" charset="-122"/>
+                <a:cs typeface="Calibri" pitchFamily="34" charset="-120"/>
+              </a:rPr>
+              <a:t>What pain point are you solving?</a:t>
+            </a:r>
+            <a:endParaRPr lang="en-US" sz="1600" dirty="0"/>
+          </a:p>
+        </p:txBody>
+      </p:sp>
+      <p:sp>
+        <p:nvSpPr>
+          <p:cNvPr id="5" name="Text 3"/>
           <p:cNvSpPr/>
           <p:nvPr/>
         </p:nvSpPr>
@@ -2239,14 +2455,38 @@
               <a:buChar char="•"/>
             </a:pPr>
             <a:r>
-              <a:rPr lang="en-US" sz="1600" dirty="0">
-                <a:solidFill>
-                  <a:srgbClr val="374151"/>
-                </a:solidFill>
-              </a:rPr>
-              <a:t>Amount raising</a:t>
-            </a:r>
-            <a:endParaRPr lang="en-US" sz="1600" dirty="0"/>
+              <a:rPr lang="en-US" sz="1800" b="1" dirty="0">
+                <a:solidFill>
+                  <a:srgbClr val="1F2937"/>
+                </a:solidFill>
+                <a:latin typeface="Calibri" pitchFamily="34" charset="0"/>
+                <a:ea typeface="Calibri" pitchFamily="34" charset="-122"/>
+                <a:cs typeface="Calibri" pitchFamily="34" charset="-120"/>
+              </a:rPr>
+              <a:t>Define the problem in clear, relatable terms</a:t>
+            </a:r>
+            <a:endParaRPr lang="en-US" sz="1800" dirty="0"/>
+          </a:p>
+          <a:p>
+            <a:pPr lvl="1" marL="685800" indent="-342900">
+              <a:lnSpc>
+                <a:spcPts val="2800"/>
+              </a:lnSpc>
+              <a:buSzPct val="100000"/>
+              <a:buChar char="•"/>
+            </a:pPr>
+            <a:r>
+              <a:rPr lang="en-US" sz="1800" dirty="0">
+                <a:solidFill>
+                  <a:srgbClr val="6B7280"/>
+                </a:solidFill>
+                <a:latin typeface="Calibri" pitchFamily="34" charset="0"/>
+                <a:ea typeface="Calibri" pitchFamily="34" charset="-122"/>
+                <a:cs typeface="Calibri" pitchFamily="34" charset="-120"/>
+              </a:rPr>
+              <a:t>Example: "Small businesses waste 20 hours per week on manual invoicing"</a:t>
+            </a:r>
+            <a:endParaRPr lang="en-US" sz="1800" dirty="0"/>
           </a:p>
           <a:p>
             <a:pPr marL="342900" indent="-342900">
@@ -2257,14 +2497,38 @@
               <a:buChar char="•"/>
             </a:pPr>
             <a:r>
-              <a:rPr lang="en-US" sz="1600" dirty="0">
-                <a:solidFill>
-                  <a:srgbClr val="374151"/>
-                </a:solidFill>
-              </a:rPr>
-              <a:t>Use of funds breakdown</a:t>
-            </a:r>
-            <a:endParaRPr lang="en-US" sz="1600" dirty="0"/>
+              <a:rPr lang="en-US" sz="1800" b="1" dirty="0">
+                <a:solidFill>
+                  <a:srgbClr val="1F2937"/>
+                </a:solidFill>
+                <a:latin typeface="Calibri" pitchFamily="34" charset="0"/>
+                <a:ea typeface="Calibri" pitchFamily="34" charset="-122"/>
+                <a:cs typeface="Calibri" pitchFamily="34" charset="-120"/>
+              </a:rPr>
+              <a:t>Quantify the impact (time lost, money wasted, opportunities missed)</a:t>
+            </a:r>
+            <a:endParaRPr lang="en-US" sz="1800" dirty="0"/>
+          </a:p>
+          <a:p>
+            <a:pPr lvl="1" marL="685800" indent="-342900">
+              <a:lnSpc>
+                <a:spcPts val="2800"/>
+              </a:lnSpc>
+              <a:buSzPct val="100000"/>
+              <a:buChar char="•"/>
+            </a:pPr>
+            <a:r>
+              <a:rPr lang="en-US" sz="1800" dirty="0">
+                <a:solidFill>
+                  <a:srgbClr val="6B7280"/>
+                </a:solidFill>
+                <a:latin typeface="Calibri" pitchFamily="34" charset="0"/>
+                <a:ea typeface="Calibri" pitchFamily="34" charset="-122"/>
+                <a:cs typeface="Calibri" pitchFamily="34" charset="-120"/>
+              </a:rPr>
+              <a:t>Example: "This costs them $50,000 annually in lost productivity"</a:t>
+            </a:r>
+            <a:endParaRPr lang="en-US" sz="1800" dirty="0"/>
           </a:p>
           <a:p>
             <a:pPr marL="342900" indent="-342900">
@@ -2275,14 +2539,38 @@
               <a:buChar char="•"/>
             </a:pPr>
             <a:r>
-              <a:rPr lang="en-US" sz="1600" dirty="0">
-                <a:solidFill>
-                  <a:srgbClr val="374151"/>
-                </a:solidFill>
-              </a:rPr>
-              <a:t>Milestones to be achieved</a:t>
-            </a:r>
-            <a:endParaRPr lang="en-US" sz="1600" dirty="0"/>
+              <a:rPr lang="en-US" sz="1800" b="1" dirty="0">
+                <a:solidFill>
+                  <a:srgbClr val="1F2937"/>
+                </a:solidFill>
+                <a:latin typeface="Calibri" pitchFamily="34" charset="0"/>
+                <a:ea typeface="Calibri" pitchFamily="34" charset="-122"/>
+                <a:cs typeface="Calibri" pitchFamily="34" charset="-120"/>
+              </a:rPr>
+              <a:t>Tell a story that investors can visualize</a:t>
+            </a:r>
+            <a:endParaRPr lang="en-US" sz="1800" dirty="0"/>
+          </a:p>
+          <a:p>
+            <a:pPr lvl="1" marL="685800" indent="-342900">
+              <a:lnSpc>
+                <a:spcPts val="2800"/>
+              </a:lnSpc>
+              <a:buSzPct val="100000"/>
+              <a:buChar char="•"/>
+            </a:pPr>
+            <a:r>
+              <a:rPr lang="en-US" sz="1800" dirty="0">
+                <a:solidFill>
+                  <a:srgbClr val="6B7280"/>
+                </a:solidFill>
+                <a:latin typeface="Calibri" pitchFamily="34" charset="0"/>
+                <a:ea typeface="Calibri" pitchFamily="34" charset="-122"/>
+                <a:cs typeface="Calibri" pitchFamily="34" charset="-120"/>
+              </a:rPr>
+              <a:t>Example: "Meet Sarah, a bakery owner who spends her weekends chasing late payments..."</a:t>
+            </a:r>
+            <a:endParaRPr lang="en-US" sz="1800" dirty="0"/>
           </a:p>
           <a:p>
             <a:pPr marL="342900" indent="-342900">
@@ -2293,14 +2581,136 @@
               <a:buChar char="•"/>
             </a:pPr>
             <a:r>
-              <a:rPr lang="en-US" sz="1600" dirty="0">
-                <a:solidFill>
-                  <a:srgbClr val="374151"/>
-                </a:solidFill>
-              </a:rPr>
-              <a:t>Timeline</a:t>
-            </a:r>
-            <a:endParaRPr lang="en-US" sz="1600" dirty="0"/>
+              <a:rPr lang="en-US" sz="1800" b="1" dirty="0">
+                <a:solidFill>
+                  <a:srgbClr val="1F2937"/>
+                </a:solidFill>
+                <a:latin typeface="Calibri" pitchFamily="34" charset="0"/>
+                <a:ea typeface="Calibri" pitchFamily="34" charset="-122"/>
+                <a:cs typeface="Calibri" pitchFamily="34" charset="-120"/>
+              </a:rPr>
+              <a:t>Show that this problem affects a large, growing market</a:t>
+            </a:r>
+            <a:endParaRPr lang="en-US" sz="1800" dirty="0"/>
+          </a:p>
+          <a:p>
+            <a:pPr lvl="1" marL="685800" indent="-342900">
+              <a:lnSpc>
+                <a:spcPts val="2800"/>
+              </a:lnSpc>
+              <a:buSzPct val="100000"/>
+              <a:buChar char="•"/>
+            </a:pPr>
+            <a:r>
+              <a:rPr lang="en-US" sz="1800" dirty="0">
+                <a:solidFill>
+                  <a:srgbClr val="6B7280"/>
+                </a:solidFill>
+                <a:latin typeface="Calibri" pitchFamily="34" charset="0"/>
+                <a:ea typeface="Calibri" pitchFamily="34" charset="-122"/>
+                <a:cs typeface="Calibri" pitchFamily="34" charset="-120"/>
+              </a:rPr>
+              <a:t>Example: "15 million small businesses in the US face this daily"</a:t>
+            </a:r>
+            <a:endParaRPr lang="en-US" sz="1800" dirty="0"/>
+          </a:p>
+        </p:txBody>
+      </p:sp>
+      <p:sp>
+        <p:nvSpPr>
+          <p:cNvPr id="6" name="Shape 4"/>
+          <p:cNvSpPr/>
+          <p:nvPr/>
+        </p:nvSpPr>
+        <p:spPr>
+          <a:xfrm>
+            <a:off x="0" y="6720840"/>
+            <a:ext cx="73152" cy="137160"/>
+          </a:xfrm>
+          <a:prstGeom prst="rect">
+            <a:avLst/>
+          </a:prstGeom>
+          <a:solidFill>
+            <a:srgbClr val="38BDF8"/>
+          </a:solidFill>
+          <a:ln/>
+        </p:spPr>
+      </p:sp>
+      <p:sp>
+        <p:nvSpPr>
+          <p:cNvPr id="7" name="Text 5"/>
+          <p:cNvSpPr/>
+          <p:nvPr/>
+        </p:nvSpPr>
+        <p:spPr>
+          <a:xfrm>
+            <a:off x="274320" y="6720840"/>
+            <a:ext cx="2743200" cy="137160"/>
+          </a:xfrm>
+          <a:prstGeom prst="rect">
+            <a:avLst/>
+          </a:prstGeom>
+          <a:noFill/>
+          <a:ln/>
+        </p:spPr>
+        <p:txBody>
+          <a:bodyPr wrap="square" rtlCol="0" anchor="ctr"/>
+          <a:lstStyle/>
+          <a:p>
+            <a:pPr indent="0" marL="0">
+              <a:buNone/>
+            </a:pPr>
+            <a:r>
+              <a:rPr lang="en-US" sz="1000" dirty="0">
+                <a:solidFill>
+                  <a:srgbClr val="6B7280"/>
+                </a:solidFill>
+                <a:latin typeface="Calibri" pitchFamily="34" charset="0"/>
+                <a:ea typeface="Calibri" pitchFamily="34" charset="-122"/>
+                <a:cs typeface="Calibri" pitchFamily="34" charset="-120"/>
+              </a:rPr>
+              <a:t>Creatives Takeover</a:t>
+            </a:r>
+            <a:endParaRPr lang="en-US" sz="1000" dirty="0"/>
+          </a:p>
+        </p:txBody>
+      </p:sp>
+      <p:sp>
+        <p:nvSpPr>
+          <p:cNvPr id="8" name="Text 6"/>
+          <p:cNvSpPr/>
+          <p:nvPr/>
+        </p:nvSpPr>
+        <p:spPr>
+          <a:xfrm>
+            <a:off x="8412480" y="6720840"/>
+            <a:ext cx="274320" cy="137160"/>
+          </a:xfrm>
+          <a:prstGeom prst="rect">
+            <a:avLst/>
+          </a:prstGeom>
+          <a:noFill/>
+          <a:ln/>
+        </p:spPr>
+        <p:txBody>
+          <a:bodyPr wrap="square" rtlCol="0" anchor="ctr"/>
+          <a:lstStyle/>
+          <a:p>
+            <a:pPr algn="r" indent="0" marL="0">
+              <a:buNone/>
+            </a:pPr>
+            <a:r>
+              <a:rPr lang="en-US" sz="1000" dirty="0">
+                <a:solidFill>
+                  <a:srgbClr val="6B7280"/>
+                </a:solidFill>
+                <a:latin typeface="Calibri" pitchFamily="34" charset="0"/>
+                <a:ea typeface="Calibri" pitchFamily="34" charset="-122"/>
+                <a:cs typeface="Calibri" pitchFamily="34" charset="-120"/>
+              </a:rPr>
+              <a:t>2</a:t>
+            </a:r>
+            <a:endParaRPr lang="en-US" sz="1000" dirty="0"/>
           </a:p>
         </p:txBody>
       </p:sp>
@@ -2312,9 +2722,16 @@
 </p:sld>
 </file>
 
-<file path=ppt/slides/slide2.xml><?xml version="1.0" encoding="utf-8"?>
+<file path=ppt/slides/slide3.xml><?xml version="1.0" encoding="utf-8"?>
 <p:sld xmlns:a="http://schemas.openxmlformats.org/drawingml/2006/main" xmlns:r="http://schemas.openxmlformats.org/officeDocument/2006/relationships" xmlns:p="http://schemas.openxmlformats.org/presentationml/2006/main">
-  <p:cSld name="Slide 2">
+  <p:cSld name="Slide 3">
+    <p:bg>
+      <p:bgPr>
+        <a:solidFill>
+          <a:srgbClr val="FFFFFF"/>
+        </a:solidFill>
+      </p:bgPr>
+    </p:bg>
     <p:spTree>
       <p:nvGrpSpPr>
         <p:cNvPr id="1" name=""/>
@@ -2331,14 +2748,34 @@
       </p:grpSpPr>
       <p:sp>
         <p:nvSpPr>
-          <p:cNvPr id="2" name="Text 0"/>
-          <p:cNvSpPr/>
-          <p:nvPr/>
-        </p:nvSpPr>
-        <p:spPr>
-          <a:xfrm>
-            <a:off x="457200" y="457200"/>
-            <a:ext cx="8229600" cy="685800"/>
+          <p:cNvPr id="2" name="Shape 0"/>
+          <p:cNvSpPr/>
+          <p:nvPr/>
+        </p:nvSpPr>
+        <p:spPr>
+          <a:xfrm>
+            <a:off x="0" y="0"/>
+            <a:ext cx="9144000" cy="137160"/>
+          </a:xfrm>
+          <a:prstGeom prst="rect">
+            <a:avLst/>
+          </a:prstGeom>
+          <a:solidFill>
+            <a:srgbClr val="0B1437"/>
+          </a:solidFill>
+          <a:ln/>
+        </p:spPr>
+      </p:sp>
+      <p:sp>
+        <p:nvSpPr>
+          <p:cNvPr id="3" name="Text 1"/>
+          <p:cNvSpPr/>
+          <p:nvPr/>
+        </p:nvSpPr>
+        <p:spPr>
+          <a:xfrm>
+            <a:off x="457200" y="365760"/>
+            <a:ext cx="8229600" cy="548640"/>
           </a:xfrm>
           <a:prstGeom prst="rect">
             <a:avLst/>
@@ -2358,8 +2795,11 @@
                 <a:solidFill>
                   <a:srgbClr val="0B1437"/>
                 </a:solidFill>
-              </a:rPr>
-              <a:t>Cover Slide</a:t>
+                <a:latin typeface="Calibri" pitchFamily="34" charset="0"/>
+                <a:ea typeface="Calibri" pitchFamily="34" charset="-122"/>
+                <a:cs typeface="Calibri" pitchFamily="34" charset="-120"/>
+              </a:rPr>
+              <a:t>Our Solution</a:t>
             </a:r>
             <a:endParaRPr lang="en-US" sz="3200" dirty="0"/>
           </a:p>
@@ -2367,7 +2807,46 @@
       </p:sp>
       <p:sp>
         <p:nvSpPr>
-          <p:cNvPr id="3" name="Text 1"/>
+          <p:cNvPr id="4" name="Text 2"/>
+          <p:cNvSpPr/>
+          <p:nvPr/>
+        </p:nvSpPr>
+        <p:spPr>
+          <a:xfrm>
+            <a:off x="457200" y="914400"/>
+            <a:ext cx="8229600" cy="365760"/>
+          </a:xfrm>
+          <a:prstGeom prst="rect">
+            <a:avLst/>
+          </a:prstGeom>
+          <a:noFill/>
+          <a:ln/>
+        </p:spPr>
+        <p:txBody>
+          <a:bodyPr wrap="square" rtlCol="0" anchor="ctr"/>
+          <a:lstStyle/>
+          <a:p>
+            <a:pPr indent="0" marL="0">
+              <a:buNone/>
+            </a:pPr>
+            <a:r>
+              <a:rPr lang="en-US" sz="1600" i="1" dirty="0">
+                <a:solidFill>
+                  <a:srgbClr val="6B7280"/>
+                </a:solidFill>
+                <a:latin typeface="Calibri" pitchFamily="34" charset="0"/>
+                <a:ea typeface="Calibri" pitchFamily="34" charset="-122"/>
+                <a:cs typeface="Calibri" pitchFamily="34" charset="-120"/>
+              </a:rPr>
+              <a:t>How do you solve this problem?</a:t>
+            </a:r>
+            <a:endParaRPr lang="en-US" sz="1600" dirty="0"/>
+          </a:p>
+        </p:txBody>
+      </p:sp>
+      <p:sp>
+        <p:nvSpPr>
+          <p:cNvPr id="5" name="Text 3"/>
           <p:cNvSpPr/>
           <p:nvPr/>
         </p:nvSpPr>
@@ -2394,14 +2873,38 @@
               <a:buChar char="•"/>
             </a:pPr>
             <a:r>
-              <a:rPr lang="en-US" sz="1600" dirty="0">
-                <a:solidFill>
-                  <a:srgbClr val="374151"/>
-                </a:solidFill>
-              </a:rPr>
-              <a:t>Company name and logo</a:t>
-            </a:r>
-            <a:endParaRPr lang="en-US" sz="1600" dirty="0"/>
+              <a:rPr lang="en-US" sz="1800" b="1" dirty="0">
+                <a:solidFill>
+                  <a:srgbClr val="1F2937"/>
+                </a:solidFill>
+                <a:latin typeface="Calibri" pitchFamily="34" charset="0"/>
+                <a:ea typeface="Calibri" pitchFamily="34" charset="-122"/>
+                <a:cs typeface="Calibri" pitchFamily="34" charset="-120"/>
+              </a:rPr>
+              <a:t>Describe your solution in one clear sentence</a:t>
+            </a:r>
+            <a:endParaRPr lang="en-US" sz="1800" dirty="0"/>
+          </a:p>
+          <a:p>
+            <a:pPr lvl="1" marL="685800" indent="-342900">
+              <a:lnSpc>
+                <a:spcPts val="2800"/>
+              </a:lnSpc>
+              <a:buSzPct val="100000"/>
+              <a:buChar char="•"/>
+            </a:pPr>
+            <a:r>
+              <a:rPr lang="en-US" sz="1800" dirty="0">
+                <a:solidFill>
+                  <a:srgbClr val="6B7280"/>
+                </a:solidFill>
+                <a:latin typeface="Calibri" pitchFamily="34" charset="0"/>
+                <a:ea typeface="Calibri" pitchFamily="34" charset="-122"/>
+                <a:cs typeface="Calibri" pitchFamily="34" charset="-120"/>
+              </a:rPr>
+              <a:t>Example: "Automated invoicing software that syncs with your bank and sends payment reminders"</a:t>
+            </a:r>
+            <a:endParaRPr lang="en-US" sz="1800" dirty="0"/>
           </a:p>
           <a:p>
             <a:pPr marL="342900" indent="-342900">
@@ -2412,14 +2915,38 @@
               <a:buChar char="•"/>
             </a:pPr>
             <a:r>
-              <a:rPr lang="en-US" sz="1600" dirty="0">
-                <a:solidFill>
-                  <a:srgbClr val="374151"/>
-                </a:solidFill>
-              </a:rPr>
-              <a:t>One-sentence tagline</a:t>
-            </a:r>
-            <a:endParaRPr lang="en-US" sz="1600" dirty="0"/>
+              <a:rPr lang="en-US" sz="1800" b="1" dirty="0">
+                <a:solidFill>
+                  <a:srgbClr val="1F2937"/>
+                </a:solidFill>
+                <a:latin typeface="Calibri" pitchFamily="34" charset="0"/>
+                <a:ea typeface="Calibri" pitchFamily="34" charset="-122"/>
+                <a:cs typeface="Calibri" pitchFamily="34" charset="-120"/>
+              </a:rPr>
+              <a:t>Highlight the key features that address the problem</a:t>
+            </a:r>
+            <a:endParaRPr lang="en-US" sz="1800" dirty="0"/>
+          </a:p>
+          <a:p>
+            <a:pPr lvl="1" marL="685800" indent="-342900">
+              <a:lnSpc>
+                <a:spcPts val="2800"/>
+              </a:lnSpc>
+              <a:buSzPct val="100000"/>
+              <a:buChar char="•"/>
+            </a:pPr>
+            <a:r>
+              <a:rPr lang="en-US" sz="1800" dirty="0">
+                <a:solidFill>
+                  <a:srgbClr val="6B7280"/>
+                </a:solidFill>
+                <a:latin typeface="Calibri" pitchFamily="34" charset="0"/>
+                <a:ea typeface="Calibri" pitchFamily="34" charset="-122"/>
+                <a:cs typeface="Calibri" pitchFamily="34" charset="-120"/>
+              </a:rPr>
+              <a:t>Example: "One-click invoice generation, automated payment tracking, smart reminders"</a:t>
+            </a:r>
+            <a:endParaRPr lang="en-US" sz="1800" dirty="0"/>
           </a:p>
           <a:p>
             <a:pPr marL="342900" indent="-342900">
@@ -2430,14 +2957,38 @@
               <a:buChar char="•"/>
             </a:pPr>
             <a:r>
-              <a:rPr lang="en-US" sz="1600" dirty="0">
-                <a:solidFill>
-                  <a:srgbClr val="374151"/>
-                </a:solidFill>
-              </a:rPr>
-              <a:t>Your name and contact info</a:t>
-            </a:r>
-            <a:endParaRPr lang="en-US" sz="1600" dirty="0"/>
+              <a:rPr lang="en-US" sz="1800" b="1" dirty="0">
+                <a:solidFill>
+                  <a:srgbClr val="1F2937"/>
+                </a:solidFill>
+                <a:latin typeface="Calibri" pitchFamily="34" charset="0"/>
+                <a:ea typeface="Calibri" pitchFamily="34" charset="-122"/>
+                <a:cs typeface="Calibri" pitchFamily="34" charset="-120"/>
+              </a:rPr>
+              <a:t>Explain the unique approach or technology</a:t>
+            </a:r>
+            <a:endParaRPr lang="en-US" sz="1800" dirty="0"/>
+          </a:p>
+          <a:p>
+            <a:pPr lvl="1" marL="685800" indent="-342900">
+              <a:lnSpc>
+                <a:spcPts val="2800"/>
+              </a:lnSpc>
+              <a:buSzPct val="100000"/>
+              <a:buChar char="•"/>
+            </a:pPr>
+            <a:r>
+              <a:rPr lang="en-US" sz="1800" dirty="0">
+                <a:solidFill>
+                  <a:srgbClr val="6B7280"/>
+                </a:solidFill>
+                <a:latin typeface="Calibri" pitchFamily="34" charset="0"/>
+                <a:ea typeface="Calibri" pitchFamily="34" charset="-122"/>
+                <a:cs typeface="Calibri" pitchFamily="34" charset="-120"/>
+              </a:rPr>
+              <a:t>Example: "AI-powered cash flow prediction helps businesses plan ahead"</a:t>
+            </a:r>
+            <a:endParaRPr lang="en-US" sz="1800" dirty="0"/>
           </a:p>
           <a:p>
             <a:pPr marL="342900" indent="-342900">
@@ -2448,14 +2999,136 @@
               <a:buChar char="•"/>
             </a:pPr>
             <a:r>
-              <a:rPr lang="en-US" sz="1600" dirty="0">
-                <a:solidFill>
-                  <a:srgbClr val="374151"/>
-                </a:solidFill>
-              </a:rPr>
-              <a:t>Date (optional)</a:t>
-            </a:r>
-            <a:endParaRPr lang="en-US" sz="1600" dirty="0"/>
+              <a:rPr lang="en-US" sz="1800" b="1" dirty="0">
+                <a:solidFill>
+                  <a:srgbClr val="1F2937"/>
+                </a:solidFill>
+                <a:latin typeface="Calibri" pitchFamily="34" charset="0"/>
+                <a:ea typeface="Calibri" pitchFamily="34" charset="-122"/>
+                <a:cs typeface="Calibri" pitchFamily="34" charset="-120"/>
+              </a:rPr>
+              <a:t>Show why it's better than current alternatives</a:t>
+            </a:r>
+            <a:endParaRPr lang="en-US" sz="1800" dirty="0"/>
+          </a:p>
+          <a:p>
+            <a:pPr lvl="1" marL="685800" indent="-342900">
+              <a:lnSpc>
+                <a:spcPts val="2800"/>
+              </a:lnSpc>
+              <a:buSzPct val="100000"/>
+              <a:buChar char="•"/>
+            </a:pPr>
+            <a:r>
+              <a:rPr lang="en-US" sz="1800" dirty="0">
+                <a:solidFill>
+                  <a:srgbClr val="6B7280"/>
+                </a:solidFill>
+                <a:latin typeface="Calibri" pitchFamily="34" charset="0"/>
+                <a:ea typeface="Calibri" pitchFamily="34" charset="-122"/>
+                <a:cs typeface="Calibri" pitchFamily="34" charset="-120"/>
+              </a:rPr>
+              <a:t>Example: "10x faster than manual methods, 50% cheaper than competitors"</a:t>
+            </a:r>
+            <a:endParaRPr lang="en-US" sz="1800" dirty="0"/>
+          </a:p>
+        </p:txBody>
+      </p:sp>
+      <p:sp>
+        <p:nvSpPr>
+          <p:cNvPr id="6" name="Shape 4"/>
+          <p:cNvSpPr/>
+          <p:nvPr/>
+        </p:nvSpPr>
+        <p:spPr>
+          <a:xfrm>
+            <a:off x="0" y="6720840"/>
+            <a:ext cx="73152" cy="137160"/>
+          </a:xfrm>
+          <a:prstGeom prst="rect">
+            <a:avLst/>
+          </a:prstGeom>
+          <a:solidFill>
+            <a:srgbClr val="38BDF8"/>
+          </a:solidFill>
+          <a:ln/>
+        </p:spPr>
+      </p:sp>
+      <p:sp>
+        <p:nvSpPr>
+          <p:cNvPr id="7" name="Text 5"/>
+          <p:cNvSpPr/>
+          <p:nvPr/>
+        </p:nvSpPr>
+        <p:spPr>
+          <a:xfrm>
+            <a:off x="274320" y="6720840"/>
+            <a:ext cx="2743200" cy="137160"/>
+          </a:xfrm>
+          <a:prstGeom prst="rect">
+            <a:avLst/>
+          </a:prstGeom>
+          <a:noFill/>
+          <a:ln/>
+        </p:spPr>
+        <p:txBody>
+          <a:bodyPr wrap="square" rtlCol="0" anchor="ctr"/>
+          <a:lstStyle/>
+          <a:p>
+            <a:pPr indent="0" marL="0">
+              <a:buNone/>
+            </a:pPr>
+            <a:r>
+              <a:rPr lang="en-US" sz="1000" dirty="0">
+                <a:solidFill>
+                  <a:srgbClr val="6B7280"/>
+                </a:solidFill>
+                <a:latin typeface="Calibri" pitchFamily="34" charset="0"/>
+                <a:ea typeface="Calibri" pitchFamily="34" charset="-122"/>
+                <a:cs typeface="Calibri" pitchFamily="34" charset="-120"/>
+              </a:rPr>
+              <a:t>Creatives Takeover</a:t>
+            </a:r>
+            <a:endParaRPr lang="en-US" sz="1000" dirty="0"/>
+          </a:p>
+        </p:txBody>
+      </p:sp>
+      <p:sp>
+        <p:nvSpPr>
+          <p:cNvPr id="8" name="Text 6"/>
+          <p:cNvSpPr/>
+          <p:nvPr/>
+        </p:nvSpPr>
+        <p:spPr>
+          <a:xfrm>
+            <a:off x="8412480" y="6720840"/>
+            <a:ext cx="274320" cy="137160"/>
+          </a:xfrm>
+          <a:prstGeom prst="rect">
+            <a:avLst/>
+          </a:prstGeom>
+          <a:noFill/>
+          <a:ln/>
+        </p:spPr>
+        <p:txBody>
+          <a:bodyPr wrap="square" rtlCol="0" anchor="ctr"/>
+          <a:lstStyle/>
+          <a:p>
+            <a:pPr algn="r" indent="0" marL="0">
+              <a:buNone/>
+            </a:pPr>
+            <a:r>
+              <a:rPr lang="en-US" sz="1000" dirty="0">
+                <a:solidFill>
+                  <a:srgbClr val="6B7280"/>
+                </a:solidFill>
+                <a:latin typeface="Calibri" pitchFamily="34" charset="0"/>
+                <a:ea typeface="Calibri" pitchFamily="34" charset="-122"/>
+                <a:cs typeface="Calibri" pitchFamily="34" charset="-120"/>
+              </a:rPr>
+              <a:t>3</a:t>
+            </a:r>
+            <a:endParaRPr lang="en-US" sz="1000" dirty="0"/>
           </a:p>
         </p:txBody>
       </p:sp>
@@ -2467,9 +3140,16 @@
 </p:sld>
 </file>
 
-<file path=ppt/slides/slide3.xml><?xml version="1.0" encoding="utf-8"?>
+<file path=ppt/slides/slide4.xml><?xml version="1.0" encoding="utf-8"?>
 <p:sld xmlns:a="http://schemas.openxmlformats.org/drawingml/2006/main" xmlns:r="http://schemas.openxmlformats.org/officeDocument/2006/relationships" xmlns:p="http://schemas.openxmlformats.org/presentationml/2006/main">
-  <p:cSld name="Slide 3">
+  <p:cSld name="Slide 4">
+    <p:bg>
+      <p:bgPr>
+        <a:solidFill>
+          <a:srgbClr val="FFFFFF"/>
+        </a:solidFill>
+      </p:bgPr>
+    </p:bg>
     <p:spTree>
       <p:nvGrpSpPr>
         <p:cNvPr id="1" name=""/>
@@ -2486,14 +3166,34 @@
       </p:grpSpPr>
       <p:sp>
         <p:nvSpPr>
-          <p:cNvPr id="2" name="Text 0"/>
-          <p:cNvSpPr/>
-          <p:nvPr/>
-        </p:nvSpPr>
-        <p:spPr>
-          <a:xfrm>
-            <a:off x="457200" y="457200"/>
-            <a:ext cx="8229600" cy="685800"/>
+          <p:cNvPr id="2" name="Shape 0"/>
+          <p:cNvSpPr/>
+          <p:nvPr/>
+        </p:nvSpPr>
+        <p:spPr>
+          <a:xfrm>
+            <a:off x="0" y="0"/>
+            <a:ext cx="9144000" cy="137160"/>
+          </a:xfrm>
+          <a:prstGeom prst="rect">
+            <a:avLst/>
+          </a:prstGeom>
+          <a:solidFill>
+            <a:srgbClr val="0B1437"/>
+          </a:solidFill>
+          <a:ln/>
+        </p:spPr>
+      </p:sp>
+      <p:sp>
+        <p:nvSpPr>
+          <p:cNvPr id="3" name="Text 1"/>
+          <p:cNvSpPr/>
+          <p:nvPr/>
+        </p:nvSpPr>
+        <p:spPr>
+          <a:xfrm>
+            <a:off x="457200" y="365760"/>
+            <a:ext cx="8229600" cy="548640"/>
           </a:xfrm>
           <a:prstGeom prst="rect">
             <a:avLst/>
@@ -2513,8 +3213,11 @@
                 <a:solidFill>
                   <a:srgbClr val="0B1437"/>
                 </a:solidFill>
-              </a:rPr>
-              <a:t>Problem</a:t>
+                <a:latin typeface="Calibri" pitchFamily="34" charset="0"/>
+                <a:ea typeface="Calibri" pitchFamily="34" charset="-122"/>
+                <a:cs typeface="Calibri" pitchFamily="34" charset="-120"/>
+              </a:rPr>
+              <a:t>Product Demo</a:t>
             </a:r>
             <a:endParaRPr lang="en-US" sz="3200" dirty="0"/>
           </a:p>
@@ -2522,7 +3225,46 @@
       </p:sp>
       <p:sp>
         <p:nvSpPr>
-          <p:cNvPr id="3" name="Text 1"/>
+          <p:cNvPr id="4" name="Text 2"/>
+          <p:cNvSpPr/>
+          <p:nvPr/>
+        </p:nvSpPr>
+        <p:spPr>
+          <a:xfrm>
+            <a:off x="457200" y="914400"/>
+            <a:ext cx="8229600" cy="365760"/>
+          </a:xfrm>
+          <a:prstGeom prst="rect">
+            <a:avLst/>
+          </a:prstGeom>
+          <a:noFill/>
+          <a:ln/>
+        </p:spPr>
+        <p:txBody>
+          <a:bodyPr wrap="square" rtlCol="0" anchor="ctr"/>
+          <a:lstStyle/>
+          <a:p>
+            <a:pPr indent="0" marL="0">
+              <a:buNone/>
+            </a:pPr>
+            <a:r>
+              <a:rPr lang="en-US" sz="1600" i="1" dirty="0">
+                <a:solidFill>
+                  <a:srgbClr val="6B7280"/>
+                </a:solidFill>
+                <a:latin typeface="Calibri" pitchFamily="34" charset="0"/>
+                <a:ea typeface="Calibri" pitchFamily="34" charset="-122"/>
+                <a:cs typeface="Calibri" pitchFamily="34" charset="-120"/>
+              </a:rPr>
+              <a:t>Show, don't just tell</a:t>
+            </a:r>
+            <a:endParaRPr lang="en-US" sz="1600" dirty="0"/>
+          </a:p>
+        </p:txBody>
+      </p:sp>
+      <p:sp>
+        <p:nvSpPr>
+          <p:cNvPr id="5" name="Text 3"/>
           <p:cNvSpPr/>
           <p:nvPr/>
         </p:nvSpPr>
@@ -2549,14 +3291,17 @@
               <a:buChar char="•"/>
             </a:pPr>
             <a:r>
-              <a:rPr lang="en-US" sz="1600" dirty="0">
-                <a:solidFill>
-                  <a:srgbClr val="374151"/>
-                </a:solidFill>
-              </a:rPr>
-              <a:t>State the problem clearly in 1-2 sentences</a:t>
-            </a:r>
-            <a:endParaRPr lang="en-US" sz="1600" dirty="0"/>
+              <a:rPr lang="en-US" sz="1800" b="1" dirty="0">
+                <a:solidFill>
+                  <a:srgbClr val="1F2937"/>
+                </a:solidFill>
+                <a:latin typeface="Calibri" pitchFamily="34" charset="0"/>
+                <a:ea typeface="Calibri" pitchFamily="34" charset="-122"/>
+                <a:cs typeface="Calibri" pitchFamily="34" charset="-120"/>
+              </a:rPr>
+              <a:t>Include screenshots, mockups, or a product demo video</a:t>
+            </a:r>
+            <a:endParaRPr lang="en-US" sz="1800" dirty="0"/>
           </a:p>
           <a:p>
             <a:pPr marL="342900" indent="-342900">
@@ -2567,14 +3312,101 @@
               <a:buChar char="•"/>
             </a:pPr>
             <a:r>
-              <a:rPr lang="en-US" sz="1600" dirty="0">
-                <a:solidFill>
-                  <a:srgbClr val="374151"/>
-                </a:solidFill>
-              </a:rPr>
-              <a:t>Show the impact (cost, time, frustration)</a:t>
-            </a:r>
-            <a:endParaRPr lang="en-US" sz="1600" dirty="0"/>
+              <a:rPr lang="en-US" sz="1800" b="1" dirty="0">
+                <a:solidFill>
+                  <a:srgbClr val="1F2937"/>
+                </a:solidFill>
+                <a:latin typeface="Calibri" pitchFamily="34" charset="0"/>
+                <a:ea typeface="Calibri" pitchFamily="34" charset="-122"/>
+                <a:cs typeface="Calibri" pitchFamily="34" charset="-120"/>
+              </a:rPr>
+              <a:t>Walk through the user journey step-by-step</a:t>
+            </a:r>
+            <a:endParaRPr lang="en-US" sz="1800" dirty="0"/>
+          </a:p>
+          <a:p>
+            <a:pPr lvl="1" marL="685800" indent="-342900">
+              <a:lnSpc>
+                <a:spcPts val="2800"/>
+              </a:lnSpc>
+              <a:buSzPct val="100000"/>
+              <a:buChar char="•"/>
+            </a:pPr>
+            <a:r>
+              <a:rPr lang="en-US" sz="1800" dirty="0">
+                <a:solidFill>
+                  <a:srgbClr val="6B7280"/>
+                </a:solidFill>
+                <a:latin typeface="Calibri" pitchFamily="34" charset="0"/>
+                <a:ea typeface="Calibri" pitchFamily="34" charset="-122"/>
+                <a:cs typeface="Calibri" pitchFamily="34" charset="-120"/>
+              </a:rPr>
+              <a:t>Step 1: User uploads client list</a:t>
+            </a:r>
+            <a:endParaRPr lang="en-US" sz="1800" dirty="0"/>
+          </a:p>
+          <a:p>
+            <a:pPr lvl="1" marL="685800" indent="-342900">
+              <a:lnSpc>
+                <a:spcPts val="2800"/>
+              </a:lnSpc>
+              <a:buSzPct val="100000"/>
+              <a:buChar char="•"/>
+            </a:pPr>
+            <a:r>
+              <a:rPr lang="en-US" sz="1800" dirty="0">
+                <a:solidFill>
+                  <a:srgbClr val="6B7280"/>
+                </a:solidFill>
+                <a:latin typeface="Calibri" pitchFamily="34" charset="0"/>
+                <a:ea typeface="Calibri" pitchFamily="34" charset="-122"/>
+                <a:cs typeface="Calibri" pitchFamily="34" charset="-120"/>
+              </a:rPr>
+              <a:t>Step 2: System generates professional invoices instantly</a:t>
+            </a:r>
+            <a:endParaRPr lang="en-US" sz="1800" dirty="0"/>
+          </a:p>
+          <a:p>
+            <a:pPr lvl="1" marL="685800" indent="-342900">
+              <a:lnSpc>
+                <a:spcPts val="2800"/>
+              </a:lnSpc>
+              <a:buSzPct val="100000"/>
+              <a:buChar char="•"/>
+            </a:pPr>
+            <a:r>
+              <a:rPr lang="en-US" sz="1800" dirty="0">
+                <a:solidFill>
+                  <a:srgbClr val="6B7280"/>
+                </a:solidFill>
+                <a:latin typeface="Calibri" pitchFamily="34" charset="0"/>
+                <a:ea typeface="Calibri" pitchFamily="34" charset="-122"/>
+                <a:cs typeface="Calibri" pitchFamily="34" charset="-120"/>
+              </a:rPr>
+              <a:t>Step 3: Automated reminders sent before due dates</a:t>
+            </a:r>
+            <a:endParaRPr lang="en-US" sz="1800" dirty="0"/>
+          </a:p>
+          <a:p>
+            <a:pPr lvl="1" marL="685800" indent="-342900">
+              <a:lnSpc>
+                <a:spcPts val="2800"/>
+              </a:lnSpc>
+              <a:buSzPct val="100000"/>
+              <a:buChar char="•"/>
+            </a:pPr>
+            <a:r>
+              <a:rPr lang="en-US" sz="1800" dirty="0">
+                <a:solidFill>
+                  <a:srgbClr val="6B7280"/>
+                </a:solidFill>
+                <a:latin typeface="Calibri" pitchFamily="34" charset="0"/>
+                <a:ea typeface="Calibri" pitchFamily="34" charset="-122"/>
+                <a:cs typeface="Calibri" pitchFamily="34" charset="-120"/>
+              </a:rPr>
+              <a:t>Step 4: Payment received and reconciled automatically</a:t>
+            </a:r>
+            <a:endParaRPr lang="en-US" sz="1800" dirty="0"/>
           </a:p>
           <a:p>
             <a:pPr marL="342900" indent="-342900">
@@ -2585,17 +3417,20 @@
               <a:buChar char="•"/>
             </a:pPr>
             <a:r>
-              <a:rPr lang="en-US" sz="1600" dirty="0">
-                <a:solidFill>
-                  <a:srgbClr val="374151"/>
-                </a:solidFill>
-              </a:rPr>
-              <a:t>Use a relatable example or story</a:t>
-            </a:r>
-            <a:endParaRPr lang="en-US" sz="1600" dirty="0"/>
-          </a:p>
-          <a:p>
-            <a:pPr marL="342900" indent="-342900">
+              <a:rPr lang="en-US" sz="1800" b="1" dirty="0">
+                <a:solidFill>
+                  <a:srgbClr val="1F2937"/>
+                </a:solidFill>
+                <a:latin typeface="Calibri" pitchFamily="34" charset="0"/>
+                <a:ea typeface="Calibri" pitchFamily="34" charset="-122"/>
+                <a:cs typeface="Calibri" pitchFamily="34" charset="-120"/>
+              </a:rPr>
+              <a:t>Highlight what makes the UX intuitive and delightful</a:t>
+            </a:r>
+            <a:endParaRPr lang="en-US" sz="1800" dirty="0"/>
+          </a:p>
+          <a:p>
+            <a:pPr lvl="1" marL="685800" indent="-342900">
               <a:lnSpc>
                 <a:spcPts val="2800"/>
               </a:lnSpc>
@@ -2603,14 +3438,115 @@
               <a:buChar char="•"/>
             </a:pPr>
             <a:r>
-              <a:rPr lang="en-US" sz="1600" dirty="0">
-                <a:solidFill>
-                  <a:srgbClr val="374151"/>
-                </a:solidFill>
-              </a:rPr>
-              <a:t>Avoid jargon - make it universal</a:t>
-            </a:r>
-            <a:endParaRPr lang="en-US" sz="1600" dirty="0"/>
+              <a:rPr lang="en-US" sz="1800" dirty="0">
+                <a:solidFill>
+                  <a:srgbClr val="6B7280"/>
+                </a:solidFill>
+                <a:latin typeface="Calibri" pitchFamily="34" charset="0"/>
+                <a:ea typeface="Calibri" pitchFamily="34" charset="-122"/>
+                <a:cs typeface="Calibri" pitchFamily="34" charset="-120"/>
+              </a:rPr>
+              <a:t>Example: "No training needed - users are productive on day one"</a:t>
+            </a:r>
+            <a:endParaRPr lang="en-US" sz="1800" dirty="0"/>
+          </a:p>
+        </p:txBody>
+      </p:sp>
+      <p:sp>
+        <p:nvSpPr>
+          <p:cNvPr id="6" name="Shape 4"/>
+          <p:cNvSpPr/>
+          <p:nvPr/>
+        </p:nvSpPr>
+        <p:spPr>
+          <a:xfrm>
+            <a:off x="0" y="6720840"/>
+            <a:ext cx="73152" cy="137160"/>
+          </a:xfrm>
+          <a:prstGeom prst="rect">
+            <a:avLst/>
+          </a:prstGeom>
+          <a:solidFill>
+            <a:srgbClr val="38BDF8"/>
+          </a:solidFill>
+          <a:ln/>
+        </p:spPr>
+      </p:sp>
+      <p:sp>
+        <p:nvSpPr>
+          <p:cNvPr id="7" name="Text 5"/>
+          <p:cNvSpPr/>
+          <p:nvPr/>
+        </p:nvSpPr>
+        <p:spPr>
+          <a:xfrm>
+            <a:off x="274320" y="6720840"/>
+            <a:ext cx="2743200" cy="137160"/>
+          </a:xfrm>
+          <a:prstGeom prst="rect">
+            <a:avLst/>
+          </a:prstGeom>
+          <a:noFill/>
+          <a:ln/>
+        </p:spPr>
+        <p:txBody>
+          <a:bodyPr wrap="square" rtlCol="0" anchor="ctr"/>
+          <a:lstStyle/>
+          <a:p>
+            <a:pPr indent="0" marL="0">
+              <a:buNone/>
+            </a:pPr>
+            <a:r>
+              <a:rPr lang="en-US" sz="1000" dirty="0">
+                <a:solidFill>
+                  <a:srgbClr val="6B7280"/>
+                </a:solidFill>
+                <a:latin typeface="Calibri" pitchFamily="34" charset="0"/>
+                <a:ea typeface="Calibri" pitchFamily="34" charset="-122"/>
+                <a:cs typeface="Calibri" pitchFamily="34" charset="-120"/>
+              </a:rPr>
+              <a:t>Creatives Takeover</a:t>
+            </a:r>
+            <a:endParaRPr lang="en-US" sz="1000" dirty="0"/>
+          </a:p>
+        </p:txBody>
+      </p:sp>
+      <p:sp>
+        <p:nvSpPr>
+          <p:cNvPr id="8" name="Text 6"/>
+          <p:cNvSpPr/>
+          <p:nvPr/>
+        </p:nvSpPr>
+        <p:spPr>
+          <a:xfrm>
+            <a:off x="8412480" y="6720840"/>
+            <a:ext cx="274320" cy="137160"/>
+          </a:xfrm>
+          <a:prstGeom prst="rect">
+            <a:avLst/>
+          </a:prstGeom>
+          <a:noFill/>
+          <a:ln/>
+        </p:spPr>
+        <p:txBody>
+          <a:bodyPr wrap="square" rtlCol="0" anchor="ctr"/>
+          <a:lstStyle/>
+          <a:p>
+            <a:pPr algn="r" indent="0" marL="0">
+              <a:buNone/>
+            </a:pPr>
+            <a:r>
+              <a:rPr lang="en-US" sz="1000" dirty="0">
+                <a:solidFill>
+                  <a:srgbClr val="6B7280"/>
+                </a:solidFill>
+                <a:latin typeface="Calibri" pitchFamily="34" charset="0"/>
+                <a:ea typeface="Calibri" pitchFamily="34" charset="-122"/>
+                <a:cs typeface="Calibri" pitchFamily="34" charset="-120"/>
+              </a:rPr>
+              <a:t>4</a:t>
+            </a:r>
+            <a:endParaRPr lang="en-US" sz="1000" dirty="0"/>
           </a:p>
         </p:txBody>
       </p:sp>
@@ -2622,9 +3558,16 @@
 </p:sld>
 </file>
 
-<file path=ppt/slides/slide4.xml><?xml version="1.0" encoding="utf-8"?>
+<file path=ppt/slides/slide5.xml><?xml version="1.0" encoding="utf-8"?>
 <p:sld xmlns:a="http://schemas.openxmlformats.org/drawingml/2006/main" xmlns:r="http://schemas.openxmlformats.org/officeDocument/2006/relationships" xmlns:p="http://schemas.openxmlformats.org/presentationml/2006/main">
-  <p:cSld name="Slide 4">
+  <p:cSld name="Slide 5">
+    <p:bg>
+      <p:bgPr>
+        <a:solidFill>
+          <a:srgbClr val="FFFFFF"/>
+        </a:solidFill>
+      </p:bgPr>
+    </p:bg>
     <p:spTree>
       <p:nvGrpSpPr>
         <p:cNvPr id="1" name=""/>
@@ -2641,14 +3584,34 @@
       </p:grpSpPr>
       <p:sp>
         <p:nvSpPr>
-          <p:cNvPr id="2" name="Text 0"/>
-          <p:cNvSpPr/>
-          <p:nvPr/>
-        </p:nvSpPr>
-        <p:spPr>
-          <a:xfrm>
-            <a:off x="457200" y="457200"/>
-            <a:ext cx="8229600" cy="685800"/>
+          <p:cNvPr id="2" name="Shape 0"/>
+          <p:cNvSpPr/>
+          <p:nvPr/>
+        </p:nvSpPr>
+        <p:spPr>
+          <a:xfrm>
+            <a:off x="0" y="0"/>
+            <a:ext cx="9144000" cy="137160"/>
+          </a:xfrm>
+          <a:prstGeom prst="rect">
+            <a:avLst/>
+          </a:prstGeom>
+          <a:solidFill>
+            <a:srgbClr val="0B1437"/>
+          </a:solidFill>
+          <a:ln/>
+        </p:spPr>
+      </p:sp>
+      <p:sp>
+        <p:nvSpPr>
+          <p:cNvPr id="3" name="Text 1"/>
+          <p:cNvSpPr/>
+          <p:nvPr/>
+        </p:nvSpPr>
+        <p:spPr>
+          <a:xfrm>
+            <a:off x="457200" y="365760"/>
+            <a:ext cx="8229600" cy="548640"/>
           </a:xfrm>
           <a:prstGeom prst="rect">
             <a:avLst/>
@@ -2668,8 +3631,11 @@
                 <a:solidFill>
                   <a:srgbClr val="0B1437"/>
                 </a:solidFill>
-              </a:rPr>
-              <a:t>Solution</a:t>
+                <a:latin typeface="Calibri" pitchFamily="34" charset="0"/>
+                <a:ea typeface="Calibri" pitchFamily="34" charset="-122"/>
+                <a:cs typeface="Calibri" pitchFamily="34" charset="-120"/>
+              </a:rPr>
+              <a:t>Market Opportunity</a:t>
             </a:r>
             <a:endParaRPr lang="en-US" sz="3200" dirty="0"/>
           </a:p>
@@ -2677,14 +3643,14 @@
       </p:sp>
       <p:sp>
         <p:nvSpPr>
-          <p:cNvPr id="3" name="Text 1"/>
-          <p:cNvSpPr/>
-          <p:nvPr/>
-        </p:nvSpPr>
-        <p:spPr>
-          <a:xfrm>
-            <a:off x="457200" y="1371600"/>
-            <a:ext cx="8229600" cy="4114800"/>
+          <p:cNvPr id="4" name="Text 2"/>
+          <p:cNvSpPr/>
+          <p:nvPr/>
+        </p:nvSpPr>
+        <p:spPr>
+          <a:xfrm>
+            <a:off x="457200" y="914400"/>
+            <a:ext cx="8229600" cy="365760"/>
           </a:xfrm>
           <a:prstGeom prst="rect">
             <a:avLst/>
@@ -2696,76 +3662,492 @@
           <a:bodyPr wrap="square" rtlCol="0" anchor="ctr"/>
           <a:lstStyle/>
           <a:p>
-            <a:pPr marL="342900" indent="-342900">
-              <a:lnSpc>
-                <a:spcPts val="2800"/>
-              </a:lnSpc>
-              <a:buSzPct val="100000"/>
-              <a:buChar char="•"/>
-            </a:pPr>
-            <a:r>
-              <a:rPr lang="en-US" sz="1600" dirty="0">
-                <a:solidFill>
-                  <a:srgbClr val="374151"/>
-                </a:solidFill>
-              </a:rPr>
-              <a:t>Explain how you solve the problem</a:t>
+            <a:pPr indent="0" marL="0">
+              <a:buNone/>
+            </a:pPr>
+            <a:r>
+              <a:rPr lang="en-US" sz="1600" i="1" dirty="0">
+                <a:solidFill>
+                  <a:srgbClr val="6B7280"/>
+                </a:solidFill>
+                <a:latin typeface="Calibri" pitchFamily="34" charset="0"/>
+                <a:ea typeface="Calibri" pitchFamily="34" charset="-122"/>
+                <a:cs typeface="Calibri" pitchFamily="34" charset="-120"/>
+              </a:rPr>
+              <a:t>How big is the opportunity?</a:t>
             </a:r>
             <a:endParaRPr lang="en-US" sz="1600" dirty="0"/>
           </a:p>
-          <a:p>
-            <a:pPr marL="342900" indent="-342900">
-              <a:lnSpc>
-                <a:spcPts val="2800"/>
-              </a:lnSpc>
-              <a:buSzPct val="100000"/>
-              <a:buChar char="•"/>
-            </a:pPr>
-            <a:r>
-              <a:rPr lang="en-US" sz="1600" dirty="0">
-                <a:solidFill>
-                  <a:srgbClr val="374151"/>
-                </a:solidFill>
-              </a:rPr>
-              <a:t>Focus on benefits, not features</a:t>
-            </a:r>
-            <a:endParaRPr lang="en-US" sz="1600" dirty="0"/>
-          </a:p>
-          <a:p>
-            <a:pPr marL="342900" indent="-342900">
-              <a:lnSpc>
-                <a:spcPts val="2800"/>
-              </a:lnSpc>
-              <a:buSzPct val="100000"/>
-              <a:buChar char="•"/>
-            </a:pPr>
-            <a:r>
-              <a:rPr lang="en-US" sz="1600" dirty="0">
-                <a:solidFill>
-                  <a:srgbClr val="374151"/>
-                </a:solidFill>
-              </a:rPr>
-              <a:t>Make it crystal clear what you do</a:t>
-            </a:r>
-            <a:endParaRPr lang="en-US" sz="1600" dirty="0"/>
-          </a:p>
-          <a:p>
-            <a:pPr marL="342900" indent="-342900">
-              <a:lnSpc>
-                <a:spcPts val="2800"/>
-              </a:lnSpc>
-              <a:buSzPct val="100000"/>
-              <a:buChar char="•"/>
-            </a:pPr>
-            <a:r>
-              <a:rPr lang="en-US" sz="1600" dirty="0">
-                <a:solidFill>
-                  <a:srgbClr val="374151"/>
-                </a:solidFill>
-              </a:rPr>
-              <a:t>Use simple language</a:t>
-            </a:r>
-            <a:endParaRPr lang="en-US" sz="1600" dirty="0"/>
+        </p:txBody>
+      </p:sp>
+      <p:sp>
+        <p:nvSpPr>
+          <p:cNvPr id="5" name="Shape 3"/>
+          <p:cNvSpPr/>
+          <p:nvPr/>
+        </p:nvSpPr>
+        <p:spPr>
+          <a:xfrm>
+            <a:off x="731520" y="1645920"/>
+            <a:ext cx="7680960" cy="914400"/>
+          </a:xfrm>
+          <a:prstGeom prst="rect">
+            <a:avLst/>
+          </a:prstGeom>
+          <a:solidFill>
+            <a:srgbClr val="3B82F6">
+              <a:alpha val="90000"/>
+            </a:srgbClr>
+          </a:solidFill>
+          <a:ln w="25400">
+            <a:solidFill>
+              <a:srgbClr val="3B82F6"/>
+            </a:solidFill>
+            <a:prstDash val="solid"/>
+          </a:ln>
+        </p:spPr>
+      </p:sp>
+      <p:sp>
+        <p:nvSpPr>
+          <p:cNvPr id="6" name="Text 4"/>
+          <p:cNvSpPr/>
+          <p:nvPr/>
+        </p:nvSpPr>
+        <p:spPr>
+          <a:xfrm>
+            <a:off x="914400" y="1783080"/>
+            <a:ext cx="1371600" cy="365760"/>
+          </a:xfrm>
+          <a:prstGeom prst="rect">
+            <a:avLst/>
+          </a:prstGeom>
+          <a:noFill/>
+          <a:ln/>
+        </p:spPr>
+        <p:txBody>
+          <a:bodyPr wrap="square" rtlCol="0" anchor="ctr"/>
+          <a:lstStyle/>
+          <a:p>
+            <a:pPr indent="0" marL="0">
+              <a:buNone/>
+            </a:pPr>
+            <a:r>
+              <a:rPr lang="en-US" sz="2400" b="1" dirty="0">
+                <a:solidFill>
+                  <a:srgbClr val="3B82F6"/>
+                </a:solidFill>
+                <a:latin typeface="Calibri" pitchFamily="34" charset="0"/>
+                <a:ea typeface="Calibri" pitchFamily="34" charset="-122"/>
+                <a:cs typeface="Calibri" pitchFamily="34" charset="-120"/>
+              </a:rPr>
+              <a:t>TAM</a:t>
+            </a:r>
+            <a:endParaRPr lang="en-US" sz="2400" dirty="0"/>
+          </a:p>
+        </p:txBody>
+      </p:sp>
+      <p:sp>
+        <p:nvSpPr>
+          <p:cNvPr id="7" name="Text 5"/>
+          <p:cNvSpPr/>
+          <p:nvPr/>
+        </p:nvSpPr>
+        <p:spPr>
+          <a:xfrm>
+            <a:off x="2560320" y="1783080"/>
+            <a:ext cx="2286000" cy="365760"/>
+          </a:xfrm>
+          <a:prstGeom prst="rect">
+            <a:avLst/>
+          </a:prstGeom>
+          <a:noFill/>
+          <a:ln/>
+        </p:spPr>
+        <p:txBody>
+          <a:bodyPr wrap="square" rtlCol="0" anchor="ctr"/>
+          <a:lstStyle/>
+          <a:p>
+            <a:pPr indent="0" marL="0">
+              <a:buNone/>
+            </a:pPr>
+            <a:r>
+              <a:rPr lang="en-US" sz="2400" b="1" dirty="0">
+                <a:solidFill>
+                  <a:srgbClr val="1F2937"/>
+                </a:solidFill>
+                <a:latin typeface="Calibri" pitchFamily="34" charset="0"/>
+                <a:ea typeface="Calibri" pitchFamily="34" charset="-122"/>
+                <a:cs typeface="Calibri" pitchFamily="34" charset="-120"/>
+              </a:rPr>
+              <a:t>$50 Billion</a:t>
+            </a:r>
+            <a:endParaRPr lang="en-US" sz="2400" dirty="0"/>
+          </a:p>
+        </p:txBody>
+      </p:sp>
+      <p:sp>
+        <p:nvSpPr>
+          <p:cNvPr id="8" name="Text 6"/>
+          <p:cNvSpPr/>
+          <p:nvPr/>
+        </p:nvSpPr>
+        <p:spPr>
+          <a:xfrm>
+            <a:off x="5029200" y="1783080"/>
+            <a:ext cx="3200400" cy="365760"/>
+          </a:xfrm>
+          <a:prstGeom prst="rect">
+            <a:avLst/>
+          </a:prstGeom>
+          <a:noFill/>
+          <a:ln/>
+        </p:spPr>
+        <p:txBody>
+          <a:bodyPr wrap="square" rtlCol="0" anchor="ctr"/>
+          <a:lstStyle/>
+          <a:p>
+            <a:pPr indent="0" marL="0">
+              <a:buNone/>
+            </a:pPr>
+            <a:r>
+              <a:rPr lang="en-US" sz="1400" dirty="0">
+                <a:solidFill>
+                  <a:srgbClr val="6B7280"/>
+                </a:solidFill>
+                <a:latin typeface="Calibri" pitchFamily="34" charset="0"/>
+                <a:ea typeface="Calibri" pitchFamily="34" charset="-122"/>
+                <a:cs typeface="Calibri" pitchFamily="34" charset="-120"/>
+              </a:rPr>
+              <a:t>Total Addressable Market</a:t>
+            </a:r>
+            <a:endParaRPr lang="en-US" sz="1400" dirty="0"/>
+          </a:p>
+        </p:txBody>
+      </p:sp>
+      <p:sp>
+        <p:nvSpPr>
+          <p:cNvPr id="9" name="Shape 7"/>
+          <p:cNvSpPr/>
+          <p:nvPr/>
+        </p:nvSpPr>
+        <p:spPr>
+          <a:xfrm>
+            <a:off x="731520" y="2926080"/>
+            <a:ext cx="7680960" cy="914400"/>
+          </a:xfrm>
+          <a:prstGeom prst="rect">
+            <a:avLst/>
+          </a:prstGeom>
+          <a:solidFill>
+            <a:srgbClr val="38BDF8">
+              <a:alpha val="90000"/>
+            </a:srgbClr>
+          </a:solidFill>
+          <a:ln w="25400">
+            <a:solidFill>
+              <a:srgbClr val="38BDF8"/>
+            </a:solidFill>
+            <a:prstDash val="solid"/>
+          </a:ln>
+        </p:spPr>
+      </p:sp>
+      <p:sp>
+        <p:nvSpPr>
+          <p:cNvPr id="10" name="Text 8"/>
+          <p:cNvSpPr/>
+          <p:nvPr/>
+        </p:nvSpPr>
+        <p:spPr>
+          <a:xfrm>
+            <a:off x="914400" y="3063240"/>
+            <a:ext cx="1371600" cy="365760"/>
+          </a:xfrm>
+          <a:prstGeom prst="rect">
+            <a:avLst/>
+          </a:prstGeom>
+          <a:noFill/>
+          <a:ln/>
+        </p:spPr>
+        <p:txBody>
+          <a:bodyPr wrap="square" rtlCol="0" anchor="ctr"/>
+          <a:lstStyle/>
+          <a:p>
+            <a:pPr indent="0" marL="0">
+              <a:buNone/>
+            </a:pPr>
+            <a:r>
+              <a:rPr lang="en-US" sz="2400" b="1" dirty="0">
+                <a:solidFill>
+                  <a:srgbClr val="38BDF8"/>
+                </a:solidFill>
+                <a:latin typeface="Calibri" pitchFamily="34" charset="0"/>
+                <a:ea typeface="Calibri" pitchFamily="34" charset="-122"/>
+                <a:cs typeface="Calibri" pitchFamily="34" charset="-120"/>
+              </a:rPr>
+              <a:t>SAM</a:t>
+            </a:r>
+            <a:endParaRPr lang="en-US" sz="2400" dirty="0"/>
+          </a:p>
+        </p:txBody>
+      </p:sp>
+      <p:sp>
+        <p:nvSpPr>
+          <p:cNvPr id="11" name="Text 9"/>
+          <p:cNvSpPr/>
+          <p:nvPr/>
+        </p:nvSpPr>
+        <p:spPr>
+          <a:xfrm>
+            <a:off x="2560320" y="3063240"/>
+            <a:ext cx="2286000" cy="365760"/>
+          </a:xfrm>
+          <a:prstGeom prst="rect">
+            <a:avLst/>
+          </a:prstGeom>
+          <a:noFill/>
+          <a:ln/>
+        </p:spPr>
+        <p:txBody>
+          <a:bodyPr wrap="square" rtlCol="0" anchor="ctr"/>
+          <a:lstStyle/>
+          <a:p>
+            <a:pPr indent="0" marL="0">
+              <a:buNone/>
+            </a:pPr>
+            <a:r>
+              <a:rPr lang="en-US" sz="2400" b="1" dirty="0">
+                <a:solidFill>
+                  <a:srgbClr val="1F2937"/>
+                </a:solidFill>
+                <a:latin typeface="Calibri" pitchFamily="34" charset="0"/>
+                <a:ea typeface="Calibri" pitchFamily="34" charset="-122"/>
+                <a:cs typeface="Calibri" pitchFamily="34" charset="-120"/>
+              </a:rPr>
+              <a:t>$5 Billion</a:t>
+            </a:r>
+            <a:endParaRPr lang="en-US" sz="2400" dirty="0"/>
+          </a:p>
+        </p:txBody>
+      </p:sp>
+      <p:sp>
+        <p:nvSpPr>
+          <p:cNvPr id="12" name="Text 10"/>
+          <p:cNvSpPr/>
+          <p:nvPr/>
+        </p:nvSpPr>
+        <p:spPr>
+          <a:xfrm>
+            <a:off x="5029200" y="3063240"/>
+            <a:ext cx="3200400" cy="365760"/>
+          </a:xfrm>
+          <a:prstGeom prst="rect">
+            <a:avLst/>
+          </a:prstGeom>
+          <a:noFill/>
+          <a:ln/>
+        </p:spPr>
+        <p:txBody>
+          <a:bodyPr wrap="square" rtlCol="0" anchor="ctr"/>
+          <a:lstStyle/>
+          <a:p>
+            <a:pPr indent="0" marL="0">
+              <a:buNone/>
+            </a:pPr>
+            <a:r>
+              <a:rPr lang="en-US" sz="1400" dirty="0">
+                <a:solidFill>
+                  <a:srgbClr val="6B7280"/>
+                </a:solidFill>
+                <a:latin typeface="Calibri" pitchFamily="34" charset="0"/>
+                <a:ea typeface="Calibri" pitchFamily="34" charset="-122"/>
+                <a:cs typeface="Calibri" pitchFamily="34" charset="-120"/>
+              </a:rPr>
+              <a:t>Serviceable Available Market</a:t>
+            </a:r>
+            <a:endParaRPr lang="en-US" sz="1400" dirty="0"/>
+          </a:p>
+        </p:txBody>
+      </p:sp>
+      <p:sp>
+        <p:nvSpPr>
+          <p:cNvPr id="13" name="Shape 11"/>
+          <p:cNvSpPr/>
+          <p:nvPr/>
+        </p:nvSpPr>
+        <p:spPr>
+          <a:xfrm>
+            <a:off x="731520" y="4206240"/>
+            <a:ext cx="7680960" cy="914400"/>
+          </a:xfrm>
+          <a:prstGeom prst="rect">
+            <a:avLst/>
+          </a:prstGeom>
+          <a:solidFill>
+            <a:srgbClr val="10B981">
+              <a:alpha val="90000"/>
+            </a:srgbClr>
+          </a:solidFill>
+          <a:ln w="25400">
+            <a:solidFill>
+              <a:srgbClr val="10B981"/>
+            </a:solidFill>
+            <a:prstDash val="solid"/>
+          </a:ln>
+        </p:spPr>
+      </p:sp>
+      <p:sp>
+        <p:nvSpPr>
+          <p:cNvPr id="14" name="Text 12"/>
+          <p:cNvSpPr/>
+          <p:nvPr/>
+        </p:nvSpPr>
+        <p:spPr>
+          <a:xfrm>
+            <a:off x="914400" y="4343400"/>
+            <a:ext cx="1371600" cy="365760"/>
+          </a:xfrm>
+          <a:prstGeom prst="rect">
+            <a:avLst/>
+          </a:prstGeom>
+          <a:noFill/>
+          <a:ln/>
+        </p:spPr>
+        <p:txBody>
+          <a:bodyPr wrap="square" rtlCol="0" anchor="ctr"/>
+          <a:lstStyle/>
+          <a:p>
+            <a:pPr indent="0" marL="0">
+              <a:buNone/>
+            </a:pPr>
+            <a:r>
+              <a:rPr lang="en-US" sz="2400" b="1" dirty="0">
+                <a:solidFill>
+                  <a:srgbClr val="10B981"/>
+                </a:solidFill>
+                <a:latin typeface="Calibri" pitchFamily="34" charset="0"/>
+                <a:ea typeface="Calibri" pitchFamily="34" charset="-122"/>
+                <a:cs typeface="Calibri" pitchFamily="34" charset="-120"/>
+              </a:rPr>
+              <a:t>SOM</a:t>
+            </a:r>
+            <a:endParaRPr lang="en-US" sz="2400" dirty="0"/>
+          </a:p>
+        </p:txBody>
+      </p:sp>
+      <p:sp>
+        <p:nvSpPr>
+          <p:cNvPr id="15" name="Text 13"/>
+          <p:cNvSpPr/>
+          <p:nvPr/>
+        </p:nvSpPr>
+        <p:spPr>
+          <a:xfrm>
+            <a:off x="2560320" y="4343400"/>
+            <a:ext cx="2286000" cy="365760"/>
+          </a:xfrm>
+          <a:prstGeom prst="rect">
+            <a:avLst/>
+          </a:prstGeom>
+          <a:noFill/>
+          <a:ln/>
+        </p:spPr>
+        <p:txBody>
+          <a:bodyPr wrap="square" rtlCol="0" anchor="ctr"/>
+          <a:lstStyle/>
+          <a:p>
+            <a:pPr indent="0" marL="0">
+              <a:buNone/>
+            </a:pPr>
+            <a:r>
+              <a:rPr lang="en-US" sz="2400" b="1" dirty="0">
+                <a:solidFill>
+                  <a:srgbClr val="1F2937"/>
+                </a:solidFill>
+                <a:latin typeface="Calibri" pitchFamily="34" charset="0"/>
+                <a:ea typeface="Calibri" pitchFamily="34" charset="-122"/>
+                <a:cs typeface="Calibri" pitchFamily="34" charset="-120"/>
+              </a:rPr>
+              <a:t>$100 Million</a:t>
+            </a:r>
+            <a:endParaRPr lang="en-US" sz="2400" dirty="0"/>
+          </a:p>
+        </p:txBody>
+      </p:sp>
+      <p:sp>
+        <p:nvSpPr>
+          <p:cNvPr id="16" name="Text 14"/>
+          <p:cNvSpPr/>
+          <p:nvPr/>
+        </p:nvSpPr>
+        <p:spPr>
+          <a:xfrm>
+            <a:off x="5029200" y="4343400"/>
+            <a:ext cx="3200400" cy="365760"/>
+          </a:xfrm>
+          <a:prstGeom prst="rect">
+            <a:avLst/>
+          </a:prstGeom>
+          <a:noFill/>
+          <a:ln/>
+        </p:spPr>
+        <p:txBody>
+          <a:bodyPr wrap="square" rtlCol="0" anchor="ctr"/>
+          <a:lstStyle/>
+          <a:p>
+            <a:pPr indent="0" marL="0">
+              <a:buNone/>
+            </a:pPr>
+            <a:r>
+              <a:rPr lang="en-US" sz="1400" dirty="0">
+                <a:solidFill>
+                  <a:srgbClr val="6B7280"/>
+                </a:solidFill>
+                <a:latin typeface="Calibri" pitchFamily="34" charset="0"/>
+                <a:ea typeface="Calibri" pitchFamily="34" charset="-122"/>
+                <a:cs typeface="Calibri" pitchFamily="34" charset="-120"/>
+              </a:rPr>
+              <a:t>Serviceable Obtainable Market (Year 5)</a:t>
+            </a:r>
+            <a:endParaRPr lang="en-US" sz="1400" dirty="0"/>
+          </a:p>
+        </p:txBody>
+      </p:sp>
+      <p:sp>
+        <p:nvSpPr>
+          <p:cNvPr id="17" name="Text 15"/>
+          <p:cNvSpPr/>
+          <p:nvPr/>
+        </p:nvSpPr>
+        <p:spPr>
+          <a:xfrm>
+            <a:off x="8412480" y="6720840"/>
+            <a:ext cx="274320" cy="137160"/>
+          </a:xfrm>
+          <a:prstGeom prst="rect">
+            <a:avLst/>
+          </a:prstGeom>
+          <a:noFill/>
+          <a:ln/>
+        </p:spPr>
+        <p:txBody>
+          <a:bodyPr wrap="square" rtlCol="0" anchor="ctr"/>
+          <a:lstStyle/>
+          <a:p>
+            <a:pPr algn="r" indent="0" marL="0">
+              <a:buNone/>
+            </a:pPr>
+            <a:r>
+              <a:rPr lang="en-US" sz="1000" dirty="0">
+                <a:solidFill>
+                  <a:srgbClr val="6B7280"/>
+                </a:solidFill>
+                <a:latin typeface="Calibri" pitchFamily="34" charset="0"/>
+                <a:ea typeface="Calibri" pitchFamily="34" charset="-122"/>
+                <a:cs typeface="Calibri" pitchFamily="34" charset="-120"/>
+              </a:rPr>
+              <a:t>5</a:t>
+            </a:r>
+            <a:endParaRPr lang="en-US" sz="1000" dirty="0"/>
           </a:p>
         </p:txBody>
       </p:sp>
@@ -2777,9 +4159,16 @@
 </p:sld>
 </file>
 
-<file path=ppt/slides/slide5.xml><?xml version="1.0" encoding="utf-8"?>
+<file path=ppt/slides/slide6.xml><?xml version="1.0" encoding="utf-8"?>
 <p:sld xmlns:a="http://schemas.openxmlformats.org/drawingml/2006/main" xmlns:r="http://schemas.openxmlformats.org/officeDocument/2006/relationships" xmlns:p="http://schemas.openxmlformats.org/presentationml/2006/main">
-  <p:cSld name="Slide 5">
+  <p:cSld name="Slide 6">
+    <p:bg>
+      <p:bgPr>
+        <a:solidFill>
+          <a:srgbClr val="FFFFFF"/>
+        </a:solidFill>
+      </p:bgPr>
+    </p:bg>
     <p:spTree>
       <p:nvGrpSpPr>
         <p:cNvPr id="1" name=""/>
@@ -2796,14 +4185,34 @@
       </p:grpSpPr>
       <p:sp>
         <p:nvSpPr>
-          <p:cNvPr id="2" name="Text 0"/>
-          <p:cNvSpPr/>
-          <p:nvPr/>
-        </p:nvSpPr>
-        <p:spPr>
-          <a:xfrm>
-            <a:off x="457200" y="457200"/>
-            <a:ext cx="8229600" cy="685800"/>
+          <p:cNvPr id="2" name="Shape 0"/>
+          <p:cNvSpPr/>
+          <p:nvPr/>
+        </p:nvSpPr>
+        <p:spPr>
+          <a:xfrm>
+            <a:off x="0" y="0"/>
+            <a:ext cx="9144000" cy="137160"/>
+          </a:xfrm>
+          <a:prstGeom prst="rect">
+            <a:avLst/>
+          </a:prstGeom>
+          <a:solidFill>
+            <a:srgbClr val="0B1437"/>
+          </a:solidFill>
+          <a:ln/>
+        </p:spPr>
+      </p:sp>
+      <p:sp>
+        <p:nvSpPr>
+          <p:cNvPr id="3" name="Text 1"/>
+          <p:cNvSpPr/>
+          <p:nvPr/>
+        </p:nvSpPr>
+        <p:spPr>
+          <a:xfrm>
+            <a:off x="457200" y="365760"/>
+            <a:ext cx="8229600" cy="548640"/>
           </a:xfrm>
           <a:prstGeom prst="rect">
             <a:avLst/>
@@ -2823,8 +4232,11 @@
                 <a:solidFill>
                   <a:srgbClr val="0B1437"/>
                 </a:solidFill>
-              </a:rPr>
-              <a:t>Market Opportunity</a:t>
+                <a:latin typeface="Calibri" pitchFamily="34" charset="0"/>
+                <a:ea typeface="Calibri" pitchFamily="34" charset="-122"/>
+                <a:cs typeface="Calibri" pitchFamily="34" charset="-120"/>
+              </a:rPr>
+              <a:t>Business Model</a:t>
             </a:r>
             <a:endParaRPr lang="en-US" sz="3200" dirty="0"/>
           </a:p>
@@ -2832,7 +4244,46 @@
       </p:sp>
       <p:sp>
         <p:nvSpPr>
-          <p:cNvPr id="3" name="Text 1"/>
+          <p:cNvPr id="4" name="Text 2"/>
+          <p:cNvSpPr/>
+          <p:nvPr/>
+        </p:nvSpPr>
+        <p:spPr>
+          <a:xfrm>
+            <a:off x="457200" y="914400"/>
+            <a:ext cx="8229600" cy="365760"/>
+          </a:xfrm>
+          <a:prstGeom prst="rect">
+            <a:avLst/>
+          </a:prstGeom>
+          <a:noFill/>
+          <a:ln/>
+        </p:spPr>
+        <p:txBody>
+          <a:bodyPr wrap="square" rtlCol="0" anchor="ctr"/>
+          <a:lstStyle/>
+          <a:p>
+            <a:pPr indent="0" marL="0">
+              <a:buNone/>
+            </a:pPr>
+            <a:r>
+              <a:rPr lang="en-US" sz="1600" i="1" dirty="0">
+                <a:solidFill>
+                  <a:srgbClr val="6B7280"/>
+                </a:solidFill>
+                <a:latin typeface="Calibri" pitchFamily="34" charset="0"/>
+                <a:ea typeface="Calibri" pitchFamily="34" charset="-122"/>
+                <a:cs typeface="Calibri" pitchFamily="34" charset="-120"/>
+              </a:rPr>
+              <a:t>How will you make money?</a:t>
+            </a:r>
+            <a:endParaRPr lang="en-US" sz="1600" dirty="0"/>
+          </a:p>
+        </p:txBody>
+      </p:sp>
+      <p:sp>
+        <p:nvSpPr>
+          <p:cNvPr id="5" name="Text 3"/>
           <p:cNvSpPr/>
           <p:nvPr/>
         </p:nvSpPr>
@@ -2859,14 +4310,38 @@
               <a:buChar char="•"/>
             </a:pPr>
             <a:r>
-              <a:rPr lang="en-US" sz="1600" dirty="0">
-                <a:solidFill>
-                  <a:srgbClr val="374151"/>
-                </a:solidFill>
-              </a:rPr>
-              <a:t>TAM, SAM, SOM breakdown</a:t>
-            </a:r>
-            <a:endParaRPr lang="en-US" sz="1600" dirty="0"/>
+              <a:rPr lang="en-US" sz="1800" b="1" dirty="0">
+                <a:solidFill>
+                  <a:srgbClr val="1F2937"/>
+                </a:solidFill>
+                <a:latin typeface="Calibri" pitchFamily="34" charset="0"/>
+                <a:ea typeface="Calibri" pitchFamily="34" charset="-122"/>
+                <a:cs typeface="Calibri" pitchFamily="34" charset="-120"/>
+              </a:rPr>
+              <a:t>Describe your revenue model clearly</a:t>
+            </a:r>
+            <a:endParaRPr lang="en-US" sz="1800" dirty="0"/>
+          </a:p>
+          <a:p>
+            <a:pPr lvl="1" marL="685800" indent="-342900">
+              <a:lnSpc>
+                <a:spcPts val="2800"/>
+              </a:lnSpc>
+              <a:buSzPct val="100000"/>
+              <a:buChar char="•"/>
+            </a:pPr>
+            <a:r>
+              <a:rPr lang="en-US" sz="1800" dirty="0">
+                <a:solidFill>
+                  <a:srgbClr val="6B7280"/>
+                </a:solidFill>
+                <a:latin typeface="Calibri" pitchFamily="34" charset="0"/>
+                <a:ea typeface="Calibri" pitchFamily="34" charset="-122"/>
+                <a:cs typeface="Calibri" pitchFamily="34" charset="-120"/>
+              </a:rPr>
+              <a:t>Example: "SaaS subscription model - $49/month per user"</a:t>
+            </a:r>
+            <a:endParaRPr lang="en-US" sz="1800" dirty="0"/>
           </a:p>
           <a:p>
             <a:pPr marL="342900" indent="-342900">
@@ -2877,14 +4352,80 @@
               <a:buChar char="•"/>
             </a:pPr>
             <a:r>
-              <a:rPr lang="en-US" sz="1600" dirty="0">
-                <a:solidFill>
-                  <a:srgbClr val="374151"/>
-                </a:solidFill>
-              </a:rPr>
-              <a:t>Market growth trends</a:t>
-            </a:r>
-            <a:endParaRPr lang="en-US" sz="1600" dirty="0"/>
+              <a:rPr lang="en-US" sz="1800" b="1" dirty="0">
+                <a:solidFill>
+                  <a:srgbClr val="1F2937"/>
+                </a:solidFill>
+                <a:latin typeface="Calibri" pitchFamily="34" charset="0"/>
+                <a:ea typeface="Calibri" pitchFamily="34" charset="-122"/>
+                <a:cs typeface="Calibri" pitchFamily="34" charset="-120"/>
+              </a:rPr>
+              <a:t>Show unit economics (if available)</a:t>
+            </a:r>
+            <a:endParaRPr lang="en-US" sz="1800" dirty="0"/>
+          </a:p>
+          <a:p>
+            <a:pPr lvl="1" marL="685800" indent="-342900">
+              <a:lnSpc>
+                <a:spcPts val="2800"/>
+              </a:lnSpc>
+              <a:buSzPct val="100000"/>
+              <a:buChar char="•"/>
+            </a:pPr>
+            <a:r>
+              <a:rPr lang="en-US" sz="1800" dirty="0">
+                <a:solidFill>
+                  <a:srgbClr val="6B7280"/>
+                </a:solidFill>
+                <a:latin typeface="Calibri" pitchFamily="34" charset="0"/>
+                <a:ea typeface="Calibri" pitchFamily="34" charset="-122"/>
+                <a:cs typeface="Calibri" pitchFamily="34" charset="-120"/>
+              </a:rPr>
+              <a:t>Customer Acquisition Cost (CAC): $300</a:t>
+            </a:r>
+            <a:endParaRPr lang="en-US" sz="1800" dirty="0"/>
+          </a:p>
+          <a:p>
+            <a:pPr lvl="1" marL="685800" indent="-342900">
+              <a:lnSpc>
+                <a:spcPts val="2800"/>
+              </a:lnSpc>
+              <a:buSzPct val="100000"/>
+              <a:buChar char="•"/>
+            </a:pPr>
+            <a:r>
+              <a:rPr lang="en-US" sz="1800" dirty="0">
+                <a:solidFill>
+                  <a:srgbClr val="6B7280"/>
+                </a:solidFill>
+                <a:latin typeface="Calibri" pitchFamily="34" charset="0"/>
+                <a:ea typeface="Calibri" pitchFamily="34" charset="-122"/>
+                <a:cs typeface="Calibri" pitchFamily="34" charset="-120"/>
+              </a:rPr>
+              <a:t>Lifetime Value (LTV): $1,800 (avg 3-year retention)</a:t>
+            </a:r>
+            <a:endParaRPr lang="en-US" sz="1800" dirty="0"/>
+          </a:p>
+          <a:p>
+            <a:pPr lvl="1" marL="685800" indent="-342900">
+              <a:lnSpc>
+                <a:spcPts val="2800"/>
+              </a:lnSpc>
+              <a:buSzPct val="100000"/>
+              <a:buChar char="•"/>
+            </a:pPr>
+            <a:r>
+              <a:rPr lang="en-US" sz="1800" dirty="0">
+                <a:solidFill>
+                  <a:srgbClr val="6B7280"/>
+                </a:solidFill>
+                <a:latin typeface="Calibri" pitchFamily="34" charset="0"/>
+                <a:ea typeface="Calibri" pitchFamily="34" charset="-122"/>
+                <a:cs typeface="Calibri" pitchFamily="34" charset="-120"/>
+              </a:rPr>
+              <a:t>LTV:CAC Ratio: 6:1</a:t>
+            </a:r>
+            <a:endParaRPr lang="en-US" sz="1800" dirty="0"/>
           </a:p>
           <a:p>
             <a:pPr marL="342900" indent="-342900">
@@ -2895,14 +4436,38 @@
               <a:buChar char="•"/>
             </a:pPr>
             <a:r>
-              <a:rPr lang="en-US" sz="1600" dirty="0">
-                <a:solidFill>
-                  <a:srgbClr val="374151"/>
-                </a:solidFill>
-              </a:rPr>
-              <a:t>Target customer segment size</a:t>
-            </a:r>
-            <a:endParaRPr lang="en-US" sz="1600" dirty="0"/>
+              <a:rPr lang="en-US" sz="1800" b="1" dirty="0">
+                <a:solidFill>
+                  <a:srgbClr val="1F2937"/>
+                </a:solidFill>
+                <a:latin typeface="Calibri" pitchFamily="34" charset="0"/>
+                <a:ea typeface="Calibri" pitchFamily="34" charset="-122"/>
+                <a:cs typeface="Calibri" pitchFamily="34" charset="-120"/>
+              </a:rPr>
+              <a:t>Explain pricing strategy and why customers will pay</a:t>
+            </a:r>
+            <a:endParaRPr lang="en-US" sz="1800" dirty="0"/>
+          </a:p>
+          <a:p>
+            <a:pPr lvl="1" marL="685800" indent="-342900">
+              <a:lnSpc>
+                <a:spcPts val="2800"/>
+              </a:lnSpc>
+              <a:buSzPct val="100000"/>
+              <a:buChar char="•"/>
+            </a:pPr>
+            <a:r>
+              <a:rPr lang="en-US" sz="1800" dirty="0">
+                <a:solidFill>
+                  <a:srgbClr val="6B7280"/>
+                </a:solidFill>
+                <a:latin typeface="Calibri" pitchFamily="34" charset="0"/>
+                <a:ea typeface="Calibri" pitchFamily="34" charset="-122"/>
+                <a:cs typeface="Calibri" pitchFamily="34" charset="-120"/>
+              </a:rPr>
+              <a:t>Example: "Saves users $50K/year, so $600/year is an easy ROI"</a:t>
+            </a:r>
+            <a:endParaRPr lang="en-US" sz="1800" dirty="0"/>
           </a:p>
           <a:p>
             <a:pPr marL="342900" indent="-342900">
@@ -2913,14 +4478,136 @@
               <a:buChar char="•"/>
             </a:pPr>
             <a:r>
-              <a:rPr lang="en-US" sz="1600" dirty="0">
-                <a:solidFill>
-                  <a:srgbClr val="374151"/>
-                </a:solidFill>
-              </a:rPr>
-              <a:t>Cite credible sources</a:t>
-            </a:r>
-            <a:endParaRPr lang="en-US" sz="1600" dirty="0"/>
+              <a:rPr lang="en-US" sz="1800" b="1" dirty="0">
+                <a:solidFill>
+                  <a:srgbClr val="1F2937"/>
+                </a:solidFill>
+                <a:latin typeface="Calibri" pitchFamily="34" charset="0"/>
+                <a:ea typeface="Calibri" pitchFamily="34" charset="-122"/>
+                <a:cs typeface="Calibri" pitchFamily="34" charset="-120"/>
+              </a:rPr>
+              <a:t>Outline additional revenue streams (if any)</a:t>
+            </a:r>
+            <a:endParaRPr lang="en-US" sz="1800" dirty="0"/>
+          </a:p>
+          <a:p>
+            <a:pPr lvl="1" marL="685800" indent="-342900">
+              <a:lnSpc>
+                <a:spcPts val="2800"/>
+              </a:lnSpc>
+              <a:buSzPct val="100000"/>
+              <a:buChar char="•"/>
+            </a:pPr>
+            <a:r>
+              <a:rPr lang="en-US" sz="1800" dirty="0">
+                <a:solidFill>
+                  <a:srgbClr val="6B7280"/>
+                </a:solidFill>
+                <a:latin typeface="Calibri" pitchFamily="34" charset="0"/>
+                <a:ea typeface="Calibri" pitchFamily="34" charset="-122"/>
+                <a:cs typeface="Calibri" pitchFamily="34" charset="-120"/>
+              </a:rPr>
+              <a:t>Example: "Premium features, API access, white-label licensing"</a:t>
+            </a:r>
+            <a:endParaRPr lang="en-US" sz="1800" dirty="0"/>
+          </a:p>
+        </p:txBody>
+      </p:sp>
+      <p:sp>
+        <p:nvSpPr>
+          <p:cNvPr id="6" name="Shape 4"/>
+          <p:cNvSpPr/>
+          <p:nvPr/>
+        </p:nvSpPr>
+        <p:spPr>
+          <a:xfrm>
+            <a:off x="0" y="6720840"/>
+            <a:ext cx="73152" cy="137160"/>
+          </a:xfrm>
+          <a:prstGeom prst="rect">
+            <a:avLst/>
+          </a:prstGeom>
+          <a:solidFill>
+            <a:srgbClr val="38BDF8"/>
+          </a:solidFill>
+          <a:ln/>
+        </p:spPr>
+      </p:sp>
+      <p:sp>
+        <p:nvSpPr>
+          <p:cNvPr id="7" name="Text 5"/>
+          <p:cNvSpPr/>
+          <p:nvPr/>
+        </p:nvSpPr>
+        <p:spPr>
+          <a:xfrm>
+            <a:off x="274320" y="6720840"/>
+            <a:ext cx="2743200" cy="137160"/>
+          </a:xfrm>
+          <a:prstGeom prst="rect">
+            <a:avLst/>
+          </a:prstGeom>
+          <a:noFill/>
+          <a:ln/>
+        </p:spPr>
+        <p:txBody>
+          <a:bodyPr wrap="square" rtlCol="0" anchor="ctr"/>
+          <a:lstStyle/>
+          <a:p>
+            <a:pPr indent="0" marL="0">
+              <a:buNone/>
+            </a:pPr>
+            <a:r>
+              <a:rPr lang="en-US" sz="1000" dirty="0">
+                <a:solidFill>
+                  <a:srgbClr val="6B7280"/>
+                </a:solidFill>
+                <a:latin typeface="Calibri" pitchFamily="34" charset="0"/>
+                <a:ea typeface="Calibri" pitchFamily="34" charset="-122"/>
+                <a:cs typeface="Calibri" pitchFamily="34" charset="-120"/>
+              </a:rPr>
+              <a:t>Creatives Takeover</a:t>
+            </a:r>
+            <a:endParaRPr lang="en-US" sz="1000" dirty="0"/>
+          </a:p>
+        </p:txBody>
+      </p:sp>
+      <p:sp>
+        <p:nvSpPr>
+          <p:cNvPr id="8" name="Text 6"/>
+          <p:cNvSpPr/>
+          <p:nvPr/>
+        </p:nvSpPr>
+        <p:spPr>
+          <a:xfrm>
+            <a:off x="8412480" y="6720840"/>
+            <a:ext cx="274320" cy="137160"/>
+          </a:xfrm>
+          <a:prstGeom prst="rect">
+            <a:avLst/>
+          </a:prstGeom>
+          <a:noFill/>
+          <a:ln/>
+        </p:spPr>
+        <p:txBody>
+          <a:bodyPr wrap="square" rtlCol="0" anchor="ctr"/>
+          <a:lstStyle/>
+          <a:p>
+            <a:pPr algn="r" indent="0" marL="0">
+              <a:buNone/>
+            </a:pPr>
+            <a:r>
+              <a:rPr lang="en-US" sz="1000" dirty="0">
+                <a:solidFill>
+                  <a:srgbClr val="6B7280"/>
+                </a:solidFill>
+                <a:latin typeface="Calibri" pitchFamily="34" charset="0"/>
+                <a:ea typeface="Calibri" pitchFamily="34" charset="-122"/>
+                <a:cs typeface="Calibri" pitchFamily="34" charset="-120"/>
+              </a:rPr>
+              <a:t>6</a:t>
+            </a:r>
+            <a:endParaRPr lang="en-US" sz="1000" dirty="0"/>
           </a:p>
         </p:txBody>
       </p:sp>
@@ -2932,9 +4619,16 @@
 </p:sld>
 </file>
 
-<file path=ppt/slides/slide6.xml><?xml version="1.0" encoding="utf-8"?>
+<file path=ppt/slides/slide7.xml><?xml version="1.0" encoding="utf-8"?>
 <p:sld xmlns:a="http://schemas.openxmlformats.org/drawingml/2006/main" xmlns:r="http://schemas.openxmlformats.org/officeDocument/2006/relationships" xmlns:p="http://schemas.openxmlformats.org/presentationml/2006/main">
-  <p:cSld name="Slide 6">
+  <p:cSld name="Slide 7">
+    <p:bg>
+      <p:bgPr>
+        <a:solidFill>
+          <a:srgbClr val="FFFFFF"/>
+        </a:solidFill>
+      </p:bgPr>
+    </p:bg>
     <p:spTree>
       <p:nvGrpSpPr>
         <p:cNvPr id="1" name=""/>
@@ -2951,14 +4645,34 @@
       </p:grpSpPr>
       <p:sp>
         <p:nvSpPr>
-          <p:cNvPr id="2" name="Text 0"/>
-          <p:cNvSpPr/>
-          <p:nvPr/>
-        </p:nvSpPr>
-        <p:spPr>
-          <a:xfrm>
-            <a:off x="457200" y="457200"/>
-            <a:ext cx="8229600" cy="685800"/>
+          <p:cNvPr id="2" name="Shape 0"/>
+          <p:cNvSpPr/>
+          <p:nvPr/>
+        </p:nvSpPr>
+        <p:spPr>
+          <a:xfrm>
+            <a:off x="0" y="0"/>
+            <a:ext cx="9144000" cy="137160"/>
+          </a:xfrm>
+          <a:prstGeom prst="rect">
+            <a:avLst/>
+          </a:prstGeom>
+          <a:solidFill>
+            <a:srgbClr val="0B1437"/>
+          </a:solidFill>
+          <a:ln/>
+        </p:spPr>
+      </p:sp>
+      <p:sp>
+        <p:nvSpPr>
+          <p:cNvPr id="3" name="Text 1"/>
+          <p:cNvSpPr/>
+          <p:nvPr/>
+        </p:nvSpPr>
+        <p:spPr>
+          <a:xfrm>
+            <a:off x="457200" y="365760"/>
+            <a:ext cx="8229600" cy="548640"/>
           </a:xfrm>
           <a:prstGeom prst="rect">
             <a:avLst/>
@@ -2978,8 +4692,11 @@
                 <a:solidFill>
                   <a:srgbClr val="0B1437"/>
                 </a:solidFill>
-              </a:rPr>
-              <a:t>Product</a:t>
+                <a:latin typeface="Calibri" pitchFamily="34" charset="0"/>
+                <a:ea typeface="Calibri" pitchFamily="34" charset="-122"/>
+                <a:cs typeface="Calibri" pitchFamily="34" charset="-120"/>
+              </a:rPr>
+              <a:t>Traction &amp; Metrics</a:t>
             </a:r>
             <a:endParaRPr lang="en-US" sz="3200" dirty="0"/>
           </a:p>
@@ -2987,7 +4704,46 @@
       </p:sp>
       <p:sp>
         <p:nvSpPr>
-          <p:cNvPr id="3" name="Text 1"/>
+          <p:cNvPr id="4" name="Text 2"/>
+          <p:cNvSpPr/>
+          <p:nvPr/>
+        </p:nvSpPr>
+        <p:spPr>
+          <a:xfrm>
+            <a:off x="457200" y="914400"/>
+            <a:ext cx="8229600" cy="365760"/>
+          </a:xfrm>
+          <a:prstGeom prst="rect">
+            <a:avLst/>
+          </a:prstGeom>
+          <a:noFill/>
+          <a:ln/>
+        </p:spPr>
+        <p:txBody>
+          <a:bodyPr wrap="square" rtlCol="0" anchor="ctr"/>
+          <a:lstStyle/>
+          <a:p>
+            <a:pPr indent="0" marL="0">
+              <a:buNone/>
+            </a:pPr>
+            <a:r>
+              <a:rPr lang="en-US" sz="1600" i="1" dirty="0">
+                <a:solidFill>
+                  <a:srgbClr val="6B7280"/>
+                </a:solidFill>
+                <a:latin typeface="Calibri" pitchFamily="34" charset="0"/>
+                <a:ea typeface="Calibri" pitchFamily="34" charset="-122"/>
+                <a:cs typeface="Calibri" pitchFamily="34" charset="-120"/>
+              </a:rPr>
+              <a:t>What progress have you made?</a:t>
+            </a:r>
+            <a:endParaRPr lang="en-US" sz="1600" dirty="0"/>
+          </a:p>
+        </p:txBody>
+      </p:sp>
+      <p:sp>
+        <p:nvSpPr>
+          <p:cNvPr id="5" name="Text 3"/>
           <p:cNvSpPr/>
           <p:nvPr/>
         </p:nvSpPr>
@@ -3014,14 +4770,38 @@
               <a:buChar char="•"/>
             </a:pPr>
             <a:r>
-              <a:rPr lang="en-US" sz="1600" dirty="0">
-                <a:solidFill>
-                  <a:srgbClr val="374151"/>
-                </a:solidFill>
-              </a:rPr>
-              <a:t>Key features and benefits</a:t>
-            </a:r>
-            <a:endParaRPr lang="en-US" sz="1600" dirty="0"/>
+              <a:rPr lang="en-US" sz="1800" b="1" dirty="0">
+                <a:solidFill>
+                  <a:srgbClr val="1F2937"/>
+                </a:solidFill>
+                <a:latin typeface="Calibri" pitchFamily="34" charset="0"/>
+                <a:ea typeface="Calibri" pitchFamily="34" charset="-122"/>
+                <a:cs typeface="Calibri" pitchFamily="34" charset="-120"/>
+              </a:rPr>
+              <a:t>Show your most impressive metrics first</a:t>
+            </a:r>
+            <a:endParaRPr lang="en-US" sz="1800" dirty="0"/>
+          </a:p>
+          <a:p>
+            <a:pPr lvl="1" marL="685800" indent="-342900">
+              <a:lnSpc>
+                <a:spcPts val="2800"/>
+              </a:lnSpc>
+              <a:buSzPct val="100000"/>
+              <a:buChar char="•"/>
+            </a:pPr>
+            <a:r>
+              <a:rPr lang="en-US" sz="1800" dirty="0">
+                <a:solidFill>
+                  <a:srgbClr val="10B981"/>
+                </a:solidFill>
+                <a:latin typeface="Calibri" pitchFamily="34" charset="0"/>
+                <a:ea typeface="Calibri" pitchFamily="34" charset="-122"/>
+                <a:cs typeface="Calibri" pitchFamily="34" charset="-120"/>
+              </a:rPr>
+              <a:t>Example: "$100K MRR with 40% month-over-month growth"</a:t>
+            </a:r>
+            <a:endParaRPr lang="en-US" sz="1800" dirty="0"/>
           </a:p>
           <a:p>
             <a:pPr marL="342900" indent="-342900">
@@ -3032,14 +4812,80 @@
               <a:buChar char="•"/>
             </a:pPr>
             <a:r>
-              <a:rPr lang="en-US" sz="1600" dirty="0">
-                <a:solidFill>
-                  <a:srgbClr val="374151"/>
-                </a:solidFill>
-              </a:rPr>
-              <a:t>How it works (simplified)</a:t>
-            </a:r>
-            <a:endParaRPr lang="en-US" sz="1600" dirty="0"/>
+              <a:rPr lang="en-US" sz="1800" b="1" dirty="0">
+                <a:solidFill>
+                  <a:srgbClr val="1F2937"/>
+                </a:solidFill>
+                <a:latin typeface="Calibri" pitchFamily="34" charset="0"/>
+                <a:ea typeface="Calibri" pitchFamily="34" charset="-122"/>
+                <a:cs typeface="Calibri" pitchFamily="34" charset="-120"/>
+              </a:rPr>
+              <a:t>Demonstrate customer validation</a:t>
+            </a:r>
+            <a:endParaRPr lang="en-US" sz="1800" dirty="0"/>
+          </a:p>
+          <a:p>
+            <a:pPr lvl="1" marL="685800" indent="-342900">
+              <a:lnSpc>
+                <a:spcPts val="2800"/>
+              </a:lnSpc>
+              <a:buSzPct val="100000"/>
+              <a:buChar char="•"/>
+            </a:pPr>
+            <a:r>
+              <a:rPr lang="en-US" sz="1800" dirty="0">
+                <a:solidFill>
+                  <a:srgbClr val="6B7280"/>
+                </a:solidFill>
+                <a:latin typeface="Calibri" pitchFamily="34" charset="0"/>
+                <a:ea typeface="Calibri" pitchFamily="34" charset="-122"/>
+                <a:cs typeface="Calibri" pitchFamily="34" charset="-120"/>
+              </a:rPr>
+              <a:t>500 paying customers across 15 industries</a:t>
+            </a:r>
+            <a:endParaRPr lang="en-US" sz="1800" dirty="0"/>
+          </a:p>
+          <a:p>
+            <a:pPr lvl="1" marL="685800" indent="-342900">
+              <a:lnSpc>
+                <a:spcPts val="2800"/>
+              </a:lnSpc>
+              <a:buSzPct val="100000"/>
+              <a:buChar char="•"/>
+            </a:pPr>
+            <a:r>
+              <a:rPr lang="en-US" sz="1800" dirty="0">
+                <a:solidFill>
+                  <a:srgbClr val="6B7280"/>
+                </a:solidFill>
+                <a:latin typeface="Calibri" pitchFamily="34" charset="0"/>
+                <a:ea typeface="Calibri" pitchFamily="34" charset="-122"/>
+                <a:cs typeface="Calibri" pitchFamily="34" charset="-120"/>
+              </a:rPr>
+              <a:t>Net Revenue Retention: 120%</a:t>
+            </a:r>
+            <a:endParaRPr lang="en-US" sz="1800" dirty="0"/>
+          </a:p>
+          <a:p>
+            <a:pPr lvl="1" marL="685800" indent="-342900">
+              <a:lnSpc>
+                <a:spcPts val="2800"/>
+              </a:lnSpc>
+              <a:buSzPct val="100000"/>
+              <a:buChar char="•"/>
+            </a:pPr>
+            <a:r>
+              <a:rPr lang="en-US" sz="1800" dirty="0">
+                <a:solidFill>
+                  <a:srgbClr val="6B7280"/>
+                </a:solidFill>
+                <a:latin typeface="Calibri" pitchFamily="34" charset="0"/>
+                <a:ea typeface="Calibri" pitchFamily="34" charset="-122"/>
+                <a:cs typeface="Calibri" pitchFamily="34" charset="-120"/>
+              </a:rPr>
+              <a:t>Average customer rating: 4.8/5 stars</a:t>
+            </a:r>
+            <a:endParaRPr lang="en-US" sz="1800" dirty="0"/>
           </a:p>
           <a:p>
             <a:pPr marL="342900" indent="-342900">
@@ -3050,14 +4896,38 @@
               <a:buChar char="•"/>
             </a:pPr>
             <a:r>
-              <a:rPr lang="en-US" sz="1600" dirty="0">
-                <a:solidFill>
-                  <a:srgbClr val="374151"/>
-                </a:solidFill>
-              </a:rPr>
-              <a:t>Unique value proposition</a:t>
-            </a:r>
-            <a:endParaRPr lang="en-US" sz="1600" dirty="0"/>
+              <a:rPr lang="en-US" sz="1800" b="1" dirty="0">
+                <a:solidFill>
+                  <a:srgbClr val="1F2937"/>
+                </a:solidFill>
+                <a:latin typeface="Calibri" pitchFamily="34" charset="0"/>
+                <a:ea typeface="Calibri" pitchFamily="34" charset="-122"/>
+                <a:cs typeface="Calibri" pitchFamily="34" charset="-120"/>
+              </a:rPr>
+              <a:t>Show momentum with growth charts or milestones</a:t>
+            </a:r>
+            <a:endParaRPr lang="en-US" sz="1800" dirty="0"/>
+          </a:p>
+          <a:p>
+            <a:pPr lvl="1" marL="685800" indent="-342900">
+              <a:lnSpc>
+                <a:spcPts val="2800"/>
+              </a:lnSpc>
+              <a:buSzPct val="100000"/>
+              <a:buChar char="•"/>
+            </a:pPr>
+            <a:r>
+              <a:rPr lang="en-US" sz="1800" dirty="0">
+                <a:solidFill>
+                  <a:srgbClr val="6B7280"/>
+                </a:solidFill>
+                <a:latin typeface="Calibri" pitchFamily="34" charset="0"/>
+                <a:ea typeface="Calibri" pitchFamily="34" charset="-122"/>
+                <a:cs typeface="Calibri" pitchFamily="34" charset="-120"/>
+              </a:rPr>
+              <a:t>Example: "Grew from $10K to $100K MRR in 8 months"</a:t>
+            </a:r>
+            <a:endParaRPr lang="en-US" sz="1800" dirty="0"/>
           </a:p>
           <a:p>
             <a:pPr marL="342900" indent="-342900">
@@ -3068,14 +4938,136 @@
               <a:buChar char="•"/>
             </a:pPr>
             <a:r>
-              <a:rPr lang="en-US" sz="1600" dirty="0">
-                <a:solidFill>
-                  <a:srgbClr val="374151"/>
-                </a:solidFill>
-              </a:rPr>
-              <a:t>Technology/innovation if relevant</a:t>
-            </a:r>
-            <a:endParaRPr lang="en-US" sz="1600" dirty="0"/>
+              <a:rPr lang="en-US" sz="1800" b="1" dirty="0">
+                <a:solidFill>
+                  <a:srgbClr val="1F2937"/>
+                </a:solidFill>
+                <a:latin typeface="Calibri" pitchFamily="34" charset="0"/>
+                <a:ea typeface="Calibri" pitchFamily="34" charset="-122"/>
+                <a:cs typeface="Calibri" pitchFamily="34" charset="-120"/>
+              </a:rPr>
+              <a:t>Include partnerships, awards, or media coverage</a:t>
+            </a:r>
+            <a:endParaRPr lang="en-US" sz="1800" dirty="0"/>
+          </a:p>
+          <a:p>
+            <a:pPr lvl="1" marL="685800" indent="-342900">
+              <a:lnSpc>
+                <a:spcPts val="2800"/>
+              </a:lnSpc>
+              <a:buSzPct val="100000"/>
+              <a:buChar char="•"/>
+            </a:pPr>
+            <a:r>
+              <a:rPr lang="en-US" sz="1800" dirty="0">
+                <a:solidFill>
+                  <a:srgbClr val="6B7280"/>
+                </a:solidFill>
+                <a:latin typeface="Calibri" pitchFamily="34" charset="0"/>
+                <a:ea typeface="Calibri" pitchFamily="34" charset="-122"/>
+                <a:cs typeface="Calibri" pitchFamily="34" charset="-120"/>
+              </a:rPr>
+              <a:t>Example: "Featured in TechCrunch, partnership with Intuit"</a:t>
+            </a:r>
+            <a:endParaRPr lang="en-US" sz="1800" dirty="0"/>
+          </a:p>
+        </p:txBody>
+      </p:sp>
+      <p:sp>
+        <p:nvSpPr>
+          <p:cNvPr id="6" name="Shape 4"/>
+          <p:cNvSpPr/>
+          <p:nvPr/>
+        </p:nvSpPr>
+        <p:spPr>
+          <a:xfrm>
+            <a:off x="0" y="6720840"/>
+            <a:ext cx="73152" cy="137160"/>
+          </a:xfrm>
+          <a:prstGeom prst="rect">
+            <a:avLst/>
+          </a:prstGeom>
+          <a:solidFill>
+            <a:srgbClr val="38BDF8"/>
+          </a:solidFill>
+          <a:ln/>
+        </p:spPr>
+      </p:sp>
+      <p:sp>
+        <p:nvSpPr>
+          <p:cNvPr id="7" name="Text 5"/>
+          <p:cNvSpPr/>
+          <p:nvPr/>
+        </p:nvSpPr>
+        <p:spPr>
+          <a:xfrm>
+            <a:off x="274320" y="6720840"/>
+            <a:ext cx="2743200" cy="137160"/>
+          </a:xfrm>
+          <a:prstGeom prst="rect">
+            <a:avLst/>
+          </a:prstGeom>
+          <a:noFill/>
+          <a:ln/>
+        </p:spPr>
+        <p:txBody>
+          <a:bodyPr wrap="square" rtlCol="0" anchor="ctr"/>
+          <a:lstStyle/>
+          <a:p>
+            <a:pPr indent="0" marL="0">
+              <a:buNone/>
+            </a:pPr>
+            <a:r>
+              <a:rPr lang="en-US" sz="1000" dirty="0">
+                <a:solidFill>
+                  <a:srgbClr val="6B7280"/>
+                </a:solidFill>
+                <a:latin typeface="Calibri" pitchFamily="34" charset="0"/>
+                <a:ea typeface="Calibri" pitchFamily="34" charset="-122"/>
+                <a:cs typeface="Calibri" pitchFamily="34" charset="-120"/>
+              </a:rPr>
+              <a:t>Creatives Takeover</a:t>
+            </a:r>
+            <a:endParaRPr lang="en-US" sz="1000" dirty="0"/>
+          </a:p>
+        </p:txBody>
+      </p:sp>
+      <p:sp>
+        <p:nvSpPr>
+          <p:cNvPr id="8" name="Text 6"/>
+          <p:cNvSpPr/>
+          <p:nvPr/>
+        </p:nvSpPr>
+        <p:spPr>
+          <a:xfrm>
+            <a:off x="8412480" y="6720840"/>
+            <a:ext cx="274320" cy="137160"/>
+          </a:xfrm>
+          <a:prstGeom prst="rect">
+            <a:avLst/>
+          </a:prstGeom>
+          <a:noFill/>
+          <a:ln/>
+        </p:spPr>
+        <p:txBody>
+          <a:bodyPr wrap="square" rtlCol="0" anchor="ctr"/>
+          <a:lstStyle/>
+          <a:p>
+            <a:pPr algn="r" indent="0" marL="0">
+              <a:buNone/>
+            </a:pPr>
+            <a:r>
+              <a:rPr lang="en-US" sz="1000" dirty="0">
+                <a:solidFill>
+                  <a:srgbClr val="6B7280"/>
+                </a:solidFill>
+                <a:latin typeface="Calibri" pitchFamily="34" charset="0"/>
+                <a:ea typeface="Calibri" pitchFamily="34" charset="-122"/>
+                <a:cs typeface="Calibri" pitchFamily="34" charset="-120"/>
+              </a:rPr>
+              <a:t>7</a:t>
+            </a:r>
+            <a:endParaRPr lang="en-US" sz="1000" dirty="0"/>
           </a:p>
         </p:txBody>
       </p:sp>
@@ -3087,9 +5079,16 @@
 </p:sld>
 </file>
 
-<file path=ppt/slides/slide7.xml><?xml version="1.0" encoding="utf-8"?>
+<file path=ppt/slides/slide8.xml><?xml version="1.0" encoding="utf-8"?>
 <p:sld xmlns:a="http://schemas.openxmlformats.org/drawingml/2006/main" xmlns:r="http://schemas.openxmlformats.org/officeDocument/2006/relationships" xmlns:p="http://schemas.openxmlformats.org/presentationml/2006/main">
-  <p:cSld name="Slide 7">
+  <p:cSld name="Slide 8">
+    <p:bg>
+      <p:bgPr>
+        <a:solidFill>
+          <a:srgbClr val="FFFFFF"/>
+        </a:solidFill>
+      </p:bgPr>
+    </p:bg>
     <p:spTree>
       <p:nvGrpSpPr>
         <p:cNvPr id="1" name=""/>
@@ -3106,14 +5105,34 @@
       </p:grpSpPr>
       <p:sp>
         <p:nvSpPr>
-          <p:cNvPr id="2" name="Text 0"/>
-          <p:cNvSpPr/>
-          <p:nvPr/>
-        </p:nvSpPr>
-        <p:spPr>
-          <a:xfrm>
-            <a:off x="457200" y="457200"/>
-            <a:ext cx="8229600" cy="685800"/>
+          <p:cNvPr id="2" name="Shape 0"/>
+          <p:cNvSpPr/>
+          <p:nvPr/>
+        </p:nvSpPr>
+        <p:spPr>
+          <a:xfrm>
+            <a:off x="0" y="0"/>
+            <a:ext cx="9144000" cy="137160"/>
+          </a:xfrm>
+          <a:prstGeom prst="rect">
+            <a:avLst/>
+          </a:prstGeom>
+          <a:solidFill>
+            <a:srgbClr val="0B1437"/>
+          </a:solidFill>
+          <a:ln/>
+        </p:spPr>
+      </p:sp>
+      <p:sp>
+        <p:nvSpPr>
+          <p:cNvPr id="3" name="Text 1"/>
+          <p:cNvSpPr/>
+          <p:nvPr/>
+        </p:nvSpPr>
+        <p:spPr>
+          <a:xfrm>
+            <a:off x="457200" y="365760"/>
+            <a:ext cx="8229600" cy="548640"/>
           </a:xfrm>
           <a:prstGeom prst="rect">
             <a:avLst/>
@@ -3133,8 +5152,11 @@
                 <a:solidFill>
                   <a:srgbClr val="0B1437"/>
                 </a:solidFill>
-              </a:rPr>
-              <a:t>Traction</a:t>
+                <a:latin typeface="Calibri" pitchFamily="34" charset="0"/>
+                <a:ea typeface="Calibri" pitchFamily="34" charset="-122"/>
+                <a:cs typeface="Calibri" pitchFamily="34" charset="-120"/>
+              </a:rPr>
+              <a:t>Competition</a:t>
             </a:r>
             <a:endParaRPr lang="en-US" sz="3200" dirty="0"/>
           </a:p>
@@ -3142,14 +5164,14 @@
       </p:sp>
       <p:sp>
         <p:nvSpPr>
-          <p:cNvPr id="3" name="Text 1"/>
-          <p:cNvSpPr/>
-          <p:nvPr/>
-        </p:nvSpPr>
-        <p:spPr>
-          <a:xfrm>
-            <a:off x="457200" y="1371600"/>
-            <a:ext cx="8229600" cy="4114800"/>
+          <p:cNvPr id="4" name="Text 2"/>
+          <p:cNvSpPr/>
+          <p:nvPr/>
+        </p:nvSpPr>
+        <p:spPr>
+          <a:xfrm>
+            <a:off x="457200" y="914400"/>
+            <a:ext cx="8229600" cy="365760"/>
           </a:xfrm>
           <a:prstGeom prst="rect">
             <a:avLst/>
@@ -3161,94 +5183,1095 @@
           <a:bodyPr wrap="square" rtlCol="0" anchor="ctr"/>
           <a:lstStyle/>
           <a:p>
-            <a:pPr marL="342900" indent="-342900">
-              <a:lnSpc>
-                <a:spcPts val="2800"/>
-              </a:lnSpc>
-              <a:buSzPct val="100000"/>
-              <a:buChar char="•"/>
-            </a:pPr>
-            <a:r>
-              <a:rPr lang="en-US" sz="1600" dirty="0">
-                <a:solidFill>
-                  <a:srgbClr val="374151"/>
-                </a:solidFill>
-              </a:rPr>
-              <a:t>User/customer metrics</a:t>
+            <a:pPr indent="0" marL="0">
+              <a:buNone/>
+            </a:pPr>
+            <a:r>
+              <a:rPr lang="en-US" sz="1600" i="1" dirty="0">
+                <a:solidFill>
+                  <a:srgbClr val="6B7280"/>
+                </a:solidFill>
+                <a:latin typeface="Calibri" pitchFamily="34" charset="0"/>
+                <a:ea typeface="Calibri" pitchFamily="34" charset="-122"/>
+                <a:cs typeface="Calibri" pitchFamily="34" charset="-120"/>
+              </a:rPr>
+              <a:t>Why will you win?</a:t>
             </a:r>
             <a:endParaRPr lang="en-US" sz="1600" dirty="0"/>
           </a:p>
-          <a:p>
-            <a:pPr marL="342900" indent="-342900">
-              <a:lnSpc>
-                <a:spcPts val="2800"/>
-              </a:lnSpc>
-              <a:buSzPct val="100000"/>
-              <a:buChar char="•"/>
-            </a:pPr>
-            <a:r>
-              <a:rPr lang="en-US" sz="1600" dirty="0">
-                <a:solidFill>
-                  <a:srgbClr val="374151"/>
-                </a:solidFill>
-              </a:rPr>
-              <a:t>Revenue if applicable</a:t>
-            </a:r>
-            <a:endParaRPr lang="en-US" sz="1600" dirty="0"/>
-          </a:p>
-          <a:p>
-            <a:pPr marL="342900" indent="-342900">
-              <a:lnSpc>
-                <a:spcPts val="2800"/>
-              </a:lnSpc>
-              <a:buSzPct val="100000"/>
-              <a:buChar char="•"/>
-            </a:pPr>
-            <a:r>
-              <a:rPr lang="en-US" sz="1600" dirty="0">
-                <a:solidFill>
-                  <a:srgbClr val="374151"/>
-                </a:solidFill>
-              </a:rPr>
-              <a:t>Growth rate</a:t>
-            </a:r>
-            <a:endParaRPr lang="en-US" sz="1600" dirty="0"/>
-          </a:p>
-          <a:p>
-            <a:pPr marL="342900" indent="-342900">
-              <a:lnSpc>
-                <a:spcPts val="2800"/>
-              </a:lnSpc>
-              <a:buSzPct val="100000"/>
-              <a:buChar char="•"/>
-            </a:pPr>
-            <a:r>
-              <a:rPr lang="en-US" sz="1600" dirty="0">
-                <a:solidFill>
-                  <a:srgbClr val="374151"/>
-                </a:solidFill>
-              </a:rPr>
-              <a:t>Key milestones achieved</a:t>
-            </a:r>
-            <a:endParaRPr lang="en-US" sz="1600" dirty="0"/>
-          </a:p>
-          <a:p>
-            <a:pPr marL="342900" indent="-342900">
-              <a:lnSpc>
-                <a:spcPts val="2800"/>
-              </a:lnSpc>
-              <a:buSzPct val="100000"/>
-              <a:buChar char="•"/>
-            </a:pPr>
-            <a:r>
-              <a:rPr lang="en-US" sz="1600" dirty="0">
-                <a:solidFill>
-                  <a:srgbClr val="374151"/>
-                </a:solidFill>
-              </a:rPr>
-              <a:t>Customer testimonials or logos</a:t>
-            </a:r>
-            <a:endParaRPr lang="en-US" sz="1600" dirty="0"/>
+        </p:txBody>
+      </p:sp>
+      <p:sp>
+        <p:nvSpPr>
+          <p:cNvPr id="5" name="Text 3"/>
+          <p:cNvSpPr/>
+          <p:nvPr/>
+        </p:nvSpPr>
+        <p:spPr>
+          <a:xfrm>
+            <a:off x="731520" y="1645920"/>
+            <a:ext cx="1554480" cy="457200"/>
+          </a:xfrm>
+          <a:prstGeom prst="rect">
+            <a:avLst/>
+          </a:prstGeom>
+          <a:solidFill>
+            <a:srgbClr val="0B1437"/>
+          </a:solidFill>
+          <a:ln/>
+        </p:spPr>
+        <p:txBody>
+          <a:bodyPr wrap="square" rtlCol="0" anchor="ctr"/>
+          <a:lstStyle/>
+          <a:p>
+            <a:pPr algn="ctr" indent="0" marL="0">
+              <a:buNone/>
+            </a:pPr>
+            <a:r>
+              <a:rPr lang="en-US" sz="1400" b="1" dirty="0">
+                <a:solidFill>
+                  <a:srgbClr val="FFFFFF"/>
+                </a:solidFill>
+                <a:latin typeface="Calibri" pitchFamily="34" charset="0"/>
+                <a:ea typeface="Calibri" pitchFamily="34" charset="-122"/>
+                <a:cs typeface="Calibri" pitchFamily="34" charset="-120"/>
+              </a:rPr>
+              <a:t>Company</a:t>
+            </a:r>
+            <a:endParaRPr lang="en-US" sz="1400" dirty="0"/>
+          </a:p>
+        </p:txBody>
+      </p:sp>
+      <p:sp>
+        <p:nvSpPr>
+          <p:cNvPr id="6" name="Text 4"/>
+          <p:cNvSpPr/>
+          <p:nvPr/>
+        </p:nvSpPr>
+        <p:spPr>
+          <a:xfrm>
+            <a:off x="2286000" y="1645920"/>
+            <a:ext cx="1554480" cy="457200"/>
+          </a:xfrm>
+          <a:prstGeom prst="rect">
+            <a:avLst/>
+          </a:prstGeom>
+          <a:solidFill>
+            <a:srgbClr val="0B1437"/>
+          </a:solidFill>
+          <a:ln/>
+        </p:spPr>
+        <p:txBody>
+          <a:bodyPr wrap="square" rtlCol="0" anchor="ctr"/>
+          <a:lstStyle/>
+          <a:p>
+            <a:pPr algn="ctr" indent="0" marL="0">
+              <a:buNone/>
+            </a:pPr>
+            <a:r>
+              <a:rPr lang="en-US" sz="1400" b="1" dirty="0">
+                <a:solidFill>
+                  <a:srgbClr val="FFFFFF"/>
+                </a:solidFill>
+                <a:latin typeface="Calibri" pitchFamily="34" charset="0"/>
+                <a:ea typeface="Calibri" pitchFamily="34" charset="-122"/>
+                <a:cs typeface="Calibri" pitchFamily="34" charset="-120"/>
+              </a:rPr>
+              <a:t>AI-Powered</a:t>
+            </a:r>
+            <a:endParaRPr lang="en-US" sz="1400" dirty="0"/>
+          </a:p>
+        </p:txBody>
+      </p:sp>
+      <p:sp>
+        <p:nvSpPr>
+          <p:cNvPr id="7" name="Text 5"/>
+          <p:cNvSpPr/>
+          <p:nvPr/>
+        </p:nvSpPr>
+        <p:spPr>
+          <a:xfrm>
+            <a:off x="3840480" y="1645920"/>
+            <a:ext cx="1554480" cy="457200"/>
+          </a:xfrm>
+          <a:prstGeom prst="rect">
+            <a:avLst/>
+          </a:prstGeom>
+          <a:solidFill>
+            <a:srgbClr val="0B1437"/>
+          </a:solidFill>
+          <a:ln/>
+        </p:spPr>
+        <p:txBody>
+          <a:bodyPr wrap="square" rtlCol="0" anchor="ctr"/>
+          <a:lstStyle/>
+          <a:p>
+            <a:pPr algn="ctr" indent="0" marL="0">
+              <a:buNone/>
+            </a:pPr>
+            <a:r>
+              <a:rPr lang="en-US" sz="1400" b="1" dirty="0">
+                <a:solidFill>
+                  <a:srgbClr val="FFFFFF"/>
+                </a:solidFill>
+                <a:latin typeface="Calibri" pitchFamily="34" charset="0"/>
+                <a:ea typeface="Calibri" pitchFamily="34" charset="-122"/>
+                <a:cs typeface="Calibri" pitchFamily="34" charset="-120"/>
+              </a:rPr>
+              <a:t>Mobile App</a:t>
+            </a:r>
+            <a:endParaRPr lang="en-US" sz="1400" dirty="0"/>
+          </a:p>
+        </p:txBody>
+      </p:sp>
+      <p:sp>
+        <p:nvSpPr>
+          <p:cNvPr id="8" name="Text 6"/>
+          <p:cNvSpPr/>
+          <p:nvPr/>
+        </p:nvSpPr>
+        <p:spPr>
+          <a:xfrm>
+            <a:off x="5394960" y="1645920"/>
+            <a:ext cx="1554480" cy="457200"/>
+          </a:xfrm>
+          <a:prstGeom prst="rect">
+            <a:avLst/>
+          </a:prstGeom>
+          <a:solidFill>
+            <a:srgbClr val="0B1437"/>
+          </a:solidFill>
+          <a:ln/>
+        </p:spPr>
+        <p:txBody>
+          <a:bodyPr wrap="square" rtlCol="0" anchor="ctr"/>
+          <a:lstStyle/>
+          <a:p>
+            <a:pPr algn="ctr" indent="0" marL="0">
+              <a:buNone/>
+            </a:pPr>
+            <a:r>
+              <a:rPr lang="en-US" sz="1400" b="1" dirty="0">
+                <a:solidFill>
+                  <a:srgbClr val="FFFFFF"/>
+                </a:solidFill>
+                <a:latin typeface="Calibri" pitchFamily="34" charset="0"/>
+                <a:ea typeface="Calibri" pitchFamily="34" charset="-122"/>
+                <a:cs typeface="Calibri" pitchFamily="34" charset="-120"/>
+              </a:rPr>
+              <a:t>Integrations</a:t>
+            </a:r>
+            <a:endParaRPr lang="en-US" sz="1400" dirty="0"/>
+          </a:p>
+        </p:txBody>
+      </p:sp>
+      <p:sp>
+        <p:nvSpPr>
+          <p:cNvPr id="9" name="Text 7"/>
+          <p:cNvSpPr/>
+          <p:nvPr/>
+        </p:nvSpPr>
+        <p:spPr>
+          <a:xfrm>
+            <a:off x="6949440" y="1645920"/>
+            <a:ext cx="1554480" cy="457200"/>
+          </a:xfrm>
+          <a:prstGeom prst="rect">
+            <a:avLst/>
+          </a:prstGeom>
+          <a:solidFill>
+            <a:srgbClr val="0B1437"/>
+          </a:solidFill>
+          <a:ln/>
+        </p:spPr>
+        <p:txBody>
+          <a:bodyPr wrap="square" rtlCol="0" anchor="ctr"/>
+          <a:lstStyle/>
+          <a:p>
+            <a:pPr algn="ctr" indent="0" marL="0">
+              <a:buNone/>
+            </a:pPr>
+            <a:r>
+              <a:rPr lang="en-US" sz="1400" b="1" dirty="0">
+                <a:solidFill>
+                  <a:srgbClr val="FFFFFF"/>
+                </a:solidFill>
+                <a:latin typeface="Calibri" pitchFamily="34" charset="0"/>
+                <a:ea typeface="Calibri" pitchFamily="34" charset="-122"/>
+                <a:cs typeface="Calibri" pitchFamily="34" charset="-120"/>
+              </a:rPr>
+              <a:t>Pricing</a:t>
+            </a:r>
+            <a:endParaRPr lang="en-US" sz="1400" dirty="0"/>
+          </a:p>
+        </p:txBody>
+      </p:sp>
+      <p:sp>
+        <p:nvSpPr>
+          <p:cNvPr id="10" name="Text 8"/>
+          <p:cNvSpPr/>
+          <p:nvPr/>
+        </p:nvSpPr>
+        <p:spPr>
+          <a:xfrm>
+            <a:off x="731520" y="2103120"/>
+            <a:ext cx="1554480" cy="457200"/>
+          </a:xfrm>
+          <a:prstGeom prst="rect">
+            <a:avLst/>
+          </a:prstGeom>
+          <a:solidFill>
+            <a:srgbClr val="38BDF8">
+              <a:alpha val="80000"/>
+            </a:srgbClr>
+          </a:solidFill>
+          <a:ln/>
+        </p:spPr>
+        <p:txBody>
+          <a:bodyPr wrap="square" rtlCol="0" anchor="ctr"/>
+          <a:lstStyle/>
+          <a:p>
+            <a:pPr algn="ctr" indent="0" marL="0">
+              <a:buNone/>
+            </a:pPr>
+            <a:r>
+              <a:rPr lang="en-US" sz="1200" b="1" dirty="0">
+                <a:solidFill>
+                  <a:srgbClr val="1F2937"/>
+                </a:solidFill>
+                <a:latin typeface="Calibri" pitchFamily="34" charset="0"/>
+                <a:ea typeface="Calibri" pitchFamily="34" charset="-122"/>
+                <a:cs typeface="Calibri" pitchFamily="34" charset="-120"/>
+              </a:rPr>
+              <a:t>Your Company</a:t>
+            </a:r>
+            <a:endParaRPr lang="en-US" sz="1200" dirty="0"/>
+          </a:p>
+        </p:txBody>
+      </p:sp>
+      <p:sp>
+        <p:nvSpPr>
+          <p:cNvPr id="11" name="Text 9"/>
+          <p:cNvSpPr/>
+          <p:nvPr/>
+        </p:nvSpPr>
+        <p:spPr>
+          <a:xfrm>
+            <a:off x="2286000" y="2103120"/>
+            <a:ext cx="1554480" cy="457200"/>
+          </a:xfrm>
+          <a:prstGeom prst="rect">
+            <a:avLst/>
+          </a:prstGeom>
+          <a:solidFill>
+            <a:srgbClr val="38BDF8">
+              <a:alpha val="80000"/>
+            </a:srgbClr>
+          </a:solidFill>
+          <a:ln/>
+        </p:spPr>
+        <p:txBody>
+          <a:bodyPr wrap="square" rtlCol="0" anchor="ctr"/>
+          <a:lstStyle/>
+          <a:p>
+            <a:pPr algn="ctr" indent="0" marL="0">
+              <a:buNone/>
+            </a:pPr>
+            <a:r>
+              <a:rPr lang="en-US" sz="1200" dirty="0">
+                <a:solidFill>
+                  <a:srgbClr val="1F2937"/>
+                </a:solidFill>
+                <a:latin typeface="Calibri" pitchFamily="34" charset="0"/>
+                <a:ea typeface="Calibri" pitchFamily="34" charset="-122"/>
+                <a:cs typeface="Calibri" pitchFamily="34" charset="-120"/>
+              </a:rPr>
+              <a:t>✓</a:t>
+            </a:r>
+            <a:endParaRPr lang="en-US" sz="1200" dirty="0"/>
+          </a:p>
+        </p:txBody>
+      </p:sp>
+      <p:sp>
+        <p:nvSpPr>
+          <p:cNvPr id="12" name="Text 10"/>
+          <p:cNvSpPr/>
+          <p:nvPr/>
+        </p:nvSpPr>
+        <p:spPr>
+          <a:xfrm>
+            <a:off x="3840480" y="2103120"/>
+            <a:ext cx="1554480" cy="457200"/>
+          </a:xfrm>
+          <a:prstGeom prst="rect">
+            <a:avLst/>
+          </a:prstGeom>
+          <a:solidFill>
+            <a:srgbClr val="38BDF8">
+              <a:alpha val="80000"/>
+            </a:srgbClr>
+          </a:solidFill>
+          <a:ln/>
+        </p:spPr>
+        <p:txBody>
+          <a:bodyPr wrap="square" rtlCol="0" anchor="ctr"/>
+          <a:lstStyle/>
+          <a:p>
+            <a:pPr algn="ctr" indent="0" marL="0">
+              <a:buNone/>
+            </a:pPr>
+            <a:r>
+              <a:rPr lang="en-US" sz="1200" dirty="0">
+                <a:solidFill>
+                  <a:srgbClr val="1F2937"/>
+                </a:solidFill>
+                <a:latin typeface="Calibri" pitchFamily="34" charset="0"/>
+                <a:ea typeface="Calibri" pitchFamily="34" charset="-122"/>
+                <a:cs typeface="Calibri" pitchFamily="34" charset="-120"/>
+              </a:rPr>
+              <a:t>✓</a:t>
+            </a:r>
+            <a:endParaRPr lang="en-US" sz="1200" dirty="0"/>
+          </a:p>
+        </p:txBody>
+      </p:sp>
+      <p:sp>
+        <p:nvSpPr>
+          <p:cNvPr id="13" name="Text 11"/>
+          <p:cNvSpPr/>
+          <p:nvPr/>
+        </p:nvSpPr>
+        <p:spPr>
+          <a:xfrm>
+            <a:off x="5394960" y="2103120"/>
+            <a:ext cx="1554480" cy="457200"/>
+          </a:xfrm>
+          <a:prstGeom prst="rect">
+            <a:avLst/>
+          </a:prstGeom>
+          <a:solidFill>
+            <a:srgbClr val="38BDF8">
+              <a:alpha val="80000"/>
+            </a:srgbClr>
+          </a:solidFill>
+          <a:ln/>
+        </p:spPr>
+        <p:txBody>
+          <a:bodyPr wrap="square" rtlCol="0" anchor="ctr"/>
+          <a:lstStyle/>
+          <a:p>
+            <a:pPr algn="ctr" indent="0" marL="0">
+              <a:buNone/>
+            </a:pPr>
+            <a:r>
+              <a:rPr lang="en-US" sz="1200" dirty="0">
+                <a:solidFill>
+                  <a:srgbClr val="1F2937"/>
+                </a:solidFill>
+                <a:latin typeface="Calibri" pitchFamily="34" charset="0"/>
+                <a:ea typeface="Calibri" pitchFamily="34" charset="-122"/>
+                <a:cs typeface="Calibri" pitchFamily="34" charset="-120"/>
+              </a:rPr>
+              <a:t>✓</a:t>
+            </a:r>
+            <a:endParaRPr lang="en-US" sz="1200" dirty="0"/>
+          </a:p>
+        </p:txBody>
+      </p:sp>
+      <p:sp>
+        <p:nvSpPr>
+          <p:cNvPr id="14" name="Text 12"/>
+          <p:cNvSpPr/>
+          <p:nvPr/>
+        </p:nvSpPr>
+        <p:spPr>
+          <a:xfrm>
+            <a:off x="6949440" y="2103120"/>
+            <a:ext cx="1554480" cy="457200"/>
+          </a:xfrm>
+          <a:prstGeom prst="rect">
+            <a:avLst/>
+          </a:prstGeom>
+          <a:solidFill>
+            <a:srgbClr val="38BDF8">
+              <a:alpha val="80000"/>
+            </a:srgbClr>
+          </a:solidFill>
+          <a:ln/>
+        </p:spPr>
+        <p:txBody>
+          <a:bodyPr wrap="square" rtlCol="0" anchor="ctr"/>
+          <a:lstStyle/>
+          <a:p>
+            <a:pPr algn="ctr" indent="0" marL="0">
+              <a:buNone/>
+            </a:pPr>
+            <a:r>
+              <a:rPr lang="en-US" sz="1200" dirty="0">
+                <a:solidFill>
+                  <a:srgbClr val="1F2937"/>
+                </a:solidFill>
+                <a:latin typeface="Calibri" pitchFamily="34" charset="0"/>
+                <a:ea typeface="Calibri" pitchFamily="34" charset="-122"/>
+                <a:cs typeface="Calibri" pitchFamily="34" charset="-120"/>
+              </a:rPr>
+              <a:t>$49/mo</a:t>
+            </a:r>
+            <a:endParaRPr lang="en-US" sz="1200" dirty="0"/>
+          </a:p>
+        </p:txBody>
+      </p:sp>
+      <p:sp>
+        <p:nvSpPr>
+          <p:cNvPr id="15" name="Text 13"/>
+          <p:cNvSpPr/>
+          <p:nvPr/>
+        </p:nvSpPr>
+        <p:spPr>
+          <a:xfrm>
+            <a:off x="731520" y="2560320"/>
+            <a:ext cx="1554480" cy="457200"/>
+          </a:xfrm>
+          <a:prstGeom prst="rect">
+            <a:avLst/>
+          </a:prstGeom>
+          <a:solidFill>
+            <a:srgbClr val="FFFFFF"/>
+          </a:solidFill>
+          <a:ln/>
+        </p:spPr>
+        <p:txBody>
+          <a:bodyPr wrap="square" rtlCol="0" anchor="ctr"/>
+          <a:lstStyle/>
+          <a:p>
+            <a:pPr algn="ctr" indent="0" marL="0">
+              <a:buNone/>
+            </a:pPr>
+            <a:r>
+              <a:rPr lang="en-US" sz="1200" dirty="0">
+                <a:solidFill>
+                  <a:srgbClr val="1F2937"/>
+                </a:solidFill>
+                <a:latin typeface="Calibri" pitchFamily="34" charset="0"/>
+                <a:ea typeface="Calibri" pitchFamily="34" charset="-122"/>
+                <a:cs typeface="Calibri" pitchFamily="34" charset="-120"/>
+              </a:rPr>
+              <a:t>Competitor A</a:t>
+            </a:r>
+            <a:endParaRPr lang="en-US" sz="1200" dirty="0"/>
+          </a:p>
+        </p:txBody>
+      </p:sp>
+      <p:sp>
+        <p:nvSpPr>
+          <p:cNvPr id="16" name="Text 14"/>
+          <p:cNvSpPr/>
+          <p:nvPr/>
+        </p:nvSpPr>
+        <p:spPr>
+          <a:xfrm>
+            <a:off x="2286000" y="2560320"/>
+            <a:ext cx="1554480" cy="457200"/>
+          </a:xfrm>
+          <a:prstGeom prst="rect">
+            <a:avLst/>
+          </a:prstGeom>
+          <a:solidFill>
+            <a:srgbClr val="FFFFFF"/>
+          </a:solidFill>
+          <a:ln/>
+        </p:spPr>
+        <p:txBody>
+          <a:bodyPr wrap="square" rtlCol="0" anchor="ctr"/>
+          <a:lstStyle/>
+          <a:p>
+            <a:pPr algn="ctr" indent="0" marL="0">
+              <a:buNone/>
+            </a:pPr>
+            <a:r>
+              <a:rPr lang="en-US" sz="1200" dirty="0">
+                <a:solidFill>
+                  <a:srgbClr val="1F2937"/>
+                </a:solidFill>
+                <a:latin typeface="Calibri" pitchFamily="34" charset="0"/>
+                <a:ea typeface="Calibri" pitchFamily="34" charset="-122"/>
+                <a:cs typeface="Calibri" pitchFamily="34" charset="-120"/>
+              </a:rPr>
+              <a:t>✗</a:t>
+            </a:r>
+            <a:endParaRPr lang="en-US" sz="1200" dirty="0"/>
+          </a:p>
+        </p:txBody>
+      </p:sp>
+      <p:sp>
+        <p:nvSpPr>
+          <p:cNvPr id="17" name="Text 15"/>
+          <p:cNvSpPr/>
+          <p:nvPr/>
+        </p:nvSpPr>
+        <p:spPr>
+          <a:xfrm>
+            <a:off x="3840480" y="2560320"/>
+            <a:ext cx="1554480" cy="457200"/>
+          </a:xfrm>
+          <a:prstGeom prst="rect">
+            <a:avLst/>
+          </a:prstGeom>
+          <a:solidFill>
+            <a:srgbClr val="FFFFFF"/>
+          </a:solidFill>
+          <a:ln/>
+        </p:spPr>
+        <p:txBody>
+          <a:bodyPr wrap="square" rtlCol="0" anchor="ctr"/>
+          <a:lstStyle/>
+          <a:p>
+            <a:pPr algn="ctr" indent="0" marL="0">
+              <a:buNone/>
+            </a:pPr>
+            <a:r>
+              <a:rPr lang="en-US" sz="1200" dirty="0">
+                <a:solidFill>
+                  <a:srgbClr val="1F2937"/>
+                </a:solidFill>
+                <a:latin typeface="Calibri" pitchFamily="34" charset="0"/>
+                <a:ea typeface="Calibri" pitchFamily="34" charset="-122"/>
+                <a:cs typeface="Calibri" pitchFamily="34" charset="-120"/>
+              </a:rPr>
+              <a:t>✓</a:t>
+            </a:r>
+            <a:endParaRPr lang="en-US" sz="1200" dirty="0"/>
+          </a:p>
+        </p:txBody>
+      </p:sp>
+      <p:sp>
+        <p:nvSpPr>
+          <p:cNvPr id="18" name="Text 16"/>
+          <p:cNvSpPr/>
+          <p:nvPr/>
+        </p:nvSpPr>
+        <p:spPr>
+          <a:xfrm>
+            <a:off x="5394960" y="2560320"/>
+            <a:ext cx="1554480" cy="457200"/>
+          </a:xfrm>
+          <a:prstGeom prst="rect">
+            <a:avLst/>
+          </a:prstGeom>
+          <a:solidFill>
+            <a:srgbClr val="FFFFFF"/>
+          </a:solidFill>
+          <a:ln/>
+        </p:spPr>
+        <p:txBody>
+          <a:bodyPr wrap="square" rtlCol="0" anchor="ctr"/>
+          <a:lstStyle/>
+          <a:p>
+            <a:pPr algn="ctr" indent="0" marL="0">
+              <a:buNone/>
+            </a:pPr>
+            <a:r>
+              <a:rPr lang="en-US" sz="1200" dirty="0">
+                <a:solidFill>
+                  <a:srgbClr val="1F2937"/>
+                </a:solidFill>
+                <a:latin typeface="Calibri" pitchFamily="34" charset="0"/>
+                <a:ea typeface="Calibri" pitchFamily="34" charset="-122"/>
+                <a:cs typeface="Calibri" pitchFamily="34" charset="-120"/>
+              </a:rPr>
+              <a:t>✗</a:t>
+            </a:r>
+            <a:endParaRPr lang="en-US" sz="1200" dirty="0"/>
+          </a:p>
+        </p:txBody>
+      </p:sp>
+      <p:sp>
+        <p:nvSpPr>
+          <p:cNvPr id="19" name="Text 17"/>
+          <p:cNvSpPr/>
+          <p:nvPr/>
+        </p:nvSpPr>
+        <p:spPr>
+          <a:xfrm>
+            <a:off x="6949440" y="2560320"/>
+            <a:ext cx="1554480" cy="457200"/>
+          </a:xfrm>
+          <a:prstGeom prst="rect">
+            <a:avLst/>
+          </a:prstGeom>
+          <a:solidFill>
+            <a:srgbClr val="FFFFFF"/>
+          </a:solidFill>
+          <a:ln/>
+        </p:spPr>
+        <p:txBody>
+          <a:bodyPr wrap="square" rtlCol="0" anchor="ctr"/>
+          <a:lstStyle/>
+          <a:p>
+            <a:pPr algn="ctr" indent="0" marL="0">
+              <a:buNone/>
+            </a:pPr>
+            <a:r>
+              <a:rPr lang="en-US" sz="1200" dirty="0">
+                <a:solidFill>
+                  <a:srgbClr val="1F2937"/>
+                </a:solidFill>
+                <a:latin typeface="Calibri" pitchFamily="34" charset="0"/>
+                <a:ea typeface="Calibri" pitchFamily="34" charset="-122"/>
+                <a:cs typeface="Calibri" pitchFamily="34" charset="-120"/>
+              </a:rPr>
+              <a:t>$99/mo</a:t>
+            </a:r>
+            <a:endParaRPr lang="en-US" sz="1200" dirty="0"/>
+          </a:p>
+        </p:txBody>
+      </p:sp>
+      <p:sp>
+        <p:nvSpPr>
+          <p:cNvPr id="20" name="Text 18"/>
+          <p:cNvSpPr/>
+          <p:nvPr/>
+        </p:nvSpPr>
+        <p:spPr>
+          <a:xfrm>
+            <a:off x="731520" y="3017520"/>
+            <a:ext cx="1554480" cy="457200"/>
+          </a:xfrm>
+          <a:prstGeom prst="rect">
+            <a:avLst/>
+          </a:prstGeom>
+          <a:solidFill>
+            <a:srgbClr val="FFFFFF"/>
+          </a:solidFill>
+          <a:ln/>
+        </p:spPr>
+        <p:txBody>
+          <a:bodyPr wrap="square" rtlCol="0" anchor="ctr"/>
+          <a:lstStyle/>
+          <a:p>
+            <a:pPr algn="ctr" indent="0" marL="0">
+              <a:buNone/>
+            </a:pPr>
+            <a:r>
+              <a:rPr lang="en-US" sz="1200" dirty="0">
+                <a:solidFill>
+                  <a:srgbClr val="1F2937"/>
+                </a:solidFill>
+                <a:latin typeface="Calibri" pitchFamily="34" charset="0"/>
+                <a:ea typeface="Calibri" pitchFamily="34" charset="-122"/>
+                <a:cs typeface="Calibri" pitchFamily="34" charset="-120"/>
+              </a:rPr>
+              <a:t>Competitor B</a:t>
+            </a:r>
+            <a:endParaRPr lang="en-US" sz="1200" dirty="0"/>
+          </a:p>
+        </p:txBody>
+      </p:sp>
+      <p:sp>
+        <p:nvSpPr>
+          <p:cNvPr id="21" name="Text 19"/>
+          <p:cNvSpPr/>
+          <p:nvPr/>
+        </p:nvSpPr>
+        <p:spPr>
+          <a:xfrm>
+            <a:off x="2286000" y="3017520"/>
+            <a:ext cx="1554480" cy="457200"/>
+          </a:xfrm>
+          <a:prstGeom prst="rect">
+            <a:avLst/>
+          </a:prstGeom>
+          <a:solidFill>
+            <a:srgbClr val="FFFFFF"/>
+          </a:solidFill>
+          <a:ln/>
+        </p:spPr>
+        <p:txBody>
+          <a:bodyPr wrap="square" rtlCol="0" anchor="ctr"/>
+          <a:lstStyle/>
+          <a:p>
+            <a:pPr algn="ctr" indent="0" marL="0">
+              <a:buNone/>
+            </a:pPr>
+            <a:r>
+              <a:rPr lang="en-US" sz="1200" dirty="0">
+                <a:solidFill>
+                  <a:srgbClr val="1F2937"/>
+                </a:solidFill>
+                <a:latin typeface="Calibri" pitchFamily="34" charset="0"/>
+                <a:ea typeface="Calibri" pitchFamily="34" charset="-122"/>
+                <a:cs typeface="Calibri" pitchFamily="34" charset="-120"/>
+              </a:rPr>
+              <a:t>✓</a:t>
+            </a:r>
+            <a:endParaRPr lang="en-US" sz="1200" dirty="0"/>
+          </a:p>
+        </p:txBody>
+      </p:sp>
+      <p:sp>
+        <p:nvSpPr>
+          <p:cNvPr id="22" name="Text 20"/>
+          <p:cNvSpPr/>
+          <p:nvPr/>
+        </p:nvSpPr>
+        <p:spPr>
+          <a:xfrm>
+            <a:off x="3840480" y="3017520"/>
+            <a:ext cx="1554480" cy="457200"/>
+          </a:xfrm>
+          <a:prstGeom prst="rect">
+            <a:avLst/>
+          </a:prstGeom>
+          <a:solidFill>
+            <a:srgbClr val="FFFFFF"/>
+          </a:solidFill>
+          <a:ln/>
+        </p:spPr>
+        <p:txBody>
+          <a:bodyPr wrap="square" rtlCol="0" anchor="ctr"/>
+          <a:lstStyle/>
+          <a:p>
+            <a:pPr algn="ctr" indent="0" marL="0">
+              <a:buNone/>
+            </a:pPr>
+            <a:r>
+              <a:rPr lang="en-US" sz="1200" dirty="0">
+                <a:solidFill>
+                  <a:srgbClr val="1F2937"/>
+                </a:solidFill>
+                <a:latin typeface="Calibri" pitchFamily="34" charset="0"/>
+                <a:ea typeface="Calibri" pitchFamily="34" charset="-122"/>
+                <a:cs typeface="Calibri" pitchFamily="34" charset="-120"/>
+              </a:rPr>
+              <a:t>✗</a:t>
+            </a:r>
+            <a:endParaRPr lang="en-US" sz="1200" dirty="0"/>
+          </a:p>
+        </p:txBody>
+      </p:sp>
+      <p:sp>
+        <p:nvSpPr>
+          <p:cNvPr id="23" name="Text 21"/>
+          <p:cNvSpPr/>
+          <p:nvPr/>
+        </p:nvSpPr>
+        <p:spPr>
+          <a:xfrm>
+            <a:off x="5394960" y="3017520"/>
+            <a:ext cx="1554480" cy="457200"/>
+          </a:xfrm>
+          <a:prstGeom prst="rect">
+            <a:avLst/>
+          </a:prstGeom>
+          <a:solidFill>
+            <a:srgbClr val="FFFFFF"/>
+          </a:solidFill>
+          <a:ln/>
+        </p:spPr>
+        <p:txBody>
+          <a:bodyPr wrap="square" rtlCol="0" anchor="ctr"/>
+          <a:lstStyle/>
+          <a:p>
+            <a:pPr algn="ctr" indent="0" marL="0">
+              <a:buNone/>
+            </a:pPr>
+            <a:r>
+              <a:rPr lang="en-US" sz="1200" dirty="0">
+                <a:solidFill>
+                  <a:srgbClr val="1F2937"/>
+                </a:solidFill>
+                <a:latin typeface="Calibri" pitchFamily="34" charset="0"/>
+                <a:ea typeface="Calibri" pitchFamily="34" charset="-122"/>
+                <a:cs typeface="Calibri" pitchFamily="34" charset="-120"/>
+              </a:rPr>
+              <a:t>✓</a:t>
+            </a:r>
+            <a:endParaRPr lang="en-US" sz="1200" dirty="0"/>
+          </a:p>
+        </p:txBody>
+      </p:sp>
+      <p:sp>
+        <p:nvSpPr>
+          <p:cNvPr id="24" name="Text 22"/>
+          <p:cNvSpPr/>
+          <p:nvPr/>
+        </p:nvSpPr>
+        <p:spPr>
+          <a:xfrm>
+            <a:off x="6949440" y="3017520"/>
+            <a:ext cx="1554480" cy="457200"/>
+          </a:xfrm>
+          <a:prstGeom prst="rect">
+            <a:avLst/>
+          </a:prstGeom>
+          <a:solidFill>
+            <a:srgbClr val="FFFFFF"/>
+          </a:solidFill>
+          <a:ln/>
+        </p:spPr>
+        <p:txBody>
+          <a:bodyPr wrap="square" rtlCol="0" anchor="ctr"/>
+          <a:lstStyle/>
+          <a:p>
+            <a:pPr algn="ctr" indent="0" marL="0">
+              <a:buNone/>
+            </a:pPr>
+            <a:r>
+              <a:rPr lang="en-US" sz="1200" dirty="0">
+                <a:solidFill>
+                  <a:srgbClr val="1F2937"/>
+                </a:solidFill>
+                <a:latin typeface="Calibri" pitchFamily="34" charset="0"/>
+                <a:ea typeface="Calibri" pitchFamily="34" charset="-122"/>
+                <a:cs typeface="Calibri" pitchFamily="34" charset="-120"/>
+              </a:rPr>
+              <a:t>$79/mo</a:t>
+            </a:r>
+            <a:endParaRPr lang="en-US" sz="1200" dirty="0"/>
+          </a:p>
+        </p:txBody>
+      </p:sp>
+      <p:sp>
+        <p:nvSpPr>
+          <p:cNvPr id="25" name="Text 23"/>
+          <p:cNvSpPr/>
+          <p:nvPr/>
+        </p:nvSpPr>
+        <p:spPr>
+          <a:xfrm>
+            <a:off x="731520" y="3474720"/>
+            <a:ext cx="1554480" cy="457200"/>
+          </a:xfrm>
+          <a:prstGeom prst="rect">
+            <a:avLst/>
+          </a:prstGeom>
+          <a:solidFill>
+            <a:srgbClr val="FFFFFF"/>
+          </a:solidFill>
+          <a:ln/>
+        </p:spPr>
+        <p:txBody>
+          <a:bodyPr wrap="square" rtlCol="0" anchor="ctr"/>
+          <a:lstStyle/>
+          <a:p>
+            <a:pPr algn="ctr" indent="0" marL="0">
+              <a:buNone/>
+            </a:pPr>
+            <a:r>
+              <a:rPr lang="en-US" sz="1200" dirty="0">
+                <a:solidFill>
+                  <a:srgbClr val="1F2937"/>
+                </a:solidFill>
+                <a:latin typeface="Calibri" pitchFamily="34" charset="0"/>
+                <a:ea typeface="Calibri" pitchFamily="34" charset="-122"/>
+                <a:cs typeface="Calibri" pitchFamily="34" charset="-120"/>
+              </a:rPr>
+              <a:t>Competitor C</a:t>
+            </a:r>
+            <a:endParaRPr lang="en-US" sz="1200" dirty="0"/>
+          </a:p>
+        </p:txBody>
+      </p:sp>
+      <p:sp>
+        <p:nvSpPr>
+          <p:cNvPr id="26" name="Text 24"/>
+          <p:cNvSpPr/>
+          <p:nvPr/>
+        </p:nvSpPr>
+        <p:spPr>
+          <a:xfrm>
+            <a:off x="2286000" y="3474720"/>
+            <a:ext cx="1554480" cy="457200"/>
+          </a:xfrm>
+          <a:prstGeom prst="rect">
+            <a:avLst/>
+          </a:prstGeom>
+          <a:solidFill>
+            <a:srgbClr val="FFFFFF"/>
+          </a:solidFill>
+          <a:ln/>
+        </p:spPr>
+        <p:txBody>
+          <a:bodyPr wrap="square" rtlCol="0" anchor="ctr"/>
+          <a:lstStyle/>
+          <a:p>
+            <a:pPr algn="ctr" indent="0" marL="0">
+              <a:buNone/>
+            </a:pPr>
+            <a:r>
+              <a:rPr lang="en-US" sz="1200" dirty="0">
+                <a:solidFill>
+                  <a:srgbClr val="1F2937"/>
+                </a:solidFill>
+                <a:latin typeface="Calibri" pitchFamily="34" charset="0"/>
+                <a:ea typeface="Calibri" pitchFamily="34" charset="-122"/>
+                <a:cs typeface="Calibri" pitchFamily="34" charset="-120"/>
+              </a:rPr>
+              <a:t>✗</a:t>
+            </a:r>
+            <a:endParaRPr lang="en-US" sz="1200" dirty="0"/>
+          </a:p>
+        </p:txBody>
+      </p:sp>
+      <p:sp>
+        <p:nvSpPr>
+          <p:cNvPr id="27" name="Text 25"/>
+          <p:cNvSpPr/>
+          <p:nvPr/>
+        </p:nvSpPr>
+        <p:spPr>
+          <a:xfrm>
+            <a:off x="3840480" y="3474720"/>
+            <a:ext cx="1554480" cy="457200"/>
+          </a:xfrm>
+          <a:prstGeom prst="rect">
+            <a:avLst/>
+          </a:prstGeom>
+          <a:solidFill>
+            <a:srgbClr val="FFFFFF"/>
+          </a:solidFill>
+          <a:ln/>
+        </p:spPr>
+        <p:txBody>
+          <a:bodyPr wrap="square" rtlCol="0" anchor="ctr"/>
+          <a:lstStyle/>
+          <a:p>
+            <a:pPr algn="ctr" indent="0" marL="0">
+              <a:buNone/>
+            </a:pPr>
+            <a:r>
+              <a:rPr lang="en-US" sz="1200" dirty="0">
+                <a:solidFill>
+                  <a:srgbClr val="1F2937"/>
+                </a:solidFill>
+                <a:latin typeface="Calibri" pitchFamily="34" charset="0"/>
+                <a:ea typeface="Calibri" pitchFamily="34" charset="-122"/>
+                <a:cs typeface="Calibri" pitchFamily="34" charset="-120"/>
+              </a:rPr>
+              <a:t>✗</a:t>
+            </a:r>
+            <a:endParaRPr lang="en-US" sz="1200" dirty="0"/>
+          </a:p>
+        </p:txBody>
+      </p:sp>
+      <p:sp>
+        <p:nvSpPr>
+          <p:cNvPr id="28" name="Text 26"/>
+          <p:cNvSpPr/>
+          <p:nvPr/>
+        </p:nvSpPr>
+        <p:spPr>
+          <a:xfrm>
+            <a:off x="5394960" y="3474720"/>
+            <a:ext cx="1554480" cy="457200"/>
+          </a:xfrm>
+          <a:prstGeom prst="rect">
+            <a:avLst/>
+          </a:prstGeom>
+          <a:solidFill>
+            <a:srgbClr val="FFFFFF"/>
+          </a:solidFill>
+          <a:ln/>
+        </p:spPr>
+        <p:txBody>
+          <a:bodyPr wrap="square" rtlCol="0" anchor="ctr"/>
+          <a:lstStyle/>
+          <a:p>
+            <a:pPr algn="ctr" indent="0" marL="0">
+              <a:buNone/>
+            </a:pPr>
+            <a:r>
+              <a:rPr lang="en-US" sz="1200" dirty="0">
+                <a:solidFill>
+                  <a:srgbClr val="1F2937"/>
+                </a:solidFill>
+                <a:latin typeface="Calibri" pitchFamily="34" charset="0"/>
+                <a:ea typeface="Calibri" pitchFamily="34" charset="-122"/>
+                <a:cs typeface="Calibri" pitchFamily="34" charset="-120"/>
+              </a:rPr>
+              <a:t>✓</a:t>
+            </a:r>
+            <a:endParaRPr lang="en-US" sz="1200" dirty="0"/>
+          </a:p>
+        </p:txBody>
+      </p:sp>
+      <p:sp>
+        <p:nvSpPr>
+          <p:cNvPr id="29" name="Text 27"/>
+          <p:cNvSpPr/>
+          <p:nvPr/>
+        </p:nvSpPr>
+        <p:spPr>
+          <a:xfrm>
+            <a:off x="6949440" y="3474720"/>
+            <a:ext cx="1554480" cy="457200"/>
+          </a:xfrm>
+          <a:prstGeom prst="rect">
+            <a:avLst/>
+          </a:prstGeom>
+          <a:solidFill>
+            <a:srgbClr val="FFFFFF"/>
+          </a:solidFill>
+          <a:ln/>
+        </p:spPr>
+        <p:txBody>
+          <a:bodyPr wrap="square" rtlCol="0" anchor="ctr"/>
+          <a:lstStyle/>
+          <a:p>
+            <a:pPr algn="ctr" indent="0" marL="0">
+              <a:buNone/>
+            </a:pPr>
+            <a:r>
+              <a:rPr lang="en-US" sz="1200" dirty="0">
+                <a:solidFill>
+                  <a:srgbClr val="1F2937"/>
+                </a:solidFill>
+                <a:latin typeface="Calibri" pitchFamily="34" charset="0"/>
+                <a:ea typeface="Calibri" pitchFamily="34" charset="-122"/>
+                <a:cs typeface="Calibri" pitchFamily="34" charset="-120"/>
+              </a:rPr>
+              <a:t>$59/mo</a:t>
+            </a:r>
+            <a:endParaRPr lang="en-US" sz="1200" dirty="0"/>
+          </a:p>
+        </p:txBody>
+      </p:sp>
+      <p:sp>
+        <p:nvSpPr>
+          <p:cNvPr id="30" name="Text 28"/>
+          <p:cNvSpPr/>
+          <p:nvPr/>
+        </p:nvSpPr>
+        <p:spPr>
+          <a:xfrm>
+            <a:off x="8412480" y="6720840"/>
+            <a:ext cx="274320" cy="137160"/>
+          </a:xfrm>
+          <a:prstGeom prst="rect">
+            <a:avLst/>
+          </a:prstGeom>
+          <a:noFill/>
+          <a:ln/>
+        </p:spPr>
+        <p:txBody>
+          <a:bodyPr wrap="square" rtlCol="0" anchor="ctr"/>
+          <a:lstStyle/>
+          <a:p>
+            <a:pPr algn="r" indent="0" marL="0">
+              <a:buNone/>
+            </a:pPr>
+            <a:r>
+              <a:rPr lang="en-US" sz="1000" dirty="0">
+                <a:solidFill>
+                  <a:srgbClr val="6B7280"/>
+                </a:solidFill>
+                <a:latin typeface="Calibri" pitchFamily="34" charset="0"/>
+                <a:ea typeface="Calibri" pitchFamily="34" charset="-122"/>
+                <a:cs typeface="Calibri" pitchFamily="34" charset="-120"/>
+              </a:rPr>
+              <a:t>8</a:t>
+            </a:r>
+            <a:endParaRPr lang="en-US" sz="1000" dirty="0"/>
           </a:p>
         </p:txBody>
       </p:sp>
@@ -3260,9 +6283,16 @@
 </p:sld>
 </file>
 
-<file path=ppt/slides/slide8.xml><?xml version="1.0" encoding="utf-8"?>
+<file path=ppt/slides/slide9.xml><?xml version="1.0" encoding="utf-8"?>
 <p:sld xmlns:a="http://schemas.openxmlformats.org/drawingml/2006/main" xmlns:r="http://schemas.openxmlformats.org/officeDocument/2006/relationships" xmlns:p="http://schemas.openxmlformats.org/presentationml/2006/main">
-  <p:cSld name="Slide 8">
+  <p:cSld name="Slide 9">
+    <p:bg>
+      <p:bgPr>
+        <a:solidFill>
+          <a:srgbClr val="FFFFFF"/>
+        </a:solidFill>
+      </p:bgPr>
+    </p:bg>
     <p:spTree>
       <p:nvGrpSpPr>
         <p:cNvPr id="1" name=""/>
@@ -3279,14 +6309,34 @@
       </p:grpSpPr>
       <p:sp>
         <p:nvSpPr>
-          <p:cNvPr id="2" name="Text 0"/>
-          <p:cNvSpPr/>
-          <p:nvPr/>
-        </p:nvSpPr>
-        <p:spPr>
-          <a:xfrm>
-            <a:off x="457200" y="457200"/>
-            <a:ext cx="8229600" cy="685800"/>
+          <p:cNvPr id="2" name="Shape 0"/>
+          <p:cNvSpPr/>
+          <p:nvPr/>
+        </p:nvSpPr>
+        <p:spPr>
+          <a:xfrm>
+            <a:off x="0" y="0"/>
+            <a:ext cx="9144000" cy="137160"/>
+          </a:xfrm>
+          <a:prstGeom prst="rect">
+            <a:avLst/>
+          </a:prstGeom>
+          <a:solidFill>
+            <a:srgbClr val="0B1437"/>
+          </a:solidFill>
+          <a:ln/>
+        </p:spPr>
+      </p:sp>
+      <p:sp>
+        <p:nvSpPr>
+          <p:cNvPr id="3" name="Text 1"/>
+          <p:cNvSpPr/>
+          <p:nvPr/>
+        </p:nvSpPr>
+        <p:spPr>
+          <a:xfrm>
+            <a:off x="457200" y="365760"/>
+            <a:ext cx="8229600" cy="548640"/>
           </a:xfrm>
           <a:prstGeom prst="rect">
             <a:avLst/>
@@ -3306,8 +6356,11 @@
                 <a:solidFill>
                   <a:srgbClr val="0B1437"/>
                 </a:solidFill>
-              </a:rPr>
-              <a:t>Business Model</a:t>
+                <a:latin typeface="Calibri" pitchFamily="34" charset="0"/>
+                <a:ea typeface="Calibri" pitchFamily="34" charset="-122"/>
+                <a:cs typeface="Calibri" pitchFamily="34" charset="-120"/>
+              </a:rPr>
+              <a:t>The Team</a:t>
             </a:r>
             <a:endParaRPr lang="en-US" sz="3200" dirty="0"/>
           </a:p>
@@ -3315,7 +6368,46 @@
       </p:sp>
       <p:sp>
         <p:nvSpPr>
-          <p:cNvPr id="3" name="Text 1"/>
+          <p:cNvPr id="4" name="Text 2"/>
+          <p:cNvSpPr/>
+          <p:nvPr/>
+        </p:nvSpPr>
+        <p:spPr>
+          <a:xfrm>
+            <a:off x="457200" y="914400"/>
+            <a:ext cx="8229600" cy="365760"/>
+          </a:xfrm>
+          <a:prstGeom prst="rect">
+            <a:avLst/>
+          </a:prstGeom>
+          <a:noFill/>
+          <a:ln/>
+        </p:spPr>
+        <p:txBody>
+          <a:bodyPr wrap="square" rtlCol="0" anchor="ctr"/>
+          <a:lstStyle/>
+          <a:p>
+            <a:pPr indent="0" marL="0">
+              <a:buNone/>
+            </a:pPr>
+            <a:r>
+              <a:rPr lang="en-US" sz="1600" i="1" dirty="0">
+                <a:solidFill>
+                  <a:srgbClr val="6B7280"/>
+                </a:solidFill>
+                <a:latin typeface="Calibri" pitchFamily="34" charset="0"/>
+                <a:ea typeface="Calibri" pitchFamily="34" charset="-122"/>
+                <a:cs typeface="Calibri" pitchFamily="34" charset="-120"/>
+              </a:rPr>
+              <a:t>Why is this team uniquely qualified?</a:t>
+            </a:r>
+            <a:endParaRPr lang="en-US" sz="1600" dirty="0"/>
+          </a:p>
+        </p:txBody>
+      </p:sp>
+      <p:sp>
+        <p:nvSpPr>
+          <p:cNvPr id="5" name="Text 3"/>
           <p:cNvSpPr/>
           <p:nvPr/>
         </p:nvSpPr>
@@ -3342,14 +6434,38 @@
               <a:buChar char="•"/>
             </a:pPr>
             <a:r>
-              <a:rPr lang="en-US" sz="1600" dirty="0">
-                <a:solidFill>
-                  <a:srgbClr val="374151"/>
-                </a:solidFill>
-              </a:rPr>
-              <a:t>Revenue streams</a:t>
-            </a:r>
-            <a:endParaRPr lang="en-US" sz="1600" dirty="0"/>
+              <a:rPr lang="en-US" sz="1800" b="1" dirty="0">
+                <a:solidFill>
+                  <a:srgbClr val="1F2937"/>
+                </a:solidFill>
+                <a:latin typeface="Calibri" pitchFamily="34" charset="0"/>
+                <a:ea typeface="Calibri" pitchFamily="34" charset="-122"/>
+                <a:cs typeface="Calibri" pitchFamily="34" charset="-120"/>
+              </a:rPr>
+              <a:t>Founder &amp; CEO: Jane Doe</a:t>
+            </a:r>
+            <a:endParaRPr lang="en-US" sz="1800" dirty="0"/>
+          </a:p>
+          <a:p>
+            <a:pPr lvl="1" marL="685800" indent="-342900">
+              <a:lnSpc>
+                <a:spcPts val="2800"/>
+              </a:lnSpc>
+              <a:buSzPct val="100000"/>
+              <a:buChar char="•"/>
+            </a:pPr>
+            <a:r>
+              <a:rPr lang="en-US" sz="1800" dirty="0">
+                <a:solidFill>
+                  <a:srgbClr val="6B7280"/>
+                </a:solidFill>
+                <a:latin typeface="Calibri" pitchFamily="34" charset="0"/>
+                <a:ea typeface="Calibri" pitchFamily="34" charset="-122"/>
+                <a:cs typeface="Calibri" pitchFamily="34" charset="-120"/>
+              </a:rPr>
+              <a:t>Ex-Google product manager, 10 years in fintech, built and sold previous startup for $20M</a:t>
+            </a:r>
+            <a:endParaRPr lang="en-US" sz="1800" dirty="0"/>
           </a:p>
           <a:p>
             <a:pPr marL="342900" indent="-342900">
@@ -3360,14 +6476,38 @@
               <a:buChar char="•"/>
             </a:pPr>
             <a:r>
-              <a:rPr lang="en-US" sz="1600" dirty="0">
-                <a:solidFill>
-                  <a:srgbClr val="374151"/>
-                </a:solidFill>
-              </a:rPr>
-              <a:t>Pricing strategy</a:t>
-            </a:r>
-            <a:endParaRPr lang="en-US" sz="1600" dirty="0"/>
+              <a:rPr lang="en-US" sz="1800" b="1" dirty="0">
+                <a:solidFill>
+                  <a:srgbClr val="1F2937"/>
+                </a:solidFill>
+                <a:latin typeface="Calibri" pitchFamily="34" charset="0"/>
+                <a:ea typeface="Calibri" pitchFamily="34" charset="-122"/>
+                <a:cs typeface="Calibri" pitchFamily="34" charset="-120"/>
+              </a:rPr>
+              <a:t>CTO: John Smith</a:t>
+            </a:r>
+            <a:endParaRPr lang="en-US" sz="1800" dirty="0"/>
+          </a:p>
+          <a:p>
+            <a:pPr lvl="1" marL="685800" indent="-342900">
+              <a:lnSpc>
+                <a:spcPts val="2800"/>
+              </a:lnSpc>
+              <a:buSzPct val="100000"/>
+              <a:buChar char="•"/>
+            </a:pPr>
+            <a:r>
+              <a:rPr lang="en-US" sz="1800" dirty="0">
+                <a:solidFill>
+                  <a:srgbClr val="6B7280"/>
+                </a:solidFill>
+                <a:latin typeface="Calibri" pitchFamily="34" charset="0"/>
+                <a:ea typeface="Calibri" pitchFamily="34" charset="-122"/>
+                <a:cs typeface="Calibri" pitchFamily="34" charset="-120"/>
+              </a:rPr>
+              <a:t>Former lead engineer at Stripe, MIT Computer Science, expert in payment systems</a:t>
+            </a:r>
+            <a:endParaRPr lang="en-US" sz="1800" dirty="0"/>
           </a:p>
           <a:p>
             <a:pPr marL="342900" indent="-342900">
@@ -3378,14 +6518,38 @@
               <a:buChar char="•"/>
             </a:pPr>
             <a:r>
-              <a:rPr lang="en-US" sz="1600" dirty="0">
-                <a:solidFill>
-                  <a:srgbClr val="374151"/>
-                </a:solidFill>
-              </a:rPr>
-              <a:t>Unit economics</a:t>
-            </a:r>
-            <a:endParaRPr lang="en-US" sz="1600" dirty="0"/>
+              <a:rPr lang="en-US" sz="1800" b="1" dirty="0">
+                <a:solidFill>
+                  <a:srgbClr val="1F2937"/>
+                </a:solidFill>
+                <a:latin typeface="Calibri" pitchFamily="34" charset="0"/>
+                <a:ea typeface="Calibri" pitchFamily="34" charset="-122"/>
+                <a:cs typeface="Calibri" pitchFamily="34" charset="-120"/>
+              </a:rPr>
+              <a:t>VP Sales: Sarah Johnson</a:t>
+            </a:r>
+            <a:endParaRPr lang="en-US" sz="1800" dirty="0"/>
+          </a:p>
+          <a:p>
+            <a:pPr lvl="1" marL="685800" indent="-342900">
+              <a:lnSpc>
+                <a:spcPts val="2800"/>
+              </a:lnSpc>
+              <a:buSzPct val="100000"/>
+              <a:buChar char="•"/>
+            </a:pPr>
+            <a:r>
+              <a:rPr lang="en-US" sz="1800" dirty="0">
+                <a:solidFill>
+                  <a:srgbClr val="6B7280"/>
+                </a:solidFill>
+                <a:latin typeface="Calibri" pitchFamily="34" charset="0"/>
+                <a:ea typeface="Calibri" pitchFamily="34" charset="-122"/>
+                <a:cs typeface="Calibri" pitchFamily="34" charset="-120"/>
+              </a:rPr>
+              <a:t>Scaled sales teams at Salesforce and HubSpot, 15 years B2B SaaS experience</a:t>
+            </a:r>
+            <a:endParaRPr lang="en-US" sz="1800" dirty="0"/>
           </a:p>
           <a:p>
             <a:pPr marL="342900" indent="-342900">
@@ -3396,17 +6560,20 @@
               <a:buChar char="•"/>
             </a:pPr>
             <a:r>
-              <a:rPr lang="en-US" sz="1600" dirty="0">
-                <a:solidFill>
-                  <a:srgbClr val="374151"/>
-                </a:solidFill>
-              </a:rPr>
-              <a:t>Customer acquisition cost (CAC)</a:t>
-            </a:r>
-            <a:endParaRPr lang="en-US" sz="1600" dirty="0"/>
-          </a:p>
-          <a:p>
-            <a:pPr marL="342900" indent="-342900">
+              <a:rPr lang="en-US" sz="1800" b="1" dirty="0">
+                <a:solidFill>
+                  <a:srgbClr val="1F2937"/>
+                </a:solidFill>
+                <a:latin typeface="Calibri" pitchFamily="34" charset="0"/>
+                <a:ea typeface="Calibri" pitchFamily="34" charset="-122"/>
+                <a:cs typeface="Calibri" pitchFamily="34" charset="-120"/>
+              </a:rPr>
+              <a:t>Key Advisors:</a:t>
+            </a:r>
+            <a:endParaRPr lang="en-US" sz="1800" dirty="0"/>
+          </a:p>
+          <a:p>
+            <a:pPr lvl="1" marL="685800" indent="-342900">
               <a:lnSpc>
                 <a:spcPts val="2800"/>
               </a:lnSpc>
@@ -3414,52 +6581,50 @@
               <a:buChar char="•"/>
             </a:pPr>
             <a:r>
-              <a:rPr lang="en-US" sz="1600" dirty="0">
-                <a:solidFill>
-                  <a:srgbClr val="374151"/>
-                </a:solidFill>
-              </a:rPr>
-              <a:t>Lifetime value (LTV)</a:t>
-            </a:r>
-            <a:endParaRPr lang="en-US" sz="1600" dirty="0"/>
-          </a:p>
-        </p:txBody>
-      </p:sp>
-    </p:spTree>
-  </p:cSld>
-  <p:clrMapOvr>
-    <a:masterClrMapping/>
-  </p:clrMapOvr>
-</p:sld>
-</file>
-
-<file path=ppt/slides/slide9.xml><?xml version="1.0" encoding="utf-8"?>
-<p:sld xmlns:a="http://schemas.openxmlformats.org/drawingml/2006/main" xmlns:r="http://schemas.openxmlformats.org/officeDocument/2006/relationships" xmlns:p="http://schemas.openxmlformats.org/presentationml/2006/main">
-  <p:cSld name="Slide 9">
-    <p:spTree>
-      <p:nvGrpSpPr>
-        <p:cNvPr id="1" name=""/>
-        <p:cNvGrpSpPr/>
-        <p:nvPr/>
-      </p:nvGrpSpPr>
-      <p:grpSpPr>
-        <a:xfrm>
-          <a:off x="0" y="0"/>
-          <a:ext cx="0" cy="0"/>
-          <a:chOff x="0" y="0"/>
-          <a:chExt cx="0" cy="0"/>
-        </a:xfrm>
-      </p:grpSpPr>
-      <p:sp>
-        <p:nvSpPr>
-          <p:cNvPr id="2" name="Text 0"/>
-          <p:cNvSpPr/>
-          <p:nvPr/>
-        </p:nvSpPr>
-        <p:spPr>
-          <a:xfrm>
-            <a:off x="457200" y="457200"/>
-            <a:ext cx="8229600" cy="685800"/>
+              <a:rPr lang="en-US" sz="1800" dirty="0">
+                <a:solidFill>
+                  <a:srgbClr val="6B7280"/>
+                </a:solidFill>
+                <a:latin typeface="Calibri" pitchFamily="34" charset="0"/>
+                <a:ea typeface="Calibri" pitchFamily="34" charset="-122"/>
+                <a:cs typeface="Calibri" pitchFamily="34" charset="-120"/>
+              </a:rPr>
+              <a:t>Michael Chen (Former CFO of Square), Lisa Park (Partner at Sequoia Capital)</a:t>
+            </a:r>
+            <a:endParaRPr lang="en-US" sz="1800" dirty="0"/>
+          </a:p>
+        </p:txBody>
+      </p:sp>
+      <p:sp>
+        <p:nvSpPr>
+          <p:cNvPr id="6" name="Shape 4"/>
+          <p:cNvSpPr/>
+          <p:nvPr/>
+        </p:nvSpPr>
+        <p:spPr>
+          <a:xfrm>
+            <a:off x="0" y="6720840"/>
+            <a:ext cx="73152" cy="137160"/>
+          </a:xfrm>
+          <a:prstGeom prst="rect">
+            <a:avLst/>
+          </a:prstGeom>
+          <a:solidFill>
+            <a:srgbClr val="38BDF8"/>
+          </a:solidFill>
+          <a:ln/>
+        </p:spPr>
+      </p:sp>
+      <p:sp>
+        <p:nvSpPr>
+          <p:cNvPr id="7" name="Text 5"/>
+          <p:cNvSpPr/>
+          <p:nvPr/>
+        </p:nvSpPr>
+        <p:spPr>
+          <a:xfrm>
+            <a:off x="274320" y="6720840"/>
+            <a:ext cx="2743200" cy="137160"/>
           </a:xfrm>
           <a:prstGeom prst="rect">
             <a:avLst/>
@@ -3475,27 +6640,30 @@
               <a:buNone/>
             </a:pPr>
             <a:r>
-              <a:rPr lang="en-US" sz="3200" b="1" dirty="0">
-                <a:solidFill>
-                  <a:srgbClr val="0B1437"/>
-                </a:solidFill>
-              </a:rPr>
-              <a:t>Competition</a:t>
-            </a:r>
-            <a:endParaRPr lang="en-US" sz="3200" dirty="0"/>
-          </a:p>
-        </p:txBody>
-      </p:sp>
-      <p:sp>
-        <p:nvSpPr>
-          <p:cNvPr id="3" name="Text 1"/>
-          <p:cNvSpPr/>
-          <p:nvPr/>
-        </p:nvSpPr>
-        <p:spPr>
-          <a:xfrm>
-            <a:off x="457200" y="1371600"/>
-            <a:ext cx="8229600" cy="4114800"/>
+              <a:rPr lang="en-US" sz="1000" dirty="0">
+                <a:solidFill>
+                  <a:srgbClr val="6B7280"/>
+                </a:solidFill>
+                <a:latin typeface="Calibri" pitchFamily="34" charset="0"/>
+                <a:ea typeface="Calibri" pitchFamily="34" charset="-122"/>
+                <a:cs typeface="Calibri" pitchFamily="34" charset="-120"/>
+              </a:rPr>
+              <a:t>Creatives Takeover</a:t>
+            </a:r>
+            <a:endParaRPr lang="en-US" sz="1000" dirty="0"/>
+          </a:p>
+        </p:txBody>
+      </p:sp>
+      <p:sp>
+        <p:nvSpPr>
+          <p:cNvPr id="8" name="Text 6"/>
+          <p:cNvSpPr/>
+          <p:nvPr/>
+        </p:nvSpPr>
+        <p:spPr>
+          <a:xfrm>
+            <a:off x="8412480" y="6720840"/>
+            <a:ext cx="274320" cy="137160"/>
           </a:xfrm>
           <a:prstGeom prst="rect">
             <a:avLst/>
@@ -3507,76 +6675,21 @@
           <a:bodyPr wrap="square" rtlCol="0" anchor="ctr"/>
           <a:lstStyle/>
           <a:p>
-            <a:pPr marL="342900" indent="-342900">
-              <a:lnSpc>
-                <a:spcPts val="2800"/>
-              </a:lnSpc>
-              <a:buSzPct val="100000"/>
-              <a:buChar char="•"/>
-            </a:pPr>
-            <a:r>
-              <a:rPr lang="en-US" sz="1600" dirty="0">
-                <a:solidFill>
-                  <a:srgbClr val="374151"/>
-                </a:solidFill>
-              </a:rPr>
-              <a:t>Main competitors</a:t>
-            </a:r>
-            <a:endParaRPr lang="en-US" sz="1600" dirty="0"/>
-          </a:p>
-          <a:p>
-            <a:pPr marL="342900" indent="-342900">
-              <a:lnSpc>
-                <a:spcPts val="2800"/>
-              </a:lnSpc>
-              <a:buSzPct val="100000"/>
-              <a:buChar char="•"/>
-            </a:pPr>
-            <a:r>
-              <a:rPr lang="en-US" sz="1600" dirty="0">
-                <a:solidFill>
-                  <a:srgbClr val="374151"/>
-                </a:solidFill>
-              </a:rPr>
-              <a:t>Your differentiation</a:t>
-            </a:r>
-            <a:endParaRPr lang="en-US" sz="1600" dirty="0"/>
-          </a:p>
-          <a:p>
-            <a:pPr marL="342900" indent="-342900">
-              <a:lnSpc>
-                <a:spcPts val="2800"/>
-              </a:lnSpc>
-              <a:buSzPct val="100000"/>
-              <a:buChar char="•"/>
-            </a:pPr>
-            <a:r>
-              <a:rPr lang="en-US" sz="1600" dirty="0">
-                <a:solidFill>
-                  <a:srgbClr val="374151"/>
-                </a:solidFill>
-              </a:rPr>
-              <a:t>Competitive advantages</a:t>
-            </a:r>
-            <a:endParaRPr lang="en-US" sz="1600" dirty="0"/>
-          </a:p>
-          <a:p>
-            <a:pPr marL="342900" indent="-342900">
-              <a:lnSpc>
-                <a:spcPts val="2800"/>
-              </a:lnSpc>
-              <a:buSzPct val="100000"/>
-              <a:buChar char="•"/>
-            </a:pPr>
-            <a:r>
-              <a:rPr lang="en-US" sz="1600" dirty="0">
-                <a:solidFill>
-                  <a:srgbClr val="374151"/>
-                </a:solidFill>
-              </a:rPr>
-              <a:t>Market positioning</a:t>
-            </a:r>
-            <a:endParaRPr lang="en-US" sz="1600" dirty="0"/>
+            <a:pPr algn="r" indent="0" marL="0">
+              <a:buNone/>
+            </a:pPr>
+            <a:r>
+              <a:rPr lang="en-US" sz="1000" dirty="0">
+                <a:solidFill>
+                  <a:srgbClr val="6B7280"/>
+                </a:solidFill>
+                <a:latin typeface="Calibri" pitchFamily="34" charset="0"/>
+                <a:ea typeface="Calibri" pitchFamily="34" charset="-122"/>
+                <a:cs typeface="Calibri" pitchFamily="34" charset="-120"/>
+              </a:rPr>
+              <a:t>9</a:t>
+            </a:r>
+            <a:endParaRPr lang="en-US" sz="1000" dirty="0"/>
           </a:p>
         </p:txBody>
       </p:sp>
